--- a/research/headcount/ppt/SKI계열_Cold_Eye_Review.pptx
+++ b/research/headcount/ppt/SKI계열_Cold_Eye_Review.pptx
@@ -211,7 +211,7 @@
             <c:idx val="0"/>
             <c:spPr>
               <a:solidFill>
-                <a:srgbClr val="002060"/>
+                <a:srgbClr val="215F9A"/>
               </a:solidFill>
             </c:spPr>
           </c:dPt>
@@ -219,7 +219,7 @@
             <c:idx val="1"/>
             <c:spPr>
               <a:solidFill>
-                <a:srgbClr val="002060"/>
+                <a:srgbClr val="215F9A"/>
               </a:solidFill>
             </c:spPr>
           </c:dPt>
@@ -227,7 +227,7 @@
             <c:idx val="2"/>
             <c:spPr>
               <a:solidFill>
-                <a:srgbClr val="629DD1"/>
+                <a:srgbClr val="A1C4E3"/>
               </a:solidFill>
             </c:spPr>
           </c:dPt>
@@ -235,7 +235,7 @@
             <c:idx val="3"/>
             <c:spPr>
               <a:solidFill>
-                <a:srgbClr val="629DD1"/>
+                <a:srgbClr val="A1C4E3"/>
               </a:solidFill>
             </c:spPr>
           </c:dPt>
@@ -243,7 +243,7 @@
             <c:idx val="4"/>
             <c:spPr>
               <a:solidFill>
-                <a:srgbClr val="A6A6A6"/>
+                <a:srgbClr val="BFBFBF"/>
               </a:solidFill>
             </c:spPr>
           </c:dPt>
@@ -304,7 +304,7 @@
               <a:pPr>
                 <a:defRPr sz="1000">
                   <a:solidFill>
-                    <a:srgbClr val="1A1A1A"/>
+                    <a:srgbClr val="000000"/>
                   </a:solidFill>
                   <a:latin typeface="나눔스퀘어 Bold"/>
                 </a:defRPr>
@@ -337,7 +337,7 @@
         <c:spPr>
           <a:ln>
             <a:solidFill>
-              <a:srgbClr val="BFBFBF"/>
+              <a:srgbClr val="A6A6A6"/>
             </a:solidFill>
           </a:ln>
         </c:spPr>
@@ -348,7 +348,7 @@
             <a:pPr>
               <a:defRPr sz="950">
                 <a:solidFill>
-                  <a:srgbClr val="1A1A1A"/>
+                  <a:srgbClr val="000000"/>
                 </a:solidFill>
                 <a:latin typeface="나눔스퀘어"/>
               </a:defRPr>
@@ -423,7 +423,7 @@
             <c:idx val="0"/>
             <c:spPr>
               <a:solidFill>
-                <a:srgbClr val="002060"/>
+                <a:srgbClr val="215F9A"/>
               </a:solidFill>
             </c:spPr>
           </c:dPt>
@@ -431,7 +431,7 @@
             <c:idx val="1"/>
             <c:spPr>
               <a:solidFill>
-                <a:srgbClr val="629DD1"/>
+                <a:srgbClr val="A1C4E3"/>
               </a:solidFill>
             </c:spPr>
           </c:dPt>
@@ -439,7 +439,7 @@
             <c:idx val="2"/>
             <c:spPr>
               <a:solidFill>
-                <a:srgbClr val="629DD1"/>
+                <a:srgbClr val="A1C4E3"/>
               </a:solidFill>
             </c:spPr>
           </c:dPt>
@@ -447,7 +447,7 @@
             <c:idx val="3"/>
             <c:spPr>
               <a:solidFill>
-                <a:srgbClr val="A6A6A6"/>
+                <a:srgbClr val="BFBFBF"/>
               </a:solidFill>
             </c:spPr>
           </c:dPt>
@@ -516,7 +516,7 @@
               <a:pPr>
                 <a:defRPr sz="1000">
                   <a:solidFill>
-                    <a:srgbClr val="1A1A1A"/>
+                    <a:srgbClr val="000000"/>
                   </a:solidFill>
                   <a:latin typeface="나눔스퀘어 Bold"/>
                 </a:defRPr>
@@ -549,7 +549,7 @@
         <c:spPr>
           <a:ln>
             <a:solidFill>
-              <a:srgbClr val="BFBFBF"/>
+              <a:srgbClr val="A6A6A6"/>
             </a:solidFill>
           </a:ln>
         </c:spPr>
@@ -560,7 +560,7 @@
             <a:pPr>
               <a:defRPr sz="950">
                 <a:solidFill>
-                  <a:srgbClr val="1A1A1A"/>
+                  <a:srgbClr val="000000"/>
                 </a:solidFill>
                 <a:latin typeface="나눔스퀘어"/>
               </a:defRPr>
@@ -2050,7 +2050,7 @@
             <a:r>
               <a:rPr sz="1200" b="0" i="0" spc="-30">
                 <a:solidFill>
-                  <a:srgbClr val="1A1A1A"/>
+                  <a:srgbClr val="000000"/>
                 </a:solidFill>
                 <a:latin typeface="나눔스퀘어"/>
                 <a:ea typeface="나눔스퀘어"/>
@@ -2070,7 +2070,7 @@
             <a:r>
               <a:rPr sz="1200" b="0" i="0" spc="-30">
                 <a:solidFill>
-                  <a:srgbClr val="1A1A1A"/>
+                  <a:srgbClr val="000000"/>
                 </a:solidFill>
                 <a:latin typeface="나눔스퀘어"/>
                 <a:ea typeface="나눔스퀘어"/>
@@ -2090,7 +2090,7 @@
             <a:r>
               <a:rPr sz="1100" b="0" i="0" spc="-30">
                 <a:solidFill>
-                  <a:srgbClr val="1A1A1A"/>
+                  <a:srgbClr val="000000"/>
                 </a:solidFill>
                 <a:latin typeface="나눔스퀘어"/>
                 <a:ea typeface="나눔스퀘어"/>
@@ -2110,7 +2110,7 @@
             <a:r>
               <a:rPr sz="1200" b="0" i="0" spc="-30">
                 <a:solidFill>
-                  <a:srgbClr val="1A1A1A"/>
+                  <a:srgbClr val="000000"/>
                 </a:solidFill>
                 <a:latin typeface="나눔스퀘어"/>
                 <a:ea typeface="나눔스퀘어"/>
@@ -2149,7 +2149,7 @@
             <a:r>
               <a:rPr sz="1100" b="0" i="0" spc="-30">
                 <a:solidFill>
-                  <a:srgbClr val="1A1A1A"/>
+                  <a:srgbClr val="000000"/>
                 </a:solidFill>
                 <a:latin typeface="나눔스퀘어"/>
                 <a:ea typeface="나눔스퀘어"/>
@@ -2188,7 +2188,7 @@
             <a:r>
               <a:rPr sz="850" b="0" i="0" spc="-30">
                 <a:solidFill>
-                  <a:srgbClr val="7F7F7F"/>
+                  <a:srgbClr val="808080"/>
                 </a:solidFill>
                 <a:latin typeface="나눔스퀘어"/>
                 <a:ea typeface="나눔스퀘어"/>
@@ -2201,40 +2201,24 @@
       </p:sp>
       <p:sp>
         <p:nvSpPr>
-          <p:cNvPr id="7" name="Page number"/>
-          <p:cNvSpPr txBox="1"/>
-          <p:nvPr/>
-        </p:nvSpPr>
-        <p:spPr>
-          <a:xfrm>
-            <a:off x="9326880" y="6519672"/>
-            <a:ext cx="457200" cy="228600"/>
-          </a:xfrm>
-          <a:prstGeom prst="rect">
-            <a:avLst/>
-          </a:prstGeom>
-          <a:noFill/>
-        </p:spPr>
-        <p:txBody>
-          <a:bodyPr wrap="square" anchor="t" lIns="36576" rIns="36576" tIns="36576" bIns="36576">
-            <a:spAutoFit/>
-          </a:bodyPr>
-          <a:lstStyle/>
-          <a:p>
-            <a:pPr algn="r">
-              <a:buNone/>
-            </a:pPr>
-            <a:r>
-              <a:rPr sz="800" b="0" i="0" spc="-30">
-                <a:solidFill>
-                  <a:srgbClr val="7F7F7F"/>
-                </a:solidFill>
-                <a:latin typeface="나눔스퀘어"/>
-                <a:ea typeface="나눔스퀘어"/>
-                <a:cs typeface="나눔스퀘어"/>
-              </a:rPr>
-              <a:t>1</a:t>
-            </a:r>
+          <p:cNvPr id="6" name="Slide Number Placeholder 5"/>
+          <p:cNvSpPr>
+            <a:spLocks noGrp="1"/>
+          </p:cNvSpPr>
+          <p:nvPr>
+            <p:ph type="sldNum" sz="quarter" idx="12"/>
+          </p:nvPr>
+        </p:nvSpPr>
+        <p:spPr/>
+        <p:txBody>
+          <a:bodyPr/>
+          <a:lstStyle/>
+          <a:p>
+            <a:fld id="{C0166AD1-3E4E-49AB-A7F9-67C30DF503DC}" type="slidenum">
+              <a:rPr lang="ko-KR" altLang="en-US" smtClean="0"/>
+              <a:t>‹#›</a:t>
+            </a:fld>
+            <a:endParaRPr lang="ko-KR" altLang="en-US"/>
           </a:p>
         </p:txBody>
       </p:sp>
@@ -2378,40 +2362,24 @@
       </p:sp>
       <p:sp>
         <p:nvSpPr>
-          <p:cNvPr id="5" name="Page number"/>
-          <p:cNvSpPr txBox="1"/>
-          <p:nvPr/>
-        </p:nvSpPr>
-        <p:spPr>
-          <a:xfrm>
-            <a:off x="9326880" y="6519672"/>
-            <a:ext cx="457200" cy="228600"/>
-          </a:xfrm>
-          <a:prstGeom prst="rect">
-            <a:avLst/>
-          </a:prstGeom>
-          <a:noFill/>
-        </p:spPr>
-        <p:txBody>
-          <a:bodyPr wrap="square" anchor="t" lIns="36576" rIns="36576" tIns="36576" bIns="36576">
-            <a:spAutoFit/>
-          </a:bodyPr>
-          <a:lstStyle/>
-          <a:p>
-            <a:pPr algn="r">
-              <a:buNone/>
-            </a:pPr>
-            <a:r>
-              <a:rPr sz="800" b="0" i="0" spc="-30">
-                <a:solidFill>
-                  <a:srgbClr val="7F7F7F"/>
-                </a:solidFill>
-                <a:latin typeface="나눔스퀘어"/>
-                <a:ea typeface="나눔스퀘어"/>
-                <a:cs typeface="나눔스퀘어"/>
-              </a:rPr>
-              <a:t>10</a:t>
-            </a:r>
+          <p:cNvPr id="6" name="Slide Number Placeholder 5"/>
+          <p:cNvSpPr>
+            <a:spLocks noGrp="1"/>
+          </p:cNvSpPr>
+          <p:nvPr>
+            <p:ph type="sldNum" sz="quarter" idx="12"/>
+          </p:nvPr>
+        </p:nvSpPr>
+        <p:spPr/>
+        <p:txBody>
+          <a:bodyPr/>
+          <a:lstStyle/>
+          <a:p>
+            <a:fld id="{C0166AD1-3E4E-49AB-A7F9-67C30DF503DC}" type="slidenum">
+              <a:rPr lang="ko-KR" altLang="en-US" smtClean="0"/>
+              <a:t>‹#›</a:t>
+            </a:fld>
+            <a:endParaRPr lang="ko-KR" altLang="en-US"/>
           </a:p>
         </p:txBody>
       </p:sp>
@@ -2441,7 +2409,7 @@
         </p:nvSpPr>
         <p:spPr>
           <a:xfrm>
-            <a:off x="274320" y="201168"/>
+            <a:off x="274320" y="182880"/>
             <a:ext cx="8961120" cy="384048"/>
           </a:xfrm>
           <a:prstGeom prst="rect">
@@ -2450,7 +2418,7 @@
           <a:noFill/>
         </p:spPr>
         <p:txBody>
-          <a:bodyPr wrap="square" anchor="t" lIns="36576" rIns="36576" tIns="36576" bIns="36576">
+          <a:bodyPr wrap="square" anchor="t" lIns="0" rIns="0" tIns="0" bIns="0">
             <a:spAutoFit/>
           </a:bodyPr>
           <a:lstStyle/>
@@ -2461,33 +2429,33 @@
             <a:r>
               <a:rPr sz="1800" b="0" i="0" spc="-30">
                 <a:solidFill>
-                  <a:srgbClr val="A6A6A6"/>
-                </a:solidFill>
-                <a:latin typeface="나눔스퀘어"/>
-                <a:ea typeface="나눔스퀘어"/>
-                <a:cs typeface="나눔스퀘어"/>
-              </a:rPr>
-              <a:t>그룹 재무 및 시사점</a:t>
+                  <a:srgbClr val="808080"/>
+                </a:solidFill>
+                <a:latin typeface="나눔스퀘어 ExtraBold"/>
+                <a:ea typeface="나눔스퀘어 ExtraBold"/>
+                <a:cs typeface="나눔스퀘어 ExtraBold"/>
+              </a:rPr>
+              <a:t>그룹 재무 및 시사점  </a:t>
             </a:r>
             <a:r>
               <a:rPr sz="1800" b="0" i="0" spc="-30">
                 <a:solidFill>
-                  <a:srgbClr val="1A1A1A"/>
-                </a:solidFill>
-                <a:latin typeface="나눔스퀘어"/>
-                <a:ea typeface="나눔스퀘어"/>
-                <a:cs typeface="나눔스퀘어"/>
-              </a:rPr>
-              <a:t>   |   </a:t>
+                  <a:srgbClr val="000000"/>
+                </a:solidFill>
+                <a:latin typeface="나눔스퀘어 ExtraBold"/>
+                <a:ea typeface="나눔스퀘어 ExtraBold"/>
+                <a:cs typeface="나눔스퀘어 ExtraBold"/>
+              </a:rPr>
+              <a:t>|  </a:t>
             </a:r>
             <a:r>
               <a:rPr sz="1800" b="0" i="0" spc="-30">
                 <a:solidFill>
-                  <a:srgbClr val="1A1A1A"/>
-                </a:solidFill>
-                <a:latin typeface="나눔스퀘어"/>
-                <a:ea typeface="나눔스퀘어"/>
-                <a:cs typeface="나눔스퀘어"/>
+                  <a:srgbClr val="000000"/>
+                </a:solidFill>
+                <a:latin typeface="나눔스퀘어 ExtraBold"/>
+                <a:ea typeface="나눔스퀘어 ExtraBold"/>
+                <a:cs typeface="나눔스퀘어 ExtraBold"/>
               </a:rPr>
               <a:t>06  그룹 재무</a:t>
             </a:r>
@@ -2522,7 +2490,7 @@
             <a:r>
               <a:rPr sz="1400" b="1" i="0" spc="-30">
                 <a:solidFill>
-                  <a:srgbClr val="1A1A1A"/>
+                  <a:srgbClr val="000000"/>
                 </a:solidFill>
                 <a:latin typeface="나눔스퀘어 ExtraBold"/>
                 <a:ea typeface="나눔스퀘어 ExtraBold"/>
@@ -2561,7 +2529,7 @@
             <a:r>
               <a:rPr sz="1300" b="1" i="0" spc="-30">
                 <a:solidFill>
-                  <a:srgbClr val="1A1A1A"/>
+                  <a:srgbClr val="000000"/>
                 </a:solidFill>
                 <a:latin typeface="나눔스퀘어 ExtraBold"/>
                 <a:ea typeface="나눔스퀘어 ExtraBold"/>
@@ -2588,7 +2556,7 @@
           </a:prstGeom>
           <a:ln w="12700">
             <a:solidFill>
-              <a:srgbClr val="BFBFBF"/>
+              <a:srgbClr val="A6A6A6"/>
             </a:solidFill>
           </a:ln>
         </p:spPr>
@@ -2635,7 +2603,7 @@
             <a:r>
               <a:rPr sz="1300" b="1" i="0" spc="-30">
                 <a:solidFill>
-                  <a:srgbClr val="1A1A1A"/>
+                  <a:srgbClr val="000000"/>
                 </a:solidFill>
                 <a:latin typeface="나눔스퀘어 ExtraBold"/>
                 <a:ea typeface="나눔스퀘어 ExtraBold"/>
@@ -2662,7 +2630,7 @@
           </a:prstGeom>
           <a:ln w="12700">
             <a:solidFill>
-              <a:srgbClr val="BFBFBF"/>
+              <a:srgbClr val="A6A6A6"/>
             </a:solidFill>
           </a:ln>
         </p:spPr>
@@ -2751,7 +2719,7 @@
             <a:r>
               <a:rPr sz="1700" b="1" i="0" spc="-30">
                 <a:solidFill>
-                  <a:srgbClr val="C0392B"/>
+                  <a:srgbClr val="C00000"/>
                 </a:solidFill>
                 <a:latin typeface="나눔스퀘어 ExtraBold"/>
                 <a:ea typeface="나눔스퀘어 ExtraBold"/>
@@ -2790,7 +2758,7 @@
             <a:r>
               <a:rPr sz="850" b="0" i="0" spc="-30">
                 <a:solidFill>
-                  <a:srgbClr val="7F7F7F"/>
+                  <a:srgbClr val="595959"/>
                 </a:solidFill>
                 <a:latin typeface="나눔스퀘어"/>
                 <a:ea typeface="나눔스퀘어"/>
@@ -2871,7 +2839,7 @@
             <a:r>
               <a:rPr sz="1700" b="1" i="0" spc="-30">
                 <a:solidFill>
-                  <a:srgbClr val="002060"/>
+                  <a:srgbClr val="215F9A"/>
                 </a:solidFill>
                 <a:latin typeface="나눔스퀘어 ExtraBold"/>
                 <a:ea typeface="나눔스퀘어 ExtraBold"/>
@@ -2910,7 +2878,7 @@
             <a:r>
               <a:rPr sz="850" b="0" i="0" spc="-30">
                 <a:solidFill>
-                  <a:srgbClr val="7F7F7F"/>
+                  <a:srgbClr val="595959"/>
                 </a:solidFill>
                 <a:latin typeface="나눔스퀘어"/>
                 <a:ea typeface="나눔스퀘어"/>
@@ -2991,7 +2959,7 @@
             <a:r>
               <a:rPr sz="1700" b="1" i="0" spc="-30">
                 <a:solidFill>
-                  <a:srgbClr val="C0392B"/>
+                  <a:srgbClr val="C00000"/>
                 </a:solidFill>
                 <a:latin typeface="나눔스퀘어 ExtraBold"/>
                 <a:ea typeface="나눔스퀘어 ExtraBold"/>
@@ -3030,7 +2998,7 @@
             <a:r>
               <a:rPr sz="850" b="0" i="0" spc="-30">
                 <a:solidFill>
-                  <a:srgbClr val="7F7F7F"/>
+                  <a:srgbClr val="595959"/>
                 </a:solidFill>
                 <a:latin typeface="나눔스퀘어"/>
                 <a:ea typeface="나눔스퀘어"/>
@@ -3050,11 +3018,11 @@
         <p:spPr>
           <a:xfrm>
             <a:off x="274320" y="2697480"/>
-            <a:ext cx="1234440" cy="237744"/>
+            <a:ext cx="1234440" cy="219456"/>
           </a:xfrm>
           <a:prstGeom prst="roundRect">
             <a:avLst>
-              <a:gd name="adj" fmla="val 50000"/>
+              <a:gd name="adj" fmla="val 19092"/>
             </a:avLst>
           </a:prstGeom>
           <a:solidFill>
@@ -3062,7 +3030,7 @@
           </a:solidFill>
           <a:ln w="9525">
             <a:solidFill>
-              <a:srgbClr val="A6A6A6"/>
+              <a:srgbClr val="BFBFBF"/>
             </a:solidFill>
           </a:ln>
           <a:effectLst/>
@@ -3096,7 +3064,7 @@
         <p:spPr>
           <a:xfrm>
             <a:off x="274320" y="2697480"/>
-            <a:ext cx="1234440" cy="237744"/>
+            <a:ext cx="1234440" cy="219456"/>
           </a:xfrm>
           <a:prstGeom prst="rect">
             <a:avLst/>
@@ -3115,7 +3083,7 @@
             <a:r>
               <a:rPr sz="950" b="1" i="0" spc="-30">
                 <a:solidFill>
-                  <a:srgbClr val="1A1A1A"/>
+                  <a:srgbClr val="404040"/>
                 </a:solidFill>
                 <a:latin typeface="나눔스퀘어 Bold"/>
                 <a:ea typeface="나눔스퀘어 Bold"/>
@@ -3158,7 +3126,7 @@
             <a:r>
               <a:rPr sz="1100" b="0" i="0" spc="-30">
                 <a:solidFill>
-                  <a:srgbClr val="1A1A1A"/>
+                  <a:srgbClr val="000000"/>
                 </a:solidFill>
                 <a:latin typeface="나눔스퀘어"/>
                 <a:ea typeface="나눔스퀘어"/>
@@ -3177,7 +3145,7 @@
             <a:r>
               <a:rPr sz="800" b="0" i="0" spc="-30">
                 <a:solidFill>
-                  <a:srgbClr val="7F7F7F"/>
+                  <a:srgbClr val="808080"/>
                 </a:solidFill>
                 <a:latin typeface="나눔스퀘어"/>
                 <a:ea typeface="나눔스퀘어"/>
@@ -3197,7 +3165,7 @@
             <a:r>
               <a:rPr sz="1100" b="0" i="0" spc="-30">
                 <a:solidFill>
-                  <a:srgbClr val="1A1A1A"/>
+                  <a:srgbClr val="000000"/>
                 </a:solidFill>
                 <a:latin typeface="나눔스퀘어"/>
                 <a:ea typeface="나눔스퀘어"/>
@@ -3216,7 +3184,7 @@
             <a:r>
               <a:rPr sz="800" b="0" i="0" spc="-30">
                 <a:solidFill>
-                  <a:srgbClr val="7F7F7F"/>
+                  <a:srgbClr val="808080"/>
                 </a:solidFill>
                 <a:latin typeface="나눔스퀘어"/>
                 <a:ea typeface="나눔스퀘어"/>
@@ -3236,7 +3204,7 @@
             <a:r>
               <a:rPr sz="1100" b="0" i="0" spc="-30">
                 <a:solidFill>
-                  <a:srgbClr val="1A1A1A"/>
+                  <a:srgbClr val="000000"/>
                 </a:solidFill>
                 <a:latin typeface="나눔스퀘어"/>
                 <a:ea typeface="나눔스퀘어"/>
@@ -3255,7 +3223,7 @@
             <a:r>
               <a:rPr sz="800" b="0" i="0" spc="-30">
                 <a:solidFill>
-                  <a:srgbClr val="7F7F7F"/>
+                  <a:srgbClr val="808080"/>
                 </a:solidFill>
                 <a:latin typeface="나눔스퀘어"/>
                 <a:ea typeface="나눔스퀘어"/>
@@ -3281,7 +3249,7 @@
             <a:avLst/>
           </a:prstGeom>
           <a:solidFill>
-            <a:srgbClr val="DEEBF7"/>
+            <a:srgbClr val="DCEAF7"/>
           </a:solidFill>
           <a:ln>
             <a:noFill/>
@@ -3336,7 +3304,7 @@
             <a:r>
               <a:rPr sz="1150" b="1" i="0" spc="-30">
                 <a:solidFill>
-                  <a:srgbClr val="002060"/>
+                  <a:srgbClr val="215F9A"/>
                 </a:solidFill>
                 <a:latin typeface="나눔스퀘어 Bold"/>
                 <a:ea typeface="나눔스퀘어 Bold"/>
@@ -3356,15 +3324,15 @@
         <p:spPr>
           <a:xfrm>
             <a:off x="5074920" y="1783080"/>
-            <a:ext cx="1234440" cy="237744"/>
+            <a:ext cx="1234440" cy="219456"/>
           </a:xfrm>
           <a:prstGeom prst="roundRect">
             <a:avLst>
-              <a:gd name="adj" fmla="val 50000"/>
+              <a:gd name="adj" fmla="val 16667"/>
             </a:avLst>
           </a:prstGeom>
           <a:solidFill>
-            <a:srgbClr val="002060"/>
+            <a:srgbClr val="215F9A"/>
           </a:solidFill>
           <a:ln>
             <a:noFill/>
@@ -3400,7 +3368,7 @@
         <p:spPr>
           <a:xfrm>
             <a:off x="5074920" y="1783080"/>
-            <a:ext cx="1234440" cy="237744"/>
+            <a:ext cx="1234440" cy="219456"/>
           </a:xfrm>
           <a:prstGeom prst="rect">
             <a:avLst/>
@@ -3463,7 +3431,7 @@
                       <a:r>
                         <a:rPr sz="1000" b="1" i="0" spc="-30">
                           <a:solidFill>
-                            <a:srgbClr val="1A1A1A"/>
+                            <a:srgbClr val="000000"/>
                           </a:solidFill>
                           <a:latin typeface="나눔스퀘어 Bold"/>
                           <a:ea typeface="나눔스퀘어 Bold"/>
@@ -3500,7 +3468,7 @@
                   </a:txBody>
                   <a:tcPr marL="45720" marR="45720" marT="18288" marB="18288" anchor="ctr">
                     <a:solidFill>
-                      <a:srgbClr val="002060"/>
+                      <a:srgbClr val="215F9A"/>
                     </a:solidFill>
                   </a:tcPr>
                 </a:tc>
@@ -3513,7 +3481,7 @@
                       <a:r>
                         <a:rPr sz="950" b="0" i="0" spc="-30">
                           <a:solidFill>
-                            <a:srgbClr val="1A1A1A"/>
+                            <a:srgbClr val="000000"/>
                           </a:solidFill>
                           <a:latin typeface="나눔스퀘어"/>
                           <a:ea typeface="나눔스퀘어"/>
@@ -3540,7 +3508,7 @@
                       <a:r>
                         <a:rPr sz="1000" b="1" i="0" spc="-30">
                           <a:solidFill>
-                            <a:srgbClr val="1A1A1A"/>
+                            <a:srgbClr val="000000"/>
                           </a:solidFill>
                           <a:latin typeface="나눔스퀘어 Bold"/>
                           <a:ea typeface="나눔스퀘어 Bold"/>
@@ -3577,7 +3545,7 @@
                   </a:txBody>
                   <a:tcPr marL="45720" marR="45720" marT="18288" marB="18288" anchor="ctr">
                     <a:solidFill>
-                      <a:srgbClr val="002060"/>
+                      <a:srgbClr val="215F9A"/>
                     </a:solidFill>
                   </a:tcPr>
                 </a:tc>
@@ -3590,7 +3558,7 @@
                       <a:r>
                         <a:rPr sz="950" b="0" i="0" spc="-30">
                           <a:solidFill>
-                            <a:srgbClr val="1A1A1A"/>
+                            <a:srgbClr val="000000"/>
                           </a:solidFill>
                           <a:latin typeface="나눔스퀘어"/>
                           <a:ea typeface="나눔스퀘어"/>
@@ -3617,7 +3585,7 @@
                       <a:r>
                         <a:rPr sz="1000" b="1" i="0" spc="-30">
                           <a:solidFill>
-                            <a:srgbClr val="1A1A1A"/>
+                            <a:srgbClr val="000000"/>
                           </a:solidFill>
                           <a:latin typeface="나눔스퀘어 Bold"/>
                           <a:ea typeface="나눔스퀘어 Bold"/>
@@ -3642,7 +3610,7 @@
                       <a:r>
                         <a:rPr sz="900" b="1" i="0" spc="-30">
                           <a:solidFill>
-                            <a:srgbClr val="1A1A1A"/>
+                            <a:srgbClr val="000000"/>
                           </a:solidFill>
                           <a:latin typeface="나눔스퀘어 Bold"/>
                           <a:ea typeface="나눔스퀘어 Bold"/>
@@ -3667,7 +3635,7 @@
                       <a:r>
                         <a:rPr sz="950" b="0" i="0" spc="-30">
                           <a:solidFill>
-                            <a:srgbClr val="1A1A1A"/>
+                            <a:srgbClr val="000000"/>
                           </a:solidFill>
                           <a:latin typeface="나눔스퀘어"/>
                           <a:ea typeface="나눔스퀘어"/>
@@ -3694,7 +3662,7 @@
                       <a:r>
                         <a:rPr sz="1000" b="1" i="0" spc="-30">
                           <a:solidFill>
-                            <a:srgbClr val="1A1A1A"/>
+                            <a:srgbClr val="000000"/>
                           </a:solidFill>
                           <a:latin typeface="나눔스퀘어 Bold"/>
                           <a:ea typeface="나눔스퀘어 Bold"/>
@@ -3731,7 +3699,7 @@
                   </a:txBody>
                   <a:tcPr marL="45720" marR="45720" marT="18288" marB="18288" anchor="ctr">
                     <a:solidFill>
-                      <a:srgbClr val="F26B43"/>
+                      <a:srgbClr val="C00000"/>
                     </a:solidFill>
                   </a:tcPr>
                 </a:tc>
@@ -3744,7 +3712,7 @@
                       <a:r>
                         <a:rPr sz="950" b="0" i="0" spc="-30">
                           <a:solidFill>
-                            <a:srgbClr val="1A1A1A"/>
+                            <a:srgbClr val="000000"/>
                           </a:solidFill>
                           <a:latin typeface="나눔스퀘어"/>
                           <a:ea typeface="나눔스퀘어"/>
@@ -3774,15 +3742,15 @@
         <p:spPr>
           <a:xfrm>
             <a:off x="5074920" y="4142232"/>
-            <a:ext cx="1234440" cy="237744"/>
+            <a:ext cx="1234440" cy="219456"/>
           </a:xfrm>
           <a:prstGeom prst="roundRect">
             <a:avLst>
-              <a:gd name="adj" fmla="val 50000"/>
+              <a:gd name="adj" fmla="val 16667"/>
             </a:avLst>
           </a:prstGeom>
           <a:solidFill>
-            <a:srgbClr val="002060"/>
+            <a:srgbClr val="215F9A"/>
           </a:solidFill>
           <a:ln>
             <a:noFill/>
@@ -3818,7 +3786,7 @@
         <p:spPr>
           <a:xfrm>
             <a:off x="5074920" y="4142232"/>
-            <a:ext cx="1234440" cy="237744"/>
+            <a:ext cx="1234440" cy="219456"/>
           </a:xfrm>
           <a:prstGeom prst="rect">
             <a:avLst/>
@@ -3879,7 +3847,7 @@
             <a:r>
               <a:rPr sz="1050" b="1" i="0" spc="-30">
                 <a:solidFill>
-                  <a:srgbClr val="002060"/>
+                  <a:srgbClr val="215F9A"/>
                 </a:solidFill>
                 <a:latin typeface="나눔스퀘어 ExtraBold"/>
                 <a:ea typeface="나눔스퀘어 ExtraBold"/>
@@ -3890,7 +3858,7 @@
             <a:r>
               <a:rPr sz="1050" b="0" i="0" spc="-30">
                 <a:solidFill>
-                  <a:srgbClr val="1A1A1A"/>
+                  <a:srgbClr val="000000"/>
                 </a:solidFill>
                 <a:latin typeface="나눔스퀘어"/>
                 <a:ea typeface="나눔스퀘어"/>
@@ -3909,7 +3877,7 @@
             <a:r>
               <a:rPr sz="1050" b="1" i="0" spc="-30">
                 <a:solidFill>
-                  <a:srgbClr val="002060"/>
+                  <a:srgbClr val="215F9A"/>
                 </a:solidFill>
                 <a:latin typeface="나눔스퀘어 ExtraBold"/>
                 <a:ea typeface="나눔스퀘어 ExtraBold"/>
@@ -3920,7 +3888,7 @@
             <a:r>
               <a:rPr sz="1050" b="0" i="0" spc="-30">
                 <a:solidFill>
-                  <a:srgbClr val="1A1A1A"/>
+                  <a:srgbClr val="000000"/>
                 </a:solidFill>
                 <a:latin typeface="나눔스퀘어"/>
                 <a:ea typeface="나눔스퀘어"/>
@@ -3939,7 +3907,7 @@
             <a:r>
               <a:rPr sz="1050" b="1" i="0" spc="-30">
                 <a:solidFill>
-                  <a:srgbClr val="002060"/>
+                  <a:srgbClr val="215F9A"/>
                 </a:solidFill>
                 <a:latin typeface="나눔스퀘어 ExtraBold"/>
                 <a:ea typeface="나눔스퀘어 ExtraBold"/>
@@ -3950,7 +3918,7 @@
             <a:r>
               <a:rPr sz="1050" b="0" i="0" spc="-30">
                 <a:solidFill>
-                  <a:srgbClr val="1A1A1A"/>
+                  <a:srgbClr val="000000"/>
                 </a:solidFill>
                 <a:latin typeface="나눔스퀘어"/>
                 <a:ea typeface="나눔스퀘어"/>
@@ -3976,7 +3944,7 @@
             <a:avLst/>
           </a:prstGeom>
           <a:solidFill>
-            <a:srgbClr val="002060"/>
+            <a:srgbClr val="215F9A"/>
           </a:solidFill>
           <a:ln>
             <a:noFill/>
@@ -4034,7 +4002,7 @@
             <a:r>
               <a:rPr sz="900" b="1" i="0" spc="-30">
                 <a:solidFill>
-                  <a:srgbClr val="BFCFE8"/>
+                  <a:srgbClr val="DCEAF7"/>
                 </a:solidFill>
                 <a:latin typeface="나눔스퀘어 Bold"/>
                 <a:ea typeface="나눔스퀘어 Bold"/>
@@ -4069,8 +4037,8 @@
         </p:nvSpPr>
         <p:spPr>
           <a:xfrm>
-            <a:off x="274320" y="6492240"/>
-            <a:ext cx="8778240" cy="256032"/>
+            <a:off x="274320" y="6382512"/>
+            <a:ext cx="6583680" cy="365760"/>
           </a:xfrm>
           <a:prstGeom prst="rect">
             <a:avLst/>
@@ -4078,7 +4046,7 @@
           <a:noFill/>
         </p:spPr>
         <p:txBody>
-          <a:bodyPr wrap="square" anchor="t" lIns="36576" rIns="36576" tIns="36576" bIns="36576">
+          <a:bodyPr wrap="square" anchor="b" lIns="36576" rIns="36576" tIns="36576" bIns="36576">
             <a:spAutoFit/>
           </a:bodyPr>
           <a:lstStyle/>
@@ -4089,7 +4057,7 @@
             <a:r>
               <a:rPr sz="750" b="0" i="0" spc="-30">
                 <a:solidFill>
-                  <a:srgbClr val="7F7F7F"/>
+                  <a:srgbClr val="808080"/>
                 </a:solidFill>
                 <a:latin typeface="나눔스퀘어"/>
                 <a:ea typeface="나눔스퀘어"/>
@@ -4102,40 +4070,24 @@
       </p:sp>
       <p:sp>
         <p:nvSpPr>
-          <p:cNvPr id="31" name="Page number"/>
-          <p:cNvSpPr txBox="1"/>
-          <p:nvPr/>
-        </p:nvSpPr>
-        <p:spPr>
-          <a:xfrm>
-            <a:off x="9326880" y="6519672"/>
-            <a:ext cx="457200" cy="228600"/>
-          </a:xfrm>
-          <a:prstGeom prst="rect">
-            <a:avLst/>
-          </a:prstGeom>
-          <a:noFill/>
-        </p:spPr>
-        <p:txBody>
-          <a:bodyPr wrap="square" anchor="t" lIns="36576" rIns="36576" tIns="36576" bIns="36576">
-            <a:spAutoFit/>
-          </a:bodyPr>
-          <a:lstStyle/>
-          <a:p>
-            <a:pPr algn="r">
-              <a:buNone/>
-            </a:pPr>
-            <a:r>
-              <a:rPr sz="800" b="0" i="0" spc="-30">
-                <a:solidFill>
-                  <a:srgbClr val="7F7F7F"/>
-                </a:solidFill>
-                <a:latin typeface="나눔스퀘어"/>
-                <a:ea typeface="나눔스퀘어"/>
-                <a:cs typeface="나눔스퀘어"/>
-              </a:rPr>
-              <a:t>11</a:t>
-            </a:r>
+          <p:cNvPr id="6" name="Slide Number Placeholder 5"/>
+          <p:cNvSpPr>
+            <a:spLocks noGrp="1"/>
+          </p:cNvSpPr>
+          <p:nvPr>
+            <p:ph type="sldNum" sz="quarter" idx="12"/>
+          </p:nvPr>
+        </p:nvSpPr>
+        <p:spPr/>
+        <p:txBody>
+          <a:bodyPr/>
+          <a:lstStyle/>
+          <a:p>
+            <a:fld id="{C0166AD1-3E4E-49AB-A7F9-67C30DF503DC}" type="slidenum">
+              <a:rPr lang="ko-KR" altLang="en-US" smtClean="0"/>
+              <a:t>‹#›</a:t>
+            </a:fld>
+            <a:endParaRPr lang="ko-KR" altLang="en-US"/>
           </a:p>
         </p:txBody>
       </p:sp>
@@ -4165,7 +4117,7 @@
         </p:nvSpPr>
         <p:spPr>
           <a:xfrm>
-            <a:off x="274320" y="201168"/>
+            <a:off x="274320" y="182880"/>
             <a:ext cx="8961120" cy="384048"/>
           </a:xfrm>
           <a:prstGeom prst="rect">
@@ -4174,7 +4126,7 @@
           <a:noFill/>
         </p:spPr>
         <p:txBody>
-          <a:bodyPr wrap="square" anchor="t" lIns="36576" rIns="36576" tIns="36576" bIns="36576">
+          <a:bodyPr wrap="square" anchor="t" lIns="0" rIns="0" tIns="0" bIns="0">
             <a:spAutoFit/>
           </a:bodyPr>
           <a:lstStyle/>
@@ -4185,33 +4137,33 @@
             <a:r>
               <a:rPr sz="1800" b="0" i="0" spc="-30">
                 <a:solidFill>
-                  <a:srgbClr val="A6A6A6"/>
-                </a:solidFill>
-                <a:latin typeface="나눔스퀘어"/>
-                <a:ea typeface="나눔스퀘어"/>
-                <a:cs typeface="나눔스퀘어"/>
-              </a:rPr>
-              <a:t>그룹 재무 및 시사점</a:t>
+                  <a:srgbClr val="808080"/>
+                </a:solidFill>
+                <a:latin typeface="나눔스퀘어 ExtraBold"/>
+                <a:ea typeface="나눔스퀘어 ExtraBold"/>
+                <a:cs typeface="나눔스퀘어 ExtraBold"/>
+              </a:rPr>
+              <a:t>그룹 재무 및 시사점  </a:t>
             </a:r>
             <a:r>
               <a:rPr sz="1800" b="0" i="0" spc="-30">
                 <a:solidFill>
-                  <a:srgbClr val="1A1A1A"/>
-                </a:solidFill>
-                <a:latin typeface="나눔스퀘어"/>
-                <a:ea typeface="나눔스퀘어"/>
-                <a:cs typeface="나눔스퀘어"/>
-              </a:rPr>
-              <a:t>   |   </a:t>
+                  <a:srgbClr val="000000"/>
+                </a:solidFill>
+                <a:latin typeface="나눔스퀘어 ExtraBold"/>
+                <a:ea typeface="나눔스퀘어 ExtraBold"/>
+                <a:cs typeface="나눔스퀘어 ExtraBold"/>
+              </a:rPr>
+              <a:t>|  </a:t>
             </a:r>
             <a:r>
               <a:rPr sz="1800" b="0" i="0" spc="-30">
                 <a:solidFill>
-                  <a:srgbClr val="1A1A1A"/>
-                </a:solidFill>
-                <a:latin typeface="나눔스퀘어"/>
-                <a:ea typeface="나눔스퀘어"/>
-                <a:cs typeface="나눔스퀘어"/>
+                  <a:srgbClr val="000000"/>
+                </a:solidFill>
+                <a:latin typeface="나눔스퀘어 ExtraBold"/>
+                <a:ea typeface="나눔스퀘어 ExtraBold"/>
+                <a:cs typeface="나눔스퀘어 ExtraBold"/>
               </a:rPr>
               <a:t>다음 분기 체크포인트</a:t>
             </a:r>
@@ -4246,7 +4198,7 @@
             <a:r>
               <a:rPr sz="1400" b="1" i="0" spc="-30">
                 <a:solidFill>
-                  <a:srgbClr val="1A1A1A"/>
+                  <a:srgbClr val="000000"/>
                 </a:solidFill>
                 <a:latin typeface="나눔스퀘어 ExtraBold"/>
                 <a:ea typeface="나눔스퀘어 ExtraBold"/>
@@ -4285,7 +4237,7 @@
             <a:r>
               <a:rPr sz="1300" b="1" i="0" spc="-30">
                 <a:solidFill>
-                  <a:srgbClr val="1A1A1A"/>
+                  <a:srgbClr val="000000"/>
                 </a:solidFill>
                 <a:latin typeface="나눔스퀘어 ExtraBold"/>
                 <a:ea typeface="나눔스퀘어 ExtraBold"/>
@@ -4312,7 +4264,7 @@
           </a:prstGeom>
           <a:ln w="12700">
             <a:solidFill>
-              <a:srgbClr val="BFBFBF"/>
+              <a:srgbClr val="A6A6A6"/>
             </a:solidFill>
           </a:ln>
         </p:spPr>
@@ -4359,7 +4311,7 @@
             <a:r>
               <a:rPr sz="1300" b="1" i="0" spc="-30">
                 <a:solidFill>
-                  <a:srgbClr val="1A1A1A"/>
+                  <a:srgbClr val="000000"/>
                 </a:solidFill>
                 <a:latin typeface="나눔스퀘어 ExtraBold"/>
                 <a:ea typeface="나눔스퀘어 ExtraBold"/>
@@ -4386,7 +4338,7 @@
           </a:prstGeom>
           <a:ln w="12700">
             <a:solidFill>
-              <a:srgbClr val="BFBFBF"/>
+              <a:srgbClr val="A6A6A6"/>
             </a:solidFill>
           </a:ln>
         </p:spPr>
@@ -4407,7 +4359,7 @@
       </p:cxnSp>
       <p:sp>
         <p:nvSpPr>
-          <p:cNvPr id="8" name="Rectangle 7"/>
+          <p:cNvPr id="8" name="Rounded Rectangle 7"/>
           <p:cNvSpPr/>
           <p:nvPr/>
         </p:nvSpPr>
@@ -4416,11 +4368,13 @@
             <a:off x="274320" y="1810512"/>
             <a:ext cx="384048" cy="384048"/>
           </a:xfrm>
-          <a:prstGeom prst="rect">
-            <a:avLst/>
+          <a:prstGeom prst="roundRect">
+            <a:avLst>
+              <a:gd name="adj" fmla="val 16667"/>
+            </a:avLst>
           </a:prstGeom>
           <a:solidFill>
-            <a:srgbClr val="002060"/>
+            <a:srgbClr val="215F9A"/>
           </a:solidFill>
           <a:ln>
             <a:noFill/>
@@ -4517,7 +4471,7 @@
             <a:r>
               <a:rPr sz="1100" b="1" i="0" spc="-30">
                 <a:solidFill>
-                  <a:srgbClr val="1A1A1A"/>
+                  <a:srgbClr val="000000"/>
                 </a:solidFill>
                 <a:latin typeface="나눔스퀘어 Bold"/>
                 <a:ea typeface="나눔스퀘어 Bold"/>
@@ -4533,7 +4487,7 @@
             <a:r>
               <a:rPr sz="950" b="0" i="0" spc="-30">
                 <a:solidFill>
-                  <a:srgbClr val="7F7F7F"/>
+                  <a:srgbClr val="808080"/>
                 </a:solidFill>
                 <a:latin typeface="나눔스퀘어"/>
                 <a:ea typeface="나눔스퀘어"/>
@@ -4546,7 +4500,7 @@
       </p:sp>
       <p:sp>
         <p:nvSpPr>
-          <p:cNvPr id="11" name="Rectangle 10"/>
+          <p:cNvPr id="11" name="Rounded Rectangle 10"/>
           <p:cNvSpPr/>
           <p:nvPr/>
         </p:nvSpPr>
@@ -4555,11 +4509,13 @@
             <a:off x="274320" y="2679191"/>
             <a:ext cx="384048" cy="384048"/>
           </a:xfrm>
-          <a:prstGeom prst="rect">
-            <a:avLst/>
+          <a:prstGeom prst="roundRect">
+            <a:avLst>
+              <a:gd name="adj" fmla="val 16667"/>
+            </a:avLst>
           </a:prstGeom>
           <a:solidFill>
-            <a:srgbClr val="002060"/>
+            <a:srgbClr val="215F9A"/>
           </a:solidFill>
           <a:ln>
             <a:noFill/>
@@ -4656,7 +4612,7 @@
             <a:r>
               <a:rPr sz="1100" b="1" i="0" spc="-30">
                 <a:solidFill>
-                  <a:srgbClr val="1A1A1A"/>
+                  <a:srgbClr val="000000"/>
                 </a:solidFill>
                 <a:latin typeface="나눔스퀘어 Bold"/>
                 <a:ea typeface="나눔스퀘어 Bold"/>
@@ -4672,7 +4628,7 @@
             <a:r>
               <a:rPr sz="950" b="0" i="0" spc="-30">
                 <a:solidFill>
-                  <a:srgbClr val="7F7F7F"/>
+                  <a:srgbClr val="808080"/>
                 </a:solidFill>
                 <a:latin typeface="나눔스퀘어"/>
                 <a:ea typeface="나눔스퀘어"/>
@@ -4685,7 +4641,7 @@
       </p:sp>
       <p:sp>
         <p:nvSpPr>
-          <p:cNvPr id="14" name="Rectangle 13"/>
+          <p:cNvPr id="14" name="Rounded Rectangle 13"/>
           <p:cNvSpPr/>
           <p:nvPr/>
         </p:nvSpPr>
@@ -4694,11 +4650,13 @@
             <a:off x="274320" y="3547872"/>
             <a:ext cx="384048" cy="384048"/>
           </a:xfrm>
-          <a:prstGeom prst="rect">
-            <a:avLst/>
+          <a:prstGeom prst="roundRect">
+            <a:avLst>
+              <a:gd name="adj" fmla="val 16667"/>
+            </a:avLst>
           </a:prstGeom>
           <a:solidFill>
-            <a:srgbClr val="002060"/>
+            <a:srgbClr val="215F9A"/>
           </a:solidFill>
           <a:ln>
             <a:noFill/>
@@ -4795,7 +4753,7 @@
             <a:r>
               <a:rPr sz="1100" b="1" i="0" spc="-30">
                 <a:solidFill>
-                  <a:srgbClr val="1A1A1A"/>
+                  <a:srgbClr val="000000"/>
                 </a:solidFill>
                 <a:latin typeface="나눔스퀘어 Bold"/>
                 <a:ea typeface="나눔스퀘어 Bold"/>
@@ -4811,7 +4769,7 @@
             <a:r>
               <a:rPr sz="950" b="0" i="0" spc="-30">
                 <a:solidFill>
-                  <a:srgbClr val="7F7F7F"/>
+                  <a:srgbClr val="808080"/>
                 </a:solidFill>
                 <a:latin typeface="나눔스퀘어"/>
                 <a:ea typeface="나눔스퀘어"/>
@@ -4824,7 +4782,7 @@
       </p:sp>
       <p:sp>
         <p:nvSpPr>
-          <p:cNvPr id="17" name="Rectangle 16"/>
+          <p:cNvPr id="17" name="Rounded Rectangle 16"/>
           <p:cNvSpPr/>
           <p:nvPr/>
         </p:nvSpPr>
@@ -4833,11 +4791,13 @@
             <a:off x="274320" y="4416552"/>
             <a:ext cx="384048" cy="384048"/>
           </a:xfrm>
-          <a:prstGeom prst="rect">
-            <a:avLst/>
+          <a:prstGeom prst="roundRect">
+            <a:avLst>
+              <a:gd name="adj" fmla="val 16667"/>
+            </a:avLst>
           </a:prstGeom>
           <a:solidFill>
-            <a:srgbClr val="002060"/>
+            <a:srgbClr val="215F9A"/>
           </a:solidFill>
           <a:ln>
             <a:noFill/>
@@ -4934,7 +4894,7 @@
             <a:r>
               <a:rPr sz="1100" b="1" i="0" spc="-30">
                 <a:solidFill>
-                  <a:srgbClr val="1A1A1A"/>
+                  <a:srgbClr val="000000"/>
                 </a:solidFill>
                 <a:latin typeface="나눔스퀘어 Bold"/>
                 <a:ea typeface="나눔스퀘어 Bold"/>
@@ -4950,7 +4910,7 @@
             <a:r>
               <a:rPr sz="950" b="0" i="0" spc="-30">
                 <a:solidFill>
-                  <a:srgbClr val="7F7F7F"/>
+                  <a:srgbClr val="808080"/>
                 </a:solidFill>
                 <a:latin typeface="나눔스퀘어"/>
                 <a:ea typeface="나눔스퀘어"/>
@@ -4963,7 +4923,7 @@
       </p:sp>
       <p:sp>
         <p:nvSpPr>
-          <p:cNvPr id="20" name="Rectangle 19"/>
+          <p:cNvPr id="20" name="Rounded Rectangle 19"/>
           <p:cNvSpPr/>
           <p:nvPr/>
         </p:nvSpPr>
@@ -4972,11 +4932,13 @@
             <a:off x="274320" y="5285231"/>
             <a:ext cx="384048" cy="384048"/>
           </a:xfrm>
-          <a:prstGeom prst="rect">
-            <a:avLst/>
+          <a:prstGeom prst="roundRect">
+            <a:avLst>
+              <a:gd name="adj" fmla="val 16667"/>
+            </a:avLst>
           </a:prstGeom>
           <a:solidFill>
-            <a:srgbClr val="002060"/>
+            <a:srgbClr val="215F9A"/>
           </a:solidFill>
           <a:ln>
             <a:noFill/>
@@ -5073,7 +5035,7 @@
             <a:r>
               <a:rPr sz="1100" b="1" i="0" spc="-30">
                 <a:solidFill>
-                  <a:srgbClr val="1A1A1A"/>
+                  <a:srgbClr val="000000"/>
                 </a:solidFill>
                 <a:latin typeface="나눔스퀘어 Bold"/>
                 <a:ea typeface="나눔스퀘어 Bold"/>
@@ -5089,7 +5051,7 @@
             <a:r>
               <a:rPr sz="950" b="0" i="0" spc="-30">
                 <a:solidFill>
-                  <a:srgbClr val="7F7F7F"/>
+                  <a:srgbClr val="808080"/>
                 </a:solidFill>
                 <a:latin typeface="나눔스퀘어"/>
                 <a:ea typeface="나눔스퀘어"/>
@@ -5144,7 +5106,7 @@
                   </a:txBody>
                   <a:tcPr anchor="ctr" marL="73152" marR="73152">
                     <a:solidFill>
-                      <a:srgbClr val="002060"/>
+                      <a:srgbClr val="215F9A"/>
                     </a:solidFill>
                   </a:tcPr>
                 </a:tc>
@@ -5157,7 +5119,7 @@
                       <a:r>
                         <a:rPr sz="1000" b="1" i="0" spc="-30">
                           <a:solidFill>
-                            <a:srgbClr val="1A1A1A"/>
+                            <a:srgbClr val="000000"/>
                           </a:solidFill>
                           <a:latin typeface="나눔스퀘어 Bold"/>
                           <a:ea typeface="나눔스퀘어 Bold"/>
@@ -5196,7 +5158,7 @@
                   </a:txBody>
                   <a:tcPr anchor="ctr" marL="73152" marR="73152">
                     <a:solidFill>
-                      <a:srgbClr val="002060"/>
+                      <a:srgbClr val="215F9A"/>
                     </a:solidFill>
                   </a:tcPr>
                 </a:tc>
@@ -5209,7 +5171,7 @@
                       <a:r>
                         <a:rPr sz="1000" b="1" i="0" spc="-30">
                           <a:solidFill>
-                            <a:srgbClr val="1A1A1A"/>
+                            <a:srgbClr val="000000"/>
                           </a:solidFill>
                           <a:latin typeface="나눔스퀘어 Bold"/>
                           <a:ea typeface="나눔스퀘어 Bold"/>
@@ -5248,7 +5210,7 @@
                   </a:txBody>
                   <a:tcPr anchor="ctr" marL="73152" marR="73152">
                     <a:solidFill>
-                      <a:srgbClr val="002060"/>
+                      <a:srgbClr val="215F9A"/>
                     </a:solidFill>
                   </a:tcPr>
                 </a:tc>
@@ -5261,7 +5223,7 @@
                       <a:r>
                         <a:rPr sz="1000" b="1" i="0" spc="-30">
                           <a:solidFill>
-                            <a:srgbClr val="1A1A1A"/>
+                            <a:srgbClr val="000000"/>
                           </a:solidFill>
                           <a:latin typeface="나눔스퀘어 Bold"/>
                           <a:ea typeface="나눔스퀘어 Bold"/>
@@ -5300,7 +5262,7 @@
                   </a:txBody>
                   <a:tcPr anchor="ctr" marL="73152" marR="73152">
                     <a:solidFill>
-                      <a:srgbClr val="002060"/>
+                      <a:srgbClr val="215F9A"/>
                     </a:solidFill>
                   </a:tcPr>
                 </a:tc>
@@ -5313,7 +5275,7 @@
                       <a:r>
                         <a:rPr sz="1000" b="1" i="0" spc="-30">
                           <a:solidFill>
-                            <a:srgbClr val="1A1A1A"/>
+                            <a:srgbClr val="000000"/>
                           </a:solidFill>
                           <a:latin typeface="나눔스퀘어 Bold"/>
                           <a:ea typeface="나눔스퀘어 Bold"/>
@@ -5352,7 +5314,7 @@
                   </a:txBody>
                   <a:tcPr anchor="ctr" marL="73152" marR="73152">
                     <a:solidFill>
-                      <a:srgbClr val="002060"/>
+                      <a:srgbClr val="215F9A"/>
                     </a:solidFill>
                   </a:tcPr>
                 </a:tc>
@@ -5365,7 +5327,7 @@
                       <a:r>
                         <a:rPr sz="1000" b="1" i="0" spc="-30">
                           <a:solidFill>
-                            <a:srgbClr val="1A1A1A"/>
+                            <a:srgbClr val="000000"/>
                           </a:solidFill>
                           <a:latin typeface="나눔스퀘어 Bold"/>
                           <a:ea typeface="나눔스퀘어 Bold"/>
@@ -5404,7 +5366,7 @@
                   </a:txBody>
                   <a:tcPr anchor="ctr" marL="73152" marR="73152">
                     <a:solidFill>
-                      <a:srgbClr val="002060"/>
+                      <a:srgbClr val="215F9A"/>
                     </a:solidFill>
                   </a:tcPr>
                 </a:tc>
@@ -5417,7 +5379,7 @@
                       <a:r>
                         <a:rPr sz="1000" b="1" i="0" spc="-30">
                           <a:solidFill>
-                            <a:srgbClr val="1A1A1A"/>
+                            <a:srgbClr val="000000"/>
                           </a:solidFill>
                           <a:latin typeface="나눔스퀘어 Bold"/>
                           <a:ea typeface="나눔스퀘어 Bold"/>
@@ -5446,8 +5408,8 @@
         </p:nvSpPr>
         <p:spPr>
           <a:xfrm>
-            <a:off x="274320" y="6492240"/>
-            <a:ext cx="8778240" cy="256032"/>
+            <a:off x="274320" y="6382512"/>
+            <a:ext cx="6583680" cy="365760"/>
           </a:xfrm>
           <a:prstGeom prst="rect">
             <a:avLst/>
@@ -5455,7 +5417,7 @@
           <a:noFill/>
         </p:spPr>
         <p:txBody>
-          <a:bodyPr wrap="square" anchor="t" lIns="36576" rIns="36576" tIns="36576" bIns="36576">
+          <a:bodyPr wrap="square" anchor="b" lIns="36576" rIns="36576" tIns="36576" bIns="36576">
             <a:spAutoFit/>
           </a:bodyPr>
           <a:lstStyle/>
@@ -5466,7 +5428,7 @@
             <a:r>
               <a:rPr sz="750" b="0" i="0" spc="-30">
                 <a:solidFill>
-                  <a:srgbClr val="7F7F7F"/>
+                  <a:srgbClr val="808080"/>
                 </a:solidFill>
                 <a:latin typeface="나눔스퀘어"/>
                 <a:ea typeface="나눔스퀘어"/>
@@ -5479,40 +5441,24 @@
       </p:sp>
       <p:sp>
         <p:nvSpPr>
-          <p:cNvPr id="25" name="Page number"/>
-          <p:cNvSpPr txBox="1"/>
-          <p:nvPr/>
-        </p:nvSpPr>
-        <p:spPr>
-          <a:xfrm>
-            <a:off x="9326880" y="6519672"/>
-            <a:ext cx="457200" cy="228600"/>
-          </a:xfrm>
-          <a:prstGeom prst="rect">
-            <a:avLst/>
-          </a:prstGeom>
-          <a:noFill/>
-        </p:spPr>
-        <p:txBody>
-          <a:bodyPr wrap="square" anchor="t" lIns="36576" rIns="36576" tIns="36576" bIns="36576">
-            <a:spAutoFit/>
-          </a:bodyPr>
-          <a:lstStyle/>
-          <a:p>
-            <a:pPr algn="r">
-              <a:buNone/>
-            </a:pPr>
-            <a:r>
-              <a:rPr sz="800" b="0" i="0" spc="-30">
-                <a:solidFill>
-                  <a:srgbClr val="7F7F7F"/>
-                </a:solidFill>
-                <a:latin typeface="나눔스퀘어"/>
-                <a:ea typeface="나눔스퀘어"/>
-                <a:cs typeface="나눔스퀘어"/>
-              </a:rPr>
-              <a:t>12</a:t>
-            </a:r>
+          <p:cNvPr id="6" name="Slide Number Placeholder 5"/>
+          <p:cNvSpPr>
+            <a:spLocks noGrp="1"/>
+          </p:cNvSpPr>
+          <p:nvPr>
+            <p:ph type="sldNum" sz="quarter" idx="12"/>
+          </p:nvPr>
+        </p:nvSpPr>
+        <p:spPr/>
+        <p:txBody>
+          <a:bodyPr/>
+          <a:lstStyle/>
+          <a:p>
+            <a:fld id="{C0166AD1-3E4E-49AB-A7F9-67C30DF503DC}" type="slidenum">
+              <a:rPr lang="ko-KR" altLang="en-US" smtClean="0"/>
+              <a:t>‹#›</a:t>
+            </a:fld>
+            <a:endParaRPr lang="ko-KR" altLang="en-US"/>
           </a:p>
         </p:txBody>
       </p:sp>
@@ -5542,7 +5488,7 @@
         </p:nvSpPr>
         <p:spPr>
           <a:xfrm>
-            <a:off x="274320" y="201168"/>
+            <a:off x="274320" y="182880"/>
             <a:ext cx="8961120" cy="384048"/>
           </a:xfrm>
           <a:prstGeom prst="rect">
@@ -5551,7 +5497,7 @@
           <a:noFill/>
         </p:spPr>
         <p:txBody>
-          <a:bodyPr wrap="square" anchor="t" lIns="36576" rIns="36576" tIns="36576" bIns="36576">
+          <a:bodyPr wrap="square" anchor="t" lIns="0" rIns="0" tIns="0" bIns="0">
             <a:spAutoFit/>
           </a:bodyPr>
           <a:lstStyle/>
@@ -5562,33 +5508,33 @@
             <a:r>
               <a:rPr sz="1800" b="0" i="0" spc="-30">
                 <a:solidFill>
-                  <a:srgbClr val="A6A6A6"/>
-                </a:solidFill>
-                <a:latin typeface="나눔스퀘어"/>
-                <a:ea typeface="나눔스퀘어"/>
-                <a:cs typeface="나눔스퀘어"/>
-              </a:rPr>
-              <a:t>참고</a:t>
+                  <a:srgbClr val="808080"/>
+                </a:solidFill>
+                <a:latin typeface="나눔스퀘어 ExtraBold"/>
+                <a:ea typeface="나눔스퀘어 ExtraBold"/>
+                <a:cs typeface="나눔스퀘어 ExtraBold"/>
+              </a:rPr>
+              <a:t>참고  </a:t>
             </a:r>
             <a:r>
               <a:rPr sz="1800" b="0" i="0" spc="-30">
                 <a:solidFill>
-                  <a:srgbClr val="1A1A1A"/>
-                </a:solidFill>
-                <a:latin typeface="나눔스퀘어"/>
-                <a:ea typeface="나눔스퀘어"/>
-                <a:cs typeface="나눔스퀘어"/>
-              </a:rPr>
-              <a:t>   |   </a:t>
+                  <a:srgbClr val="000000"/>
+                </a:solidFill>
+                <a:latin typeface="나눔스퀘어 ExtraBold"/>
+                <a:ea typeface="나눔스퀘어 ExtraBold"/>
+                <a:cs typeface="나눔스퀘어 ExtraBold"/>
+              </a:rPr>
+              <a:t>|  </a:t>
             </a:r>
             <a:r>
               <a:rPr sz="1800" b="0" i="0" spc="-30">
                 <a:solidFill>
-                  <a:srgbClr val="1A1A1A"/>
-                </a:solidFill>
-                <a:latin typeface="나눔스퀘어"/>
-                <a:ea typeface="나눔스퀘어"/>
-                <a:cs typeface="나눔스퀘어"/>
+                  <a:srgbClr val="000000"/>
+                </a:solidFill>
+                <a:latin typeface="나눔스퀘어 ExtraBold"/>
+                <a:ea typeface="나눔스퀘어 ExtraBold"/>
+                <a:cs typeface="나눔스퀘어 ExtraBold"/>
               </a:rPr>
               <a:t>출처 및 유의사항</a:t>
             </a:r>
@@ -5627,7 +5573,7 @@
             <a:r>
               <a:rPr sz="1000" b="0" i="0" spc="-30">
                 <a:solidFill>
-                  <a:srgbClr val="1A1A1A"/>
+                  <a:srgbClr val="000000"/>
                 </a:solidFill>
                 <a:latin typeface="나눔스퀘어"/>
                 <a:ea typeface="나눔스퀘어"/>
@@ -5647,7 +5593,7 @@
             <a:r>
               <a:rPr sz="1000" b="0" i="0" spc="-30">
                 <a:solidFill>
-                  <a:srgbClr val="1A1A1A"/>
+                  <a:srgbClr val="000000"/>
                 </a:solidFill>
                 <a:latin typeface="나눔스퀘어"/>
                 <a:ea typeface="나눔스퀘어"/>
@@ -5667,7 +5613,7 @@
             <a:r>
               <a:rPr sz="1000" b="0" i="0" spc="-30">
                 <a:solidFill>
-                  <a:srgbClr val="1A1A1A"/>
+                  <a:srgbClr val="000000"/>
                 </a:solidFill>
                 <a:latin typeface="나눔스퀘어"/>
                 <a:ea typeface="나눔스퀘어"/>
@@ -5687,7 +5633,7 @@
             <a:r>
               <a:rPr sz="1000" b="0" i="0" spc="-30">
                 <a:solidFill>
-                  <a:srgbClr val="1A1A1A"/>
+                  <a:srgbClr val="000000"/>
                 </a:solidFill>
                 <a:latin typeface="나눔스퀘어"/>
                 <a:ea typeface="나눔스퀘어"/>
@@ -5707,7 +5653,7 @@
             <a:r>
               <a:rPr sz="1000" b="0" i="0" spc="-30">
                 <a:solidFill>
-                  <a:srgbClr val="1A1A1A"/>
+                  <a:srgbClr val="000000"/>
                 </a:solidFill>
                 <a:latin typeface="나눔스퀘어"/>
                 <a:ea typeface="나눔스퀘어"/>
@@ -5727,7 +5673,7 @@
             <a:r>
               <a:rPr sz="1000" b="0" i="0" spc="-30">
                 <a:solidFill>
-                  <a:srgbClr val="1A1A1A"/>
+                  <a:srgbClr val="000000"/>
                 </a:solidFill>
                 <a:latin typeface="나눔스퀘어"/>
                 <a:ea typeface="나눔스퀘어"/>
@@ -5747,7 +5693,7 @@
             <a:r>
               <a:rPr sz="1000" b="0" i="0" spc="-30">
                 <a:solidFill>
-                  <a:srgbClr val="1A1A1A"/>
+                  <a:srgbClr val="000000"/>
                 </a:solidFill>
                 <a:latin typeface="나눔스퀘어"/>
                 <a:ea typeface="나눔스퀘어"/>
@@ -5767,7 +5713,7 @@
             <a:r>
               <a:rPr sz="1000" b="0" i="0" spc="-30">
                 <a:solidFill>
-                  <a:srgbClr val="1A1A1A"/>
+                  <a:srgbClr val="000000"/>
                 </a:solidFill>
                 <a:latin typeface="나눔스퀘어"/>
                 <a:ea typeface="나눔스퀘어"/>
@@ -5851,7 +5797,7 @@
             <a:r>
               <a:rPr sz="1000" b="1" i="0" spc="-30">
                 <a:solidFill>
-                  <a:srgbClr val="1A1A1A"/>
+                  <a:srgbClr val="000000"/>
                 </a:solidFill>
                 <a:latin typeface="나눔스퀘어 Bold"/>
                 <a:ea typeface="나눔스퀘어 Bold"/>
@@ -5867,7 +5813,7 @@
             <a:r>
               <a:rPr sz="900" b="0" i="0" spc="-30">
                 <a:solidFill>
-                  <a:srgbClr val="7F7F7F"/>
+                  <a:srgbClr val="808080"/>
                 </a:solidFill>
                 <a:latin typeface="나눔스퀘어"/>
                 <a:ea typeface="나눔스퀘어"/>
@@ -5880,40 +5826,24 @@
       </p:sp>
       <p:sp>
         <p:nvSpPr>
-          <p:cNvPr id="6" name="Page number"/>
-          <p:cNvSpPr txBox="1"/>
-          <p:nvPr/>
-        </p:nvSpPr>
-        <p:spPr>
-          <a:xfrm>
-            <a:off x="9326880" y="6519672"/>
-            <a:ext cx="457200" cy="228600"/>
-          </a:xfrm>
-          <a:prstGeom prst="rect">
-            <a:avLst/>
-          </a:prstGeom>
-          <a:noFill/>
-        </p:spPr>
-        <p:txBody>
-          <a:bodyPr wrap="square" anchor="t" lIns="36576" rIns="36576" tIns="36576" bIns="36576">
-            <a:spAutoFit/>
-          </a:bodyPr>
-          <a:lstStyle/>
-          <a:p>
-            <a:pPr algn="r">
-              <a:buNone/>
-            </a:pPr>
-            <a:r>
-              <a:rPr sz="800" b="0" i="0" spc="-30">
-                <a:solidFill>
-                  <a:srgbClr val="7F7F7F"/>
-                </a:solidFill>
-                <a:latin typeface="나눔스퀘어"/>
-                <a:ea typeface="나눔스퀘어"/>
-                <a:cs typeface="나눔스퀘어"/>
-              </a:rPr>
-              <a:t>13</a:t>
-            </a:r>
+          <p:cNvPr id="6" name="Slide Number Placeholder 5"/>
+          <p:cNvSpPr>
+            <a:spLocks noGrp="1"/>
+          </p:cNvSpPr>
+          <p:nvPr>
+            <p:ph type="sldNum" sz="quarter" idx="12"/>
+          </p:nvPr>
+        </p:nvSpPr>
+        <p:spPr/>
+        <p:txBody>
+          <a:bodyPr/>
+          <a:lstStyle/>
+          <a:p>
+            <a:fld id="{C0166AD1-3E4E-49AB-A7F9-67C30DF503DC}" type="slidenum">
+              <a:rPr lang="ko-KR" altLang="en-US" smtClean="0"/>
+              <a:t>‹#›</a:t>
+            </a:fld>
+            <a:endParaRPr lang="ko-KR" altLang="en-US"/>
           </a:p>
         </p:txBody>
       </p:sp>
@@ -5943,7 +5873,7 @@
         </p:nvSpPr>
         <p:spPr>
           <a:xfrm>
-            <a:off x="274320" y="201168"/>
+            <a:off x="274320" y="182880"/>
             <a:ext cx="8961120" cy="384048"/>
           </a:xfrm>
           <a:prstGeom prst="rect">
@@ -5952,7 +5882,7 @@
           <a:noFill/>
         </p:spPr>
         <p:txBody>
-          <a:bodyPr wrap="square" anchor="t" lIns="36576" rIns="36576" tIns="36576" bIns="36576">
+          <a:bodyPr wrap="square" anchor="t" lIns="0" rIns="0" tIns="0" bIns="0">
             <a:spAutoFit/>
           </a:bodyPr>
           <a:lstStyle/>
@@ -5963,33 +5893,33 @@
             <a:r>
               <a:rPr sz="1800" b="0" i="0" spc="-30">
                 <a:solidFill>
-                  <a:srgbClr val="A6A6A6"/>
-                </a:solidFill>
-                <a:latin typeface="나눔스퀘어"/>
-                <a:ea typeface="나눔스퀘어"/>
-                <a:cs typeface="나눔스퀘어"/>
-              </a:rPr>
-              <a:t>총평</a:t>
+                  <a:srgbClr val="808080"/>
+                </a:solidFill>
+                <a:latin typeface="나눔스퀘어 ExtraBold"/>
+                <a:ea typeface="나눔스퀘어 ExtraBold"/>
+                <a:cs typeface="나눔스퀘어 ExtraBold"/>
+              </a:rPr>
+              <a:t>총평  </a:t>
             </a:r>
             <a:r>
               <a:rPr sz="1800" b="0" i="0" spc="-30">
                 <a:solidFill>
-                  <a:srgbClr val="1A1A1A"/>
-                </a:solidFill>
-                <a:latin typeface="나눔스퀘어"/>
-                <a:ea typeface="나눔스퀘어"/>
-                <a:cs typeface="나눔스퀘어"/>
-              </a:rPr>
-              <a:t>   |   </a:t>
+                  <a:srgbClr val="000000"/>
+                </a:solidFill>
+                <a:latin typeface="나눔스퀘어 ExtraBold"/>
+                <a:ea typeface="나눔스퀘어 ExtraBold"/>
+                <a:cs typeface="나눔스퀘어 ExtraBold"/>
+              </a:rPr>
+              <a:t>|  </a:t>
             </a:r>
             <a:r>
               <a:rPr sz="1800" b="0" i="0" spc="-30">
                 <a:solidFill>
-                  <a:srgbClr val="1A1A1A"/>
-                </a:solidFill>
-                <a:latin typeface="나눔스퀘어"/>
-                <a:ea typeface="나눔스퀘어"/>
-                <a:cs typeface="나눔스퀘어"/>
+                  <a:srgbClr val="000000"/>
+                </a:solidFill>
+                <a:latin typeface="나눔스퀘어 ExtraBold"/>
+                <a:ea typeface="나눔스퀘어 ExtraBold"/>
+                <a:cs typeface="나눔스퀘어 ExtraBold"/>
               </a:rPr>
               <a:t>부문별 성적표</a:t>
             </a:r>
@@ -6024,7 +5954,7 @@
             <a:r>
               <a:rPr sz="1400" b="1" i="0" spc="-30">
                 <a:solidFill>
-                  <a:srgbClr val="1A1A1A"/>
+                  <a:srgbClr val="000000"/>
                 </a:solidFill>
                 <a:latin typeface="나눔스퀘어 ExtraBold"/>
                 <a:ea typeface="나눔스퀘어 ExtraBold"/>
@@ -6105,7 +6035,7 @@
             <a:r>
               <a:rPr sz="2000" b="1" i="0" spc="-30">
                 <a:solidFill>
-                  <a:srgbClr val="1A1A1A"/>
+                  <a:srgbClr val="000000"/>
                 </a:solidFill>
                 <a:latin typeface="나눔스퀘어 ExtraBold"/>
                 <a:ea typeface="나눔스퀘어 ExtraBold"/>
@@ -6144,7 +6074,7 @@
             <a:r>
               <a:rPr sz="900" b="0" i="0" spc="-30">
                 <a:solidFill>
-                  <a:srgbClr val="7F7F7F"/>
+                  <a:srgbClr val="808080"/>
                 </a:solidFill>
                 <a:latin typeface="나눔스퀘어"/>
                 <a:ea typeface="나눔스퀘어"/>
@@ -6225,7 +6155,7 @@
             <a:r>
               <a:rPr sz="2000" b="1" i="0" spc="-30">
                 <a:solidFill>
-                  <a:srgbClr val="1A1A1A"/>
+                  <a:srgbClr val="000000"/>
                 </a:solidFill>
                 <a:latin typeface="나눔스퀘어 ExtraBold"/>
                 <a:ea typeface="나눔스퀘어 ExtraBold"/>
@@ -6264,7 +6194,7 @@
             <a:r>
               <a:rPr sz="900" b="0" i="0" spc="-30">
                 <a:solidFill>
-                  <a:srgbClr val="7F7F7F"/>
+                  <a:srgbClr val="808080"/>
                 </a:solidFill>
                 <a:latin typeface="나눔스퀘어"/>
                 <a:ea typeface="나눔스퀘어"/>
@@ -6345,7 +6275,7 @@
             <a:r>
               <a:rPr sz="2000" b="1" i="0" spc="-30">
                 <a:solidFill>
-                  <a:srgbClr val="C0392B"/>
+                  <a:srgbClr val="C00000"/>
                 </a:solidFill>
                 <a:latin typeface="나눔스퀘어 ExtraBold"/>
                 <a:ea typeface="나눔스퀘어 ExtraBold"/>
@@ -6384,7 +6314,7 @@
             <a:r>
               <a:rPr sz="900" b="0" i="0" spc="-30">
                 <a:solidFill>
-                  <a:srgbClr val="7F7F7F"/>
+                  <a:srgbClr val="808080"/>
                 </a:solidFill>
                 <a:latin typeface="나눔스퀘어"/>
                 <a:ea typeface="나눔스퀘어"/>
@@ -6465,7 +6395,7 @@
             <a:r>
               <a:rPr sz="2000" b="1" i="0" spc="-30">
                 <a:solidFill>
-                  <a:srgbClr val="002060"/>
+                  <a:srgbClr val="215F9A"/>
                 </a:solidFill>
                 <a:latin typeface="나눔스퀘어 ExtraBold"/>
                 <a:ea typeface="나눔스퀘어 ExtraBold"/>
@@ -6504,7 +6434,7 @@
             <a:r>
               <a:rPr sz="900" b="0" i="0" spc="-30">
                 <a:solidFill>
-                  <a:srgbClr val="7F7F7F"/>
+                  <a:srgbClr val="808080"/>
                 </a:solidFill>
                 <a:latin typeface="나눔스퀘어"/>
                 <a:ea typeface="나눔스퀘어"/>
@@ -6552,7 +6482,7 @@
                       <a:r>
                         <a:rPr sz="1000" b="1" i="0" spc="-30">
                           <a:solidFill>
-                            <a:srgbClr val="1A1A1A"/>
+                            <a:srgbClr val="000000"/>
                           </a:solidFill>
                           <a:latin typeface="나눔스퀘어 Bold"/>
                           <a:ea typeface="나눔스퀘어 Bold"/>
@@ -6577,7 +6507,7 @@
                       <a:r>
                         <a:rPr sz="1000" b="1" i="0" spc="-30">
                           <a:solidFill>
-                            <a:srgbClr val="1A1A1A"/>
+                            <a:srgbClr val="000000"/>
                           </a:solidFill>
                           <a:latin typeface="나눔스퀘어 Bold"/>
                           <a:ea typeface="나눔스퀘어 Bold"/>
@@ -6602,7 +6532,7 @@
                       <a:r>
                         <a:rPr sz="1000" b="1" i="0" spc="-30">
                           <a:solidFill>
-                            <a:srgbClr val="1A1A1A"/>
+                            <a:srgbClr val="000000"/>
                           </a:solidFill>
                           <a:latin typeface="나눔스퀘어 Bold"/>
                           <a:ea typeface="나눔스퀘어 Bold"/>
@@ -6627,7 +6557,7 @@
                       <a:r>
                         <a:rPr sz="1000" b="1" i="0" spc="-30">
                           <a:solidFill>
-                            <a:srgbClr val="1A1A1A"/>
+                            <a:srgbClr val="000000"/>
                           </a:solidFill>
                           <a:latin typeface="나눔스퀘어 Bold"/>
                           <a:ea typeface="나눔스퀘어 Bold"/>
@@ -6652,7 +6582,7 @@
                       <a:r>
                         <a:rPr sz="1000" b="1" i="0" spc="-30">
                           <a:solidFill>
-                            <a:srgbClr val="1A1A1A"/>
+                            <a:srgbClr val="000000"/>
                           </a:solidFill>
                           <a:latin typeface="나눔스퀘어 Bold"/>
                           <a:ea typeface="나눔스퀘어 Bold"/>
@@ -6677,7 +6607,7 @@
                       <a:r>
                         <a:rPr sz="1000" b="1" i="0" spc="-30">
                           <a:solidFill>
-                            <a:srgbClr val="1A1A1A"/>
+                            <a:srgbClr val="000000"/>
                           </a:solidFill>
                           <a:latin typeface="나눔스퀘어 Bold"/>
                           <a:ea typeface="나눔스퀘어 Bold"/>
@@ -6702,7 +6632,7 @@
                       <a:r>
                         <a:rPr sz="1000" b="1" i="0" spc="-30">
                           <a:solidFill>
-                            <a:srgbClr val="1A1A1A"/>
+                            <a:srgbClr val="000000"/>
                           </a:solidFill>
                           <a:latin typeface="나눔스퀘어 Bold"/>
                           <a:ea typeface="나눔스퀘어 Bold"/>
@@ -6729,7 +6659,7 @@
                       <a:r>
                         <a:rPr sz="1000" b="1" i="0" spc="-30">
                           <a:solidFill>
-                            <a:srgbClr val="1A1A1A"/>
+                            <a:srgbClr val="000000"/>
                           </a:solidFill>
                           <a:latin typeface="나눔스퀘어 Bold"/>
                           <a:ea typeface="나눔스퀘어 Bold"/>
@@ -6754,7 +6684,7 @@
                       <a:r>
                         <a:rPr sz="1000" b="0" i="0" spc="-30">
                           <a:solidFill>
-                            <a:srgbClr val="1A1A1A"/>
+                            <a:srgbClr val="000000"/>
                           </a:solidFill>
                           <a:latin typeface="나눔스퀘어"/>
                           <a:ea typeface="나눔스퀘어"/>
@@ -6779,7 +6709,7 @@
                       <a:r>
                         <a:rPr sz="1000" b="0" i="0" spc="-30">
                           <a:solidFill>
-                            <a:srgbClr val="1A1A1A"/>
+                            <a:srgbClr val="000000"/>
                           </a:solidFill>
                           <a:latin typeface="나눔스퀘어"/>
                           <a:ea typeface="나눔스퀘어"/>
@@ -6804,7 +6734,7 @@
                       <a:r>
                         <a:rPr sz="1000" b="0" i="0" spc="-30">
                           <a:solidFill>
-                            <a:srgbClr val="C0392B"/>
+                            <a:srgbClr val="C00000"/>
                           </a:solidFill>
                           <a:latin typeface="나눔스퀘어"/>
                           <a:ea typeface="나눔스퀘어"/>
@@ -6829,7 +6759,7 @@
                       <a:r>
                         <a:rPr sz="1000" b="0" i="0" spc="-30">
                           <a:solidFill>
-                            <a:srgbClr val="C0392B"/>
+                            <a:srgbClr val="C00000"/>
                           </a:solidFill>
                           <a:latin typeface="나눔스퀘어"/>
                           <a:ea typeface="나눔스퀘어"/>
@@ -6854,7 +6784,7 @@
                       <a:r>
                         <a:rPr sz="1000" b="0" i="0" spc="-30">
                           <a:solidFill>
-                            <a:srgbClr val="1A1A1A"/>
+                            <a:srgbClr val="000000"/>
                           </a:solidFill>
                           <a:latin typeface="나눔스퀘어"/>
                           <a:ea typeface="나눔스퀘어"/>
@@ -6879,7 +6809,7 @@
                       <a:r>
                         <a:rPr sz="1000" b="0" i="0" spc="-30">
                           <a:solidFill>
-                            <a:srgbClr val="1A1A1A"/>
+                            <a:srgbClr val="000000"/>
                           </a:solidFill>
                           <a:latin typeface="나눔스퀘어"/>
                           <a:ea typeface="나눔스퀘어"/>
@@ -6906,7 +6836,7 @@
                       <a:r>
                         <a:rPr sz="1000" b="1" i="0" spc="-30">
                           <a:solidFill>
-                            <a:srgbClr val="1A1A1A"/>
+                            <a:srgbClr val="000000"/>
                           </a:solidFill>
                           <a:latin typeface="나눔스퀘어 Bold"/>
                           <a:ea typeface="나눔스퀘어 Bold"/>
@@ -6931,7 +6861,7 @@
                       <a:r>
                         <a:rPr sz="1000" b="0" i="0" spc="-30">
                           <a:solidFill>
-                            <a:srgbClr val="1A1A1A"/>
+                            <a:srgbClr val="000000"/>
                           </a:solidFill>
                           <a:latin typeface="나눔스퀘어"/>
                           <a:ea typeface="나눔스퀘어"/>
@@ -6956,7 +6886,7 @@
                       <a:r>
                         <a:rPr sz="1000" b="0" i="0" spc="-30">
                           <a:solidFill>
-                            <a:srgbClr val="1A1A1A"/>
+                            <a:srgbClr val="000000"/>
                           </a:solidFill>
                           <a:latin typeface="나눔스퀘어"/>
                           <a:ea typeface="나눔스퀘어"/>
@@ -6981,7 +6911,7 @@
                       <a:r>
                         <a:rPr sz="1000" b="0" i="0" spc="-30">
                           <a:solidFill>
-                            <a:srgbClr val="C0392B"/>
+                            <a:srgbClr val="C00000"/>
                           </a:solidFill>
                           <a:latin typeface="나눔스퀘어"/>
                           <a:ea typeface="나눔스퀘어"/>
@@ -7006,7 +6936,7 @@
                       <a:r>
                         <a:rPr sz="1000" b="0" i="0" spc="-30">
                           <a:solidFill>
-                            <a:srgbClr val="C0392B"/>
+                            <a:srgbClr val="C00000"/>
                           </a:solidFill>
                           <a:latin typeface="나눔스퀘어"/>
                           <a:ea typeface="나눔스퀘어"/>
@@ -7031,7 +6961,7 @@
                       <a:r>
                         <a:rPr sz="1000" b="0" i="0" spc="-30">
                           <a:solidFill>
-                            <a:srgbClr val="1A1A1A"/>
+                            <a:srgbClr val="000000"/>
                           </a:solidFill>
                           <a:latin typeface="나눔스퀘어"/>
                           <a:ea typeface="나눔스퀘어"/>
@@ -7056,7 +6986,7 @@
                       <a:r>
                         <a:rPr sz="1000" b="0" i="0" spc="-30">
                           <a:solidFill>
-                            <a:srgbClr val="1A1A1A"/>
+                            <a:srgbClr val="000000"/>
                           </a:solidFill>
                           <a:latin typeface="나눔스퀘어"/>
                           <a:ea typeface="나눔스퀘어"/>
@@ -7083,7 +7013,7 @@
                       <a:r>
                         <a:rPr sz="1000" b="1" i="0" spc="-30">
                           <a:solidFill>
-                            <a:srgbClr val="1A1A1A"/>
+                            <a:srgbClr val="000000"/>
                           </a:solidFill>
                           <a:latin typeface="나눔스퀘어 Bold"/>
                           <a:ea typeface="나눔스퀘어 Bold"/>
@@ -7108,7 +7038,7 @@
                       <a:r>
                         <a:rPr sz="1000" b="0" i="0" spc="-30">
                           <a:solidFill>
-                            <a:srgbClr val="1A1A1A"/>
+                            <a:srgbClr val="000000"/>
                           </a:solidFill>
                           <a:latin typeface="나눔스퀘어"/>
                           <a:ea typeface="나눔스퀘어"/>
@@ -7133,7 +7063,7 @@
                       <a:r>
                         <a:rPr sz="1000" b="0" i="0" spc="-30">
                           <a:solidFill>
-                            <a:srgbClr val="1A1A1A"/>
+                            <a:srgbClr val="000000"/>
                           </a:solidFill>
                           <a:latin typeface="나눔스퀘어"/>
                           <a:ea typeface="나눔스퀘어"/>
@@ -7158,7 +7088,7 @@
                       <a:r>
                         <a:rPr sz="1000" b="0" i="0" spc="-30">
                           <a:solidFill>
-                            <a:srgbClr val="1A1A1A"/>
+                            <a:srgbClr val="000000"/>
                           </a:solidFill>
                           <a:latin typeface="나눔스퀘어"/>
                           <a:ea typeface="나눔스퀘어"/>
@@ -7183,7 +7113,7 @@
                       <a:r>
                         <a:rPr sz="1000" b="0" i="0" spc="-30">
                           <a:solidFill>
-                            <a:srgbClr val="1A1A1A"/>
+                            <a:srgbClr val="000000"/>
                           </a:solidFill>
                           <a:latin typeface="나눔스퀘어"/>
                           <a:ea typeface="나눔스퀘어"/>
@@ -7208,7 +7138,7 @@
                       <a:r>
                         <a:rPr sz="1000" b="0" i="0" spc="-30">
                           <a:solidFill>
-                            <a:srgbClr val="1A1A1A"/>
+                            <a:srgbClr val="000000"/>
                           </a:solidFill>
                           <a:latin typeface="나눔스퀘어"/>
                           <a:ea typeface="나눔스퀘어"/>
@@ -7233,7 +7163,7 @@
                       <a:r>
                         <a:rPr sz="1000" b="0" i="0" spc="-30">
                           <a:solidFill>
-                            <a:srgbClr val="1A1A1A"/>
+                            <a:srgbClr val="000000"/>
                           </a:solidFill>
                           <a:latin typeface="나눔스퀘어"/>
                           <a:ea typeface="나눔스퀘어"/>
@@ -7260,7 +7190,7 @@
                       <a:r>
                         <a:rPr sz="1000" b="1" i="0" spc="-30">
                           <a:solidFill>
-                            <a:srgbClr val="1A1A1A"/>
+                            <a:srgbClr val="000000"/>
                           </a:solidFill>
                           <a:latin typeface="나눔스퀘어 Bold"/>
                           <a:ea typeface="나눔스퀘어 Bold"/>
@@ -7285,7 +7215,7 @@
                       <a:r>
                         <a:rPr sz="1000" b="0" i="0" spc="-30">
                           <a:solidFill>
-                            <a:srgbClr val="1A1A1A"/>
+                            <a:srgbClr val="000000"/>
                           </a:solidFill>
                           <a:latin typeface="나눔스퀘어"/>
                           <a:ea typeface="나눔스퀘어"/>
@@ -7310,7 +7240,7 @@
                       <a:r>
                         <a:rPr sz="1000" b="0" i="0" spc="-30">
                           <a:solidFill>
-                            <a:srgbClr val="1A1A1A"/>
+                            <a:srgbClr val="000000"/>
                           </a:solidFill>
                           <a:latin typeface="나눔스퀘어"/>
                           <a:ea typeface="나눔스퀘어"/>
@@ -7335,7 +7265,7 @@
                       <a:r>
                         <a:rPr sz="1000" b="0" i="0" spc="-30">
                           <a:solidFill>
-                            <a:srgbClr val="C0392B"/>
+                            <a:srgbClr val="C00000"/>
                           </a:solidFill>
                           <a:latin typeface="나눔스퀘어"/>
                           <a:ea typeface="나눔스퀘어"/>
@@ -7360,7 +7290,7 @@
                       <a:r>
                         <a:rPr sz="1000" b="0" i="0" spc="-30">
                           <a:solidFill>
-                            <a:srgbClr val="C0392B"/>
+                            <a:srgbClr val="C00000"/>
                           </a:solidFill>
                           <a:latin typeface="나눔스퀘어"/>
                           <a:ea typeface="나눔스퀘어"/>
@@ -7385,7 +7315,7 @@
                       <a:r>
                         <a:rPr sz="1000" b="0" i="0" spc="-30">
                           <a:solidFill>
-                            <a:srgbClr val="1A1A1A"/>
+                            <a:srgbClr val="000000"/>
                           </a:solidFill>
                           <a:latin typeface="나눔스퀘어"/>
                           <a:ea typeface="나눔스퀘어"/>
@@ -7410,7 +7340,7 @@
                       <a:r>
                         <a:rPr sz="1000" b="0" i="0" spc="-30">
                           <a:solidFill>
-                            <a:srgbClr val="1A1A1A"/>
+                            <a:srgbClr val="000000"/>
                           </a:solidFill>
                           <a:latin typeface="나눔스퀘어"/>
                           <a:ea typeface="나눔스퀘어"/>
@@ -7437,7 +7367,7 @@
                       <a:r>
                         <a:rPr sz="1000" b="1" i="0" spc="-30">
                           <a:solidFill>
-                            <a:srgbClr val="1A1A1A"/>
+                            <a:srgbClr val="000000"/>
                           </a:solidFill>
                           <a:latin typeface="나눔스퀘어 Bold"/>
                           <a:ea typeface="나눔스퀘어 Bold"/>
@@ -7462,7 +7392,7 @@
                       <a:r>
                         <a:rPr sz="1000" b="0" i="0" spc="-30">
                           <a:solidFill>
-                            <a:srgbClr val="1A1A1A"/>
+                            <a:srgbClr val="000000"/>
                           </a:solidFill>
                           <a:latin typeface="나눔스퀘어"/>
                           <a:ea typeface="나눔스퀘어"/>
@@ -7487,7 +7417,7 @@
                       <a:r>
                         <a:rPr sz="1000" b="0" i="0" spc="-30">
                           <a:solidFill>
-                            <a:srgbClr val="1A1A1A"/>
+                            <a:srgbClr val="000000"/>
                           </a:solidFill>
                           <a:latin typeface="나눔스퀘어"/>
                           <a:ea typeface="나눔스퀘어"/>
@@ -7512,7 +7442,7 @@
                       <a:r>
                         <a:rPr sz="1000" b="0" i="0" spc="-30">
                           <a:solidFill>
-                            <a:srgbClr val="1A1A1A"/>
+                            <a:srgbClr val="000000"/>
                           </a:solidFill>
                           <a:latin typeface="나눔스퀘어"/>
                           <a:ea typeface="나눔스퀘어"/>
@@ -7537,7 +7467,7 @@
                       <a:r>
                         <a:rPr sz="1000" b="0" i="0" spc="-30">
                           <a:solidFill>
-                            <a:srgbClr val="1A1A1A"/>
+                            <a:srgbClr val="000000"/>
                           </a:solidFill>
                           <a:latin typeface="나눔스퀘어"/>
                           <a:ea typeface="나눔스퀘어"/>
@@ -7562,7 +7492,7 @@
                       <a:r>
                         <a:rPr sz="1000" b="0" i="0" spc="-30">
                           <a:solidFill>
-                            <a:srgbClr val="1A1A1A"/>
+                            <a:srgbClr val="000000"/>
                           </a:solidFill>
                           <a:latin typeface="나눔스퀘어"/>
                           <a:ea typeface="나눔스퀘어"/>
@@ -7587,7 +7517,7 @@
                       <a:r>
                         <a:rPr sz="1000" b="0" i="0" spc="-30">
                           <a:solidFill>
-                            <a:srgbClr val="1A1A1A"/>
+                            <a:srgbClr val="000000"/>
                           </a:solidFill>
                           <a:latin typeface="나눔스퀘어"/>
                           <a:ea typeface="나눔스퀘어"/>
@@ -7614,7 +7544,7 @@
                       <a:r>
                         <a:rPr sz="1000" b="1" i="0" spc="-30">
                           <a:solidFill>
-                            <a:srgbClr val="1A1A1A"/>
+                            <a:srgbClr val="000000"/>
                           </a:solidFill>
                           <a:latin typeface="나눔스퀘어 Bold"/>
                           <a:ea typeface="나눔스퀘어 Bold"/>
@@ -7639,7 +7569,7 @@
                       <a:r>
                         <a:rPr sz="1000" b="0" i="0" spc="-30">
                           <a:solidFill>
-                            <a:srgbClr val="1A1A1A"/>
+                            <a:srgbClr val="000000"/>
                           </a:solidFill>
                           <a:latin typeface="나눔스퀘어"/>
                           <a:ea typeface="나눔스퀘어"/>
@@ -7664,7 +7594,7 @@
                       <a:r>
                         <a:rPr sz="1000" b="0" i="0" spc="-30">
                           <a:solidFill>
-                            <a:srgbClr val="1A1A1A"/>
+                            <a:srgbClr val="000000"/>
                           </a:solidFill>
                           <a:latin typeface="나눔스퀘어"/>
                           <a:ea typeface="나눔스퀘어"/>
@@ -7689,7 +7619,7 @@
                       <a:r>
                         <a:rPr sz="1000" b="0" i="0" spc="-30">
                           <a:solidFill>
-                            <a:srgbClr val="1A1A1A"/>
+                            <a:srgbClr val="000000"/>
                           </a:solidFill>
                           <a:latin typeface="나눔스퀘어"/>
                           <a:ea typeface="나눔스퀘어"/>
@@ -7714,7 +7644,7 @@
                       <a:r>
                         <a:rPr sz="1000" b="0" i="0" spc="-30">
                           <a:solidFill>
-                            <a:srgbClr val="1A1A1A"/>
+                            <a:srgbClr val="000000"/>
                           </a:solidFill>
                           <a:latin typeface="나눔스퀘어"/>
                           <a:ea typeface="나눔스퀘어"/>
@@ -7739,7 +7669,7 @@
                       <a:r>
                         <a:rPr sz="1000" b="0" i="0" spc="-30">
                           <a:solidFill>
-                            <a:srgbClr val="1A1A1A"/>
+                            <a:srgbClr val="000000"/>
                           </a:solidFill>
                           <a:latin typeface="나눔스퀘어"/>
                           <a:ea typeface="나눔스퀘어"/>
@@ -7764,7 +7694,7 @@
                       <a:r>
                         <a:rPr sz="1000" b="0" i="0" spc="-30">
                           <a:solidFill>
-                            <a:srgbClr val="1A1A1A"/>
+                            <a:srgbClr val="000000"/>
                           </a:solidFill>
                           <a:latin typeface="나눔스퀘어"/>
                           <a:ea typeface="나눔스퀘어"/>
@@ -7816,7 +7746,7 @@
             <a:r>
               <a:rPr sz="850" b="0" i="0" spc="-30">
                 <a:solidFill>
-                  <a:srgbClr val="7F7F7F"/>
+                  <a:srgbClr val="808080"/>
                 </a:solidFill>
                 <a:latin typeface="나눔스퀘어"/>
                 <a:ea typeface="나눔스퀘어"/>
@@ -7835,7 +7765,7 @@
             <a:r>
               <a:rPr sz="850" b="0" i="0" spc="-30">
                 <a:solidFill>
-                  <a:srgbClr val="7F7F7F"/>
+                  <a:srgbClr val="808080"/>
                 </a:solidFill>
                 <a:latin typeface="나눔스퀘어"/>
                 <a:ea typeface="나눔스퀘어"/>
@@ -7851,7 +7781,7 @@
             <a:r>
               <a:rPr sz="850" b="0" i="0" spc="-30">
                 <a:solidFill>
-                  <a:srgbClr val="7F7F7F"/>
+                  <a:srgbClr val="808080"/>
                 </a:solidFill>
                 <a:latin typeface="나눔스퀘어"/>
                 <a:ea typeface="나눔스퀘어"/>
@@ -7870,8 +7800,8 @@
         </p:nvSpPr>
         <p:spPr>
           <a:xfrm>
-            <a:off x="274320" y="6492240"/>
-            <a:ext cx="8778240" cy="256032"/>
+            <a:off x="274320" y="6382512"/>
+            <a:ext cx="6583680" cy="365760"/>
           </a:xfrm>
           <a:prstGeom prst="rect">
             <a:avLst/>
@@ -7879,7 +7809,7 @@
           <a:noFill/>
         </p:spPr>
         <p:txBody>
-          <a:bodyPr wrap="square" anchor="t" lIns="36576" rIns="36576" tIns="36576" bIns="36576">
+          <a:bodyPr wrap="square" anchor="b" lIns="36576" rIns="36576" tIns="36576" bIns="36576">
             <a:spAutoFit/>
           </a:bodyPr>
           <a:lstStyle/>
@@ -7890,7 +7820,7 @@
             <a:r>
               <a:rPr sz="750" b="0" i="0" spc="-30">
                 <a:solidFill>
-                  <a:srgbClr val="7F7F7F"/>
+                  <a:srgbClr val="808080"/>
                 </a:solidFill>
                 <a:latin typeface="나눔스퀘어"/>
                 <a:ea typeface="나눔스퀘어"/>
@@ -7903,40 +7833,24 @@
       </p:sp>
       <p:sp>
         <p:nvSpPr>
-          <p:cNvPr id="19" name="Page number"/>
-          <p:cNvSpPr txBox="1"/>
-          <p:nvPr/>
-        </p:nvSpPr>
-        <p:spPr>
-          <a:xfrm>
-            <a:off x="9326880" y="6519672"/>
-            <a:ext cx="457200" cy="228600"/>
-          </a:xfrm>
-          <a:prstGeom prst="rect">
-            <a:avLst/>
-          </a:prstGeom>
-          <a:noFill/>
-        </p:spPr>
-        <p:txBody>
-          <a:bodyPr wrap="square" anchor="t" lIns="36576" rIns="36576" tIns="36576" bIns="36576">
-            <a:spAutoFit/>
-          </a:bodyPr>
-          <a:lstStyle/>
-          <a:p>
-            <a:pPr algn="r">
-              <a:buNone/>
-            </a:pPr>
-            <a:r>
-              <a:rPr sz="800" b="0" i="0" spc="-30">
-                <a:solidFill>
-                  <a:srgbClr val="7F7F7F"/>
-                </a:solidFill>
-                <a:latin typeface="나눔스퀘어"/>
-                <a:ea typeface="나눔스퀘어"/>
-                <a:cs typeface="나눔스퀘어"/>
-              </a:rPr>
-              <a:t>2</a:t>
-            </a:r>
+          <p:cNvPr id="6" name="Slide Number Placeholder 5"/>
+          <p:cNvSpPr>
+            <a:spLocks noGrp="1"/>
+          </p:cNvSpPr>
+          <p:nvPr>
+            <p:ph type="sldNum" sz="quarter" idx="12"/>
+          </p:nvPr>
+        </p:nvSpPr>
+        <p:spPr/>
+        <p:txBody>
+          <a:bodyPr/>
+          <a:lstStyle/>
+          <a:p>
+            <a:fld id="{C0166AD1-3E4E-49AB-A7F9-67C30DF503DC}" type="slidenum">
+              <a:rPr lang="ko-KR" altLang="en-US" smtClean="0"/>
+              <a:t>‹#›</a:t>
+            </a:fld>
+            <a:endParaRPr lang="ko-KR" altLang="en-US"/>
           </a:p>
         </p:txBody>
       </p:sp>
@@ -8080,40 +7994,24 @@
       </p:sp>
       <p:sp>
         <p:nvSpPr>
-          <p:cNvPr id="5" name="Page number"/>
-          <p:cNvSpPr txBox="1"/>
-          <p:nvPr/>
-        </p:nvSpPr>
-        <p:spPr>
-          <a:xfrm>
-            <a:off x="9326880" y="6519672"/>
-            <a:ext cx="457200" cy="228600"/>
-          </a:xfrm>
-          <a:prstGeom prst="rect">
-            <a:avLst/>
-          </a:prstGeom>
-          <a:noFill/>
-        </p:spPr>
-        <p:txBody>
-          <a:bodyPr wrap="square" anchor="t" lIns="36576" rIns="36576" tIns="36576" bIns="36576">
-            <a:spAutoFit/>
-          </a:bodyPr>
-          <a:lstStyle/>
-          <a:p>
-            <a:pPr algn="r">
-              <a:buNone/>
-            </a:pPr>
-            <a:r>
-              <a:rPr sz="800" b="0" i="0" spc="-30">
-                <a:solidFill>
-                  <a:srgbClr val="7F7F7F"/>
-                </a:solidFill>
-                <a:latin typeface="나눔스퀘어"/>
-                <a:ea typeface="나눔스퀘어"/>
-                <a:cs typeface="나눔스퀘어"/>
-              </a:rPr>
-              <a:t>3</a:t>
-            </a:r>
+          <p:cNvPr id="6" name="Slide Number Placeholder 5"/>
+          <p:cNvSpPr>
+            <a:spLocks noGrp="1"/>
+          </p:cNvSpPr>
+          <p:nvPr>
+            <p:ph type="sldNum" sz="quarter" idx="12"/>
+          </p:nvPr>
+        </p:nvSpPr>
+        <p:spPr/>
+        <p:txBody>
+          <a:bodyPr/>
+          <a:lstStyle/>
+          <a:p>
+            <a:fld id="{C0166AD1-3E4E-49AB-A7F9-67C30DF503DC}" type="slidenum">
+              <a:rPr lang="ko-KR" altLang="en-US" smtClean="0"/>
+              <a:t>‹#›</a:t>
+            </a:fld>
+            <a:endParaRPr lang="ko-KR" altLang="en-US"/>
           </a:p>
         </p:txBody>
       </p:sp>
@@ -8143,7 +8041,7 @@
         </p:nvSpPr>
         <p:spPr>
           <a:xfrm>
-            <a:off x="274320" y="201168"/>
+            <a:off x="274320" y="182880"/>
             <a:ext cx="8961120" cy="384048"/>
           </a:xfrm>
           <a:prstGeom prst="rect">
@@ -8152,7 +8050,7 @@
           <a:noFill/>
         </p:spPr>
         <p:txBody>
-          <a:bodyPr wrap="square" anchor="t" lIns="36576" rIns="36576" tIns="36576" bIns="36576">
+          <a:bodyPr wrap="square" anchor="t" lIns="0" rIns="0" tIns="0" bIns="0">
             <a:spAutoFit/>
           </a:bodyPr>
           <a:lstStyle/>
@@ -8163,33 +8061,33 @@
             <a:r>
               <a:rPr sz="1800" b="0" i="0" spc="-30">
                 <a:solidFill>
-                  <a:srgbClr val="A6A6A6"/>
-                </a:solidFill>
-                <a:latin typeface="나눔스퀘어"/>
-                <a:ea typeface="나눔스퀘어"/>
-                <a:cs typeface="나눔스퀘어"/>
-              </a:rPr>
-              <a:t>사업부문별 리뷰</a:t>
+                  <a:srgbClr val="808080"/>
+                </a:solidFill>
+                <a:latin typeface="나눔스퀘어 ExtraBold"/>
+                <a:ea typeface="나눔스퀘어 ExtraBold"/>
+                <a:cs typeface="나눔스퀘어 ExtraBold"/>
+              </a:rPr>
+              <a:t>사업부문별 리뷰  </a:t>
             </a:r>
             <a:r>
               <a:rPr sz="1800" b="0" i="0" spc="-30">
                 <a:solidFill>
-                  <a:srgbClr val="1A1A1A"/>
-                </a:solidFill>
-                <a:latin typeface="나눔스퀘어"/>
-                <a:ea typeface="나눔스퀘어"/>
-                <a:cs typeface="나눔스퀘어"/>
-              </a:rPr>
-              <a:t>   |   </a:t>
+                  <a:srgbClr val="000000"/>
+                </a:solidFill>
+                <a:latin typeface="나눔스퀘어 ExtraBold"/>
+                <a:ea typeface="나눔스퀘어 ExtraBold"/>
+                <a:cs typeface="나눔스퀘어 ExtraBold"/>
+              </a:rPr>
+              <a:t>|  </a:t>
             </a:r>
             <a:r>
               <a:rPr sz="1800" b="0" i="0" spc="-30">
                 <a:solidFill>
-                  <a:srgbClr val="1A1A1A"/>
-                </a:solidFill>
-                <a:latin typeface="나눔스퀘어"/>
-                <a:ea typeface="나눔스퀘어"/>
-                <a:cs typeface="나눔스퀘어"/>
+                  <a:srgbClr val="000000"/>
+                </a:solidFill>
+                <a:latin typeface="나눔스퀘어 ExtraBold"/>
+                <a:ea typeface="나눔스퀘어 ExtraBold"/>
+                <a:cs typeface="나눔스퀘어 ExtraBold"/>
               </a:rPr>
               <a:t>01  석유</a:t>
             </a:r>
@@ -8224,7 +8122,7 @@
             <a:r>
               <a:rPr sz="1400" b="1" i="0" spc="-30">
                 <a:solidFill>
-                  <a:srgbClr val="1A1A1A"/>
+                  <a:srgbClr val="000000"/>
                 </a:solidFill>
                 <a:latin typeface="나눔스퀘어 ExtraBold"/>
                 <a:ea typeface="나눔스퀘어 ExtraBold"/>
@@ -8263,7 +8161,7 @@
             <a:r>
               <a:rPr sz="1300" b="1" i="0" spc="-30">
                 <a:solidFill>
-                  <a:srgbClr val="1A1A1A"/>
+                  <a:srgbClr val="000000"/>
                 </a:solidFill>
                 <a:latin typeface="나눔스퀘어 ExtraBold"/>
                 <a:ea typeface="나눔스퀘어 ExtraBold"/>
@@ -8290,7 +8188,7 @@
           </a:prstGeom>
           <a:ln w="12700">
             <a:solidFill>
-              <a:srgbClr val="BFBFBF"/>
+              <a:srgbClr val="A6A6A6"/>
             </a:solidFill>
           </a:ln>
         </p:spPr>
@@ -8337,7 +8235,7 @@
             <a:r>
               <a:rPr sz="1300" b="1" i="0" spc="-30">
                 <a:solidFill>
-                  <a:srgbClr val="1A1A1A"/>
+                  <a:srgbClr val="000000"/>
                 </a:solidFill>
                 <a:latin typeface="나눔스퀘어 ExtraBold"/>
                 <a:ea typeface="나눔스퀘어 ExtraBold"/>
@@ -8364,7 +8262,7 @@
           </a:prstGeom>
           <a:ln w="12700">
             <a:solidFill>
-              <a:srgbClr val="BFBFBF"/>
+              <a:srgbClr val="A6A6A6"/>
             </a:solidFill>
           </a:ln>
         </p:spPr>
@@ -8453,7 +8351,7 @@
             <a:r>
               <a:rPr sz="1700" b="1" i="0" spc="-30">
                 <a:solidFill>
-                  <a:srgbClr val="002060"/>
+                  <a:srgbClr val="215F9A"/>
                 </a:solidFill>
                 <a:latin typeface="나눔스퀘어 ExtraBold"/>
                 <a:ea typeface="나눔스퀘어 ExtraBold"/>
@@ -8492,7 +8390,7 @@
             <a:r>
               <a:rPr sz="850" b="0" i="0" spc="-30">
                 <a:solidFill>
-                  <a:srgbClr val="7F7F7F"/>
+                  <a:srgbClr val="595959"/>
                 </a:solidFill>
                 <a:latin typeface="나눔스퀘어"/>
                 <a:ea typeface="나눔스퀘어"/>
@@ -8573,7 +8471,7 @@
             <a:r>
               <a:rPr sz="1700" b="1" i="0" spc="-30">
                 <a:solidFill>
-                  <a:srgbClr val="C0392B"/>
+                  <a:srgbClr val="C00000"/>
                 </a:solidFill>
                 <a:latin typeface="나눔스퀘어 ExtraBold"/>
                 <a:ea typeface="나눔스퀘어 ExtraBold"/>
@@ -8612,7 +8510,7 @@
             <a:r>
               <a:rPr sz="850" b="0" i="0" spc="-30">
                 <a:solidFill>
-                  <a:srgbClr val="7F7F7F"/>
+                  <a:srgbClr val="595959"/>
                 </a:solidFill>
                 <a:latin typeface="나눔스퀘어"/>
                 <a:ea typeface="나눔스퀘어"/>
@@ -8693,7 +8591,7 @@
             <a:r>
               <a:rPr sz="1700" b="1" i="0" spc="-30">
                 <a:solidFill>
-                  <a:srgbClr val="C0392B"/>
+                  <a:srgbClr val="C00000"/>
                 </a:solidFill>
                 <a:latin typeface="나눔스퀘어 ExtraBold"/>
                 <a:ea typeface="나눔스퀘어 ExtraBold"/>
@@ -8732,7 +8630,7 @@
             <a:r>
               <a:rPr sz="850" b="0" i="0" spc="-30">
                 <a:solidFill>
-                  <a:srgbClr val="7F7F7F"/>
+                  <a:srgbClr val="595959"/>
                 </a:solidFill>
                 <a:latin typeface="나눔스퀘어"/>
                 <a:ea typeface="나눔스퀘어"/>
@@ -8752,11 +8650,11 @@
         <p:spPr>
           <a:xfrm>
             <a:off x="274320" y="2697480"/>
-            <a:ext cx="1234440" cy="237744"/>
+            <a:ext cx="1234440" cy="219456"/>
           </a:xfrm>
           <a:prstGeom prst="roundRect">
             <a:avLst>
-              <a:gd name="adj" fmla="val 50000"/>
+              <a:gd name="adj" fmla="val 19092"/>
             </a:avLst>
           </a:prstGeom>
           <a:solidFill>
@@ -8764,7 +8662,7 @@
           </a:solidFill>
           <a:ln w="9525">
             <a:solidFill>
-              <a:srgbClr val="A6A6A6"/>
+              <a:srgbClr val="BFBFBF"/>
             </a:solidFill>
           </a:ln>
           <a:effectLst/>
@@ -8798,7 +8696,7 @@
         <p:spPr>
           <a:xfrm>
             <a:off x="274320" y="2697480"/>
-            <a:ext cx="1234440" cy="237744"/>
+            <a:ext cx="1234440" cy="219456"/>
           </a:xfrm>
           <a:prstGeom prst="rect">
             <a:avLst/>
@@ -8817,7 +8715,7 @@
             <a:r>
               <a:rPr sz="950" b="1" i="0" spc="-30">
                 <a:solidFill>
-                  <a:srgbClr val="1A1A1A"/>
+                  <a:srgbClr val="404040"/>
                 </a:solidFill>
                 <a:latin typeface="나눔스퀘어 Bold"/>
                 <a:ea typeface="나눔스퀘어 Bold"/>
@@ -8860,7 +8758,7 @@
             <a:r>
               <a:rPr sz="1100" b="0" i="0" spc="-30">
                 <a:solidFill>
-                  <a:srgbClr val="1A1A1A"/>
+                  <a:srgbClr val="000000"/>
                 </a:solidFill>
                 <a:latin typeface="나눔스퀘어"/>
                 <a:ea typeface="나눔스퀘어"/>
@@ -8879,7 +8777,7 @@
             <a:r>
               <a:rPr sz="800" b="0" i="0" spc="-30">
                 <a:solidFill>
-                  <a:srgbClr val="7F7F7F"/>
+                  <a:srgbClr val="808080"/>
                 </a:solidFill>
                 <a:latin typeface="나눔스퀘어"/>
                 <a:ea typeface="나눔스퀘어"/>
@@ -8899,7 +8797,7 @@
             <a:r>
               <a:rPr sz="1100" b="0" i="0" spc="-30">
                 <a:solidFill>
-                  <a:srgbClr val="1A1A1A"/>
+                  <a:srgbClr val="000000"/>
                 </a:solidFill>
                 <a:latin typeface="나눔스퀘어"/>
                 <a:ea typeface="나눔스퀘어"/>
@@ -8918,7 +8816,7 @@
             <a:r>
               <a:rPr sz="800" b="0" i="0" spc="-30">
                 <a:solidFill>
-                  <a:srgbClr val="7F7F7F"/>
+                  <a:srgbClr val="808080"/>
                 </a:solidFill>
                 <a:latin typeface="나눔스퀘어"/>
                 <a:ea typeface="나눔스퀘어"/>
@@ -8938,7 +8836,7 @@
             <a:r>
               <a:rPr sz="1100" b="0" i="0" spc="-30">
                 <a:solidFill>
-                  <a:srgbClr val="1A1A1A"/>
+                  <a:srgbClr val="000000"/>
                 </a:solidFill>
                 <a:latin typeface="나눔스퀘어"/>
                 <a:ea typeface="나눔스퀘어"/>
@@ -8957,7 +8855,7 @@
             <a:r>
               <a:rPr sz="800" b="0" i="0" spc="-30">
                 <a:solidFill>
-                  <a:srgbClr val="7F7F7F"/>
+                  <a:srgbClr val="808080"/>
                 </a:solidFill>
                 <a:latin typeface="나눔스퀘어"/>
                 <a:ea typeface="나눔스퀘어"/>
@@ -8977,7 +8875,7 @@
             <a:r>
               <a:rPr sz="1100" b="0" i="0" spc="-30">
                 <a:solidFill>
-                  <a:srgbClr val="1A1A1A"/>
+                  <a:srgbClr val="000000"/>
                 </a:solidFill>
                 <a:latin typeface="나눔스퀘어"/>
                 <a:ea typeface="나눔스퀘어"/>
@@ -8996,7 +8894,7 @@
             <a:r>
               <a:rPr sz="800" b="0" i="0" spc="-30">
                 <a:solidFill>
-                  <a:srgbClr val="7F7F7F"/>
+                  <a:srgbClr val="808080"/>
                 </a:solidFill>
                 <a:latin typeface="나눔스퀘어"/>
                 <a:ea typeface="나눔스퀘어"/>
@@ -9022,7 +8920,7 @@
             <a:avLst/>
           </a:prstGeom>
           <a:solidFill>
-            <a:srgbClr val="DEEBF7"/>
+            <a:srgbClr val="DCEAF7"/>
           </a:solidFill>
           <a:ln>
             <a:noFill/>
@@ -9077,7 +8975,7 @@
             <a:r>
               <a:rPr sz="1150" b="1" i="0" spc="-30">
                 <a:solidFill>
-                  <a:srgbClr val="002060"/>
+                  <a:srgbClr val="215F9A"/>
                 </a:solidFill>
                 <a:latin typeface="나눔스퀘어 Bold"/>
                 <a:ea typeface="나눔스퀘어 Bold"/>
@@ -9097,15 +8995,15 @@
         <p:spPr>
           <a:xfrm>
             <a:off x="5074920" y="1783080"/>
-            <a:ext cx="1234440" cy="237744"/>
+            <a:ext cx="1234440" cy="219456"/>
           </a:xfrm>
           <a:prstGeom prst="roundRect">
             <a:avLst>
-              <a:gd name="adj" fmla="val 50000"/>
+              <a:gd name="adj" fmla="val 16667"/>
             </a:avLst>
           </a:prstGeom>
           <a:solidFill>
-            <a:srgbClr val="002060"/>
+            <a:srgbClr val="215F9A"/>
           </a:solidFill>
           <a:ln>
             <a:noFill/>
@@ -9141,7 +9039,7 @@
         <p:spPr>
           <a:xfrm>
             <a:off x="5074920" y="1783080"/>
-            <a:ext cx="1234440" cy="237744"/>
+            <a:ext cx="1234440" cy="219456"/>
           </a:xfrm>
           <a:prstGeom prst="rect">
             <a:avLst/>
@@ -9204,7 +9102,7 @@
                       <a:r>
                         <a:rPr sz="1000" b="1" i="0" spc="-30">
                           <a:solidFill>
-                            <a:srgbClr val="1A1A1A"/>
+                            <a:srgbClr val="000000"/>
                           </a:solidFill>
                           <a:latin typeface="나눔스퀘어 Bold"/>
                           <a:ea typeface="나눔스퀘어 Bold"/>
@@ -9241,7 +9139,7 @@
                   </a:txBody>
                   <a:tcPr marL="45720" marR="45720" marT="18288" marB="18288" anchor="ctr">
                     <a:solidFill>
-                      <a:srgbClr val="F26B43"/>
+                      <a:srgbClr val="C00000"/>
                     </a:solidFill>
                   </a:tcPr>
                 </a:tc>
@@ -9254,7 +9152,7 @@
                       <a:r>
                         <a:rPr sz="950" b="0" i="0" spc="-30">
                           <a:solidFill>
-                            <a:srgbClr val="1A1A1A"/>
+                            <a:srgbClr val="000000"/>
                           </a:solidFill>
                           <a:latin typeface="나눔스퀘어"/>
                           <a:ea typeface="나눔스퀘어"/>
@@ -9281,7 +9179,7 @@
                       <a:r>
                         <a:rPr sz="1000" b="1" i="0" spc="-30">
                           <a:solidFill>
-                            <a:srgbClr val="1A1A1A"/>
+                            <a:srgbClr val="000000"/>
                           </a:solidFill>
                           <a:latin typeface="나눔스퀘어 Bold"/>
                           <a:ea typeface="나눔스퀘어 Bold"/>
@@ -9306,7 +9204,7 @@
                       <a:r>
                         <a:rPr sz="900" b="1" i="0" spc="-30">
                           <a:solidFill>
-                            <a:srgbClr val="1A1A1A"/>
+                            <a:srgbClr val="000000"/>
                           </a:solidFill>
                           <a:latin typeface="나눔스퀘어 Bold"/>
                           <a:ea typeface="나눔스퀘어 Bold"/>
@@ -9331,7 +9229,7 @@
                       <a:r>
                         <a:rPr sz="950" b="0" i="0" spc="-30">
                           <a:solidFill>
-                            <a:srgbClr val="1A1A1A"/>
+                            <a:srgbClr val="000000"/>
                           </a:solidFill>
                           <a:latin typeface="나눔스퀘어"/>
                           <a:ea typeface="나눔스퀘어"/>
@@ -9358,7 +9256,7 @@
                       <a:r>
                         <a:rPr sz="1000" b="1" i="0" spc="-30">
                           <a:solidFill>
-                            <a:srgbClr val="1A1A1A"/>
+                            <a:srgbClr val="000000"/>
                           </a:solidFill>
                           <a:latin typeface="나눔스퀘어 Bold"/>
                           <a:ea typeface="나눔스퀘어 Bold"/>
@@ -9395,7 +9293,7 @@
                   </a:txBody>
                   <a:tcPr marL="45720" marR="45720" marT="18288" marB="18288" anchor="ctr">
                     <a:solidFill>
-                      <a:srgbClr val="002060"/>
+                      <a:srgbClr val="215F9A"/>
                     </a:solidFill>
                   </a:tcPr>
                 </a:tc>
@@ -9408,7 +9306,7 @@
                       <a:r>
                         <a:rPr sz="950" b="0" i="0" spc="-30">
                           <a:solidFill>
-                            <a:srgbClr val="1A1A1A"/>
+                            <a:srgbClr val="000000"/>
                           </a:solidFill>
                           <a:latin typeface="나눔스퀘어"/>
                           <a:ea typeface="나눔스퀘어"/>
@@ -9435,7 +9333,7 @@
                       <a:r>
                         <a:rPr sz="1000" b="1" i="0" spc="-30">
                           <a:solidFill>
-                            <a:srgbClr val="1A1A1A"/>
+                            <a:srgbClr val="000000"/>
                           </a:solidFill>
                           <a:latin typeface="나눔스퀘어 Bold"/>
                           <a:ea typeface="나눔스퀘어 Bold"/>
@@ -9460,7 +9358,7 @@
                       <a:r>
                         <a:rPr sz="900" b="1" i="0" spc="-30">
                           <a:solidFill>
-                            <a:srgbClr val="1A1A1A"/>
+                            <a:srgbClr val="000000"/>
                           </a:solidFill>
                           <a:latin typeface="나눔스퀘어 Bold"/>
                           <a:ea typeface="나눔스퀘어 Bold"/>
@@ -9485,7 +9383,7 @@
                       <a:r>
                         <a:rPr sz="950" b="0" i="0" spc="-30">
                           <a:solidFill>
-                            <a:srgbClr val="1A1A1A"/>
+                            <a:srgbClr val="000000"/>
                           </a:solidFill>
                           <a:latin typeface="나눔스퀘어"/>
                           <a:ea typeface="나눔스퀘어"/>
@@ -9515,15 +9413,15 @@
         <p:spPr>
           <a:xfrm>
             <a:off x="5074920" y="4142232"/>
-            <a:ext cx="1234440" cy="237744"/>
+            <a:ext cx="1234440" cy="219456"/>
           </a:xfrm>
           <a:prstGeom prst="roundRect">
             <a:avLst>
-              <a:gd name="adj" fmla="val 50000"/>
+              <a:gd name="adj" fmla="val 16667"/>
             </a:avLst>
           </a:prstGeom>
           <a:solidFill>
-            <a:srgbClr val="002060"/>
+            <a:srgbClr val="215F9A"/>
           </a:solidFill>
           <a:ln>
             <a:noFill/>
@@ -9559,7 +9457,7 @@
         <p:spPr>
           <a:xfrm>
             <a:off x="5074920" y="4142232"/>
-            <a:ext cx="1234440" cy="237744"/>
+            <a:ext cx="1234440" cy="219456"/>
           </a:xfrm>
           <a:prstGeom prst="rect">
             <a:avLst/>
@@ -9620,7 +9518,7 @@
             <a:r>
               <a:rPr sz="1050" b="1" i="0" spc="-30">
                 <a:solidFill>
-                  <a:srgbClr val="002060"/>
+                  <a:srgbClr val="215F9A"/>
                 </a:solidFill>
                 <a:latin typeface="나눔스퀘어 ExtraBold"/>
                 <a:ea typeface="나눔스퀘어 ExtraBold"/>
@@ -9631,7 +9529,7 @@
             <a:r>
               <a:rPr sz="1050" b="0" i="0" spc="-30">
                 <a:solidFill>
-                  <a:srgbClr val="1A1A1A"/>
+                  <a:srgbClr val="000000"/>
                 </a:solidFill>
                 <a:latin typeface="나눔스퀘어"/>
                 <a:ea typeface="나눔스퀘어"/>
@@ -9650,7 +9548,7 @@
             <a:r>
               <a:rPr sz="1050" b="1" i="0" spc="-30">
                 <a:solidFill>
-                  <a:srgbClr val="002060"/>
+                  <a:srgbClr val="215F9A"/>
                 </a:solidFill>
                 <a:latin typeface="나눔스퀘어 ExtraBold"/>
                 <a:ea typeface="나눔스퀘어 ExtraBold"/>
@@ -9661,7 +9559,7 @@
             <a:r>
               <a:rPr sz="1050" b="0" i="0" spc="-30">
                 <a:solidFill>
-                  <a:srgbClr val="1A1A1A"/>
+                  <a:srgbClr val="000000"/>
                 </a:solidFill>
                 <a:latin typeface="나눔스퀘어"/>
                 <a:ea typeface="나눔스퀘어"/>
@@ -9680,7 +9578,7 @@
             <a:r>
               <a:rPr sz="1050" b="1" i="0" spc="-30">
                 <a:solidFill>
-                  <a:srgbClr val="002060"/>
+                  <a:srgbClr val="215F9A"/>
                 </a:solidFill>
                 <a:latin typeface="나눔스퀘어 ExtraBold"/>
                 <a:ea typeface="나눔스퀘어 ExtraBold"/>
@@ -9691,7 +9589,7 @@
             <a:r>
               <a:rPr sz="1050" b="0" i="0" spc="-30">
                 <a:solidFill>
-                  <a:srgbClr val="1A1A1A"/>
+                  <a:srgbClr val="000000"/>
                 </a:solidFill>
                 <a:latin typeface="나눔스퀘어"/>
                 <a:ea typeface="나눔스퀘어"/>
@@ -9717,7 +9615,7 @@
             <a:avLst/>
           </a:prstGeom>
           <a:solidFill>
-            <a:srgbClr val="002060"/>
+            <a:srgbClr val="215F9A"/>
           </a:solidFill>
           <a:ln>
             <a:noFill/>
@@ -9775,7 +9673,7 @@
             <a:r>
               <a:rPr sz="900" b="1" i="0" spc="-30">
                 <a:solidFill>
-                  <a:srgbClr val="BFCFE8"/>
+                  <a:srgbClr val="DCEAF7"/>
                 </a:solidFill>
                 <a:latin typeface="나눔스퀘어 Bold"/>
                 <a:ea typeface="나눔스퀘어 Bold"/>
@@ -9810,8 +9708,8 @@
         </p:nvSpPr>
         <p:spPr>
           <a:xfrm>
-            <a:off x="274320" y="6492240"/>
-            <a:ext cx="8778240" cy="256032"/>
+            <a:off x="274320" y="6382512"/>
+            <a:ext cx="6583680" cy="365760"/>
           </a:xfrm>
           <a:prstGeom prst="rect">
             <a:avLst/>
@@ -9819,7 +9717,7 @@
           <a:noFill/>
         </p:spPr>
         <p:txBody>
-          <a:bodyPr wrap="square" anchor="t" lIns="36576" rIns="36576" tIns="36576" bIns="36576">
+          <a:bodyPr wrap="square" anchor="b" lIns="36576" rIns="36576" tIns="36576" bIns="36576">
             <a:spAutoFit/>
           </a:bodyPr>
           <a:lstStyle/>
@@ -9830,7 +9728,7 @@
             <a:r>
               <a:rPr sz="750" b="0" i="0" spc="-30">
                 <a:solidFill>
-                  <a:srgbClr val="7F7F7F"/>
+                  <a:srgbClr val="808080"/>
                 </a:solidFill>
                 <a:latin typeface="나눔스퀘어"/>
                 <a:ea typeface="나눔스퀘어"/>
@@ -9843,40 +9741,24 @@
       </p:sp>
       <p:sp>
         <p:nvSpPr>
-          <p:cNvPr id="31" name="Page number"/>
-          <p:cNvSpPr txBox="1"/>
-          <p:nvPr/>
-        </p:nvSpPr>
-        <p:spPr>
-          <a:xfrm>
-            <a:off x="9326880" y="6519672"/>
-            <a:ext cx="457200" cy="228600"/>
-          </a:xfrm>
-          <a:prstGeom prst="rect">
-            <a:avLst/>
-          </a:prstGeom>
-          <a:noFill/>
-        </p:spPr>
-        <p:txBody>
-          <a:bodyPr wrap="square" anchor="t" lIns="36576" rIns="36576" tIns="36576" bIns="36576">
-            <a:spAutoFit/>
-          </a:bodyPr>
-          <a:lstStyle/>
-          <a:p>
-            <a:pPr algn="r">
-              <a:buNone/>
-            </a:pPr>
-            <a:r>
-              <a:rPr sz="800" b="0" i="0" spc="-30">
-                <a:solidFill>
-                  <a:srgbClr val="7F7F7F"/>
-                </a:solidFill>
-                <a:latin typeface="나눔스퀘어"/>
-                <a:ea typeface="나눔스퀘어"/>
-                <a:cs typeface="나눔스퀘어"/>
-              </a:rPr>
-              <a:t>4</a:t>
-            </a:r>
+          <p:cNvPr id="6" name="Slide Number Placeholder 5"/>
+          <p:cNvSpPr>
+            <a:spLocks noGrp="1"/>
+          </p:cNvSpPr>
+          <p:nvPr>
+            <p:ph type="sldNum" sz="quarter" idx="12"/>
+          </p:nvPr>
+        </p:nvSpPr>
+        <p:spPr/>
+        <p:txBody>
+          <a:bodyPr/>
+          <a:lstStyle/>
+          <a:p>
+            <a:fld id="{C0166AD1-3E4E-49AB-A7F9-67C30DF503DC}" type="slidenum">
+              <a:rPr lang="ko-KR" altLang="en-US" smtClean="0"/>
+              <a:t>‹#›</a:t>
+            </a:fld>
+            <a:endParaRPr lang="ko-KR" altLang="en-US"/>
           </a:p>
         </p:txBody>
       </p:sp>
@@ -9906,7 +9788,7 @@
         </p:nvSpPr>
         <p:spPr>
           <a:xfrm>
-            <a:off x="274320" y="201168"/>
+            <a:off x="274320" y="182880"/>
             <a:ext cx="8961120" cy="384048"/>
           </a:xfrm>
           <a:prstGeom prst="rect">
@@ -9915,7 +9797,7 @@
           <a:noFill/>
         </p:spPr>
         <p:txBody>
-          <a:bodyPr wrap="square" anchor="t" lIns="36576" rIns="36576" tIns="36576" bIns="36576">
+          <a:bodyPr wrap="square" anchor="t" lIns="0" rIns="0" tIns="0" bIns="0">
             <a:spAutoFit/>
           </a:bodyPr>
           <a:lstStyle/>
@@ -9926,33 +9808,33 @@
             <a:r>
               <a:rPr sz="1800" b="0" i="0" spc="-30">
                 <a:solidFill>
-                  <a:srgbClr val="A6A6A6"/>
-                </a:solidFill>
-                <a:latin typeface="나눔스퀘어"/>
-                <a:ea typeface="나눔스퀘어"/>
-                <a:cs typeface="나눔스퀘어"/>
-              </a:rPr>
-              <a:t>사업부문별 리뷰</a:t>
+                  <a:srgbClr val="808080"/>
+                </a:solidFill>
+                <a:latin typeface="나눔스퀘어 ExtraBold"/>
+                <a:ea typeface="나눔스퀘어 ExtraBold"/>
+                <a:cs typeface="나눔스퀘어 ExtraBold"/>
+              </a:rPr>
+              <a:t>사업부문별 리뷰  </a:t>
             </a:r>
             <a:r>
               <a:rPr sz="1800" b="0" i="0" spc="-30">
                 <a:solidFill>
-                  <a:srgbClr val="1A1A1A"/>
-                </a:solidFill>
-                <a:latin typeface="나눔스퀘어"/>
-                <a:ea typeface="나눔스퀘어"/>
-                <a:cs typeface="나눔스퀘어"/>
-              </a:rPr>
-              <a:t>   |   </a:t>
+                  <a:srgbClr val="000000"/>
+                </a:solidFill>
+                <a:latin typeface="나눔스퀘어 ExtraBold"/>
+                <a:ea typeface="나눔스퀘어 ExtraBold"/>
+                <a:cs typeface="나눔스퀘어 ExtraBold"/>
+              </a:rPr>
+              <a:t>|  </a:t>
             </a:r>
             <a:r>
               <a:rPr sz="1800" b="0" i="0" spc="-30">
                 <a:solidFill>
-                  <a:srgbClr val="1A1A1A"/>
-                </a:solidFill>
-                <a:latin typeface="나눔스퀘어"/>
-                <a:ea typeface="나눔스퀘어"/>
-                <a:cs typeface="나눔스퀘어"/>
+                  <a:srgbClr val="000000"/>
+                </a:solidFill>
+                <a:latin typeface="나눔스퀘어 ExtraBold"/>
+                <a:ea typeface="나눔스퀘어 ExtraBold"/>
+                <a:cs typeface="나눔스퀘어 ExtraBold"/>
               </a:rPr>
               <a:t>01  석유  ·  계열 매출 구조</a:t>
             </a:r>
@@ -9987,7 +9869,7 @@
             <a:r>
               <a:rPr sz="1400" b="1" i="0" spc="-30">
                 <a:solidFill>
-                  <a:srgbClr val="1A1A1A"/>
+                  <a:srgbClr val="000000"/>
                 </a:solidFill>
                 <a:latin typeface="나눔스퀘어 ExtraBold"/>
                 <a:ea typeface="나눔스퀘어 ExtraBold"/>
@@ -10026,7 +9908,7 @@
             <a:r>
               <a:rPr sz="1300" b="1" i="0" spc="-30">
                 <a:solidFill>
-                  <a:srgbClr val="1A1A1A"/>
+                  <a:srgbClr val="000000"/>
                 </a:solidFill>
                 <a:latin typeface="나눔스퀘어 ExtraBold"/>
                 <a:ea typeface="나눔스퀘어 ExtraBold"/>
@@ -10053,7 +9935,7 @@
           </a:prstGeom>
           <a:ln w="12700">
             <a:solidFill>
-              <a:srgbClr val="BFBFBF"/>
+              <a:srgbClr val="A6A6A6"/>
             </a:solidFill>
           </a:ln>
         </p:spPr>
@@ -10100,7 +9982,7 @@
             <a:r>
               <a:rPr sz="1300" b="1" i="0" spc="-30">
                 <a:solidFill>
-                  <a:srgbClr val="1A1A1A"/>
+                  <a:srgbClr val="000000"/>
                 </a:solidFill>
                 <a:latin typeface="나눔스퀘어 ExtraBold"/>
                 <a:ea typeface="나눔스퀘어 ExtraBold"/>
@@ -10127,7 +10009,7 @@
           </a:prstGeom>
           <a:ln w="12700">
             <a:solidFill>
-              <a:srgbClr val="BFBFBF"/>
+              <a:srgbClr val="A6A6A6"/>
             </a:solidFill>
           </a:ln>
         </p:spPr>
@@ -10214,7 +10096,7 @@
             <a:r>
               <a:rPr sz="1000" b="1" i="0" spc="-30">
                 <a:solidFill>
-                  <a:srgbClr val="1A1A1A"/>
+                  <a:srgbClr val="000000"/>
                 </a:solidFill>
                 <a:latin typeface="나눔스퀘어 Bold"/>
                 <a:ea typeface="나눔스퀘어 Bold"/>
@@ -10225,7 +10107,7 @@
             <a:r>
               <a:rPr sz="1000" b="0" i="0" spc="-30">
                 <a:solidFill>
-                  <a:srgbClr val="1A1A1A"/>
+                  <a:srgbClr val="000000"/>
                 </a:solidFill>
                 <a:latin typeface="나눔스퀘어"/>
                 <a:ea typeface="나눔스퀘어"/>
@@ -10245,7 +10127,7 @@
             <a:r>
               <a:rPr sz="1000" b="1" i="0" spc="-30">
                 <a:solidFill>
-                  <a:srgbClr val="1A1A1A"/>
+                  <a:srgbClr val="000000"/>
                 </a:solidFill>
                 <a:latin typeface="나눔스퀘어 Bold"/>
                 <a:ea typeface="나눔스퀘어 Bold"/>
@@ -10256,7 +10138,7 @@
             <a:r>
               <a:rPr sz="1000" b="0" i="0" spc="-30">
                 <a:solidFill>
-                  <a:srgbClr val="1A1A1A"/>
+                  <a:srgbClr val="000000"/>
                 </a:solidFill>
                 <a:latin typeface="나눔스퀘어"/>
                 <a:ea typeface="나눔스퀘어"/>
@@ -10273,7 +10155,7 @@
             <a:r>
               <a:rPr sz="1000" b="1" i="0" spc="-30">
                 <a:solidFill>
-                  <a:srgbClr val="1A1A1A"/>
+                  <a:srgbClr val="000000"/>
                 </a:solidFill>
                 <a:latin typeface="나눔스퀘어 Bold"/>
                 <a:ea typeface="나눔스퀘어 Bold"/>
@@ -10284,7 +10166,7 @@
             <a:r>
               <a:rPr sz="1000" b="0" i="0" spc="-30">
                 <a:solidFill>
-                  <a:srgbClr val="1A1A1A"/>
+                  <a:srgbClr val="000000"/>
                 </a:solidFill>
                 <a:latin typeface="나눔스퀘어"/>
                 <a:ea typeface="나눔스퀘어"/>
@@ -10303,8 +10185,8 @@
         </p:nvSpPr>
         <p:spPr>
           <a:xfrm>
-            <a:off x="274320" y="6492240"/>
-            <a:ext cx="8778240" cy="256032"/>
+            <a:off x="274320" y="6382512"/>
+            <a:ext cx="6583680" cy="365760"/>
           </a:xfrm>
           <a:prstGeom prst="rect">
             <a:avLst/>
@@ -10312,7 +10194,7 @@
           <a:noFill/>
         </p:spPr>
         <p:txBody>
-          <a:bodyPr wrap="square" anchor="t" lIns="36576" rIns="36576" tIns="36576" bIns="36576">
+          <a:bodyPr wrap="square" anchor="b" lIns="36576" rIns="36576" tIns="36576" bIns="36576">
             <a:spAutoFit/>
           </a:bodyPr>
           <a:lstStyle/>
@@ -10323,7 +10205,7 @@
             <a:r>
               <a:rPr sz="750" b="0" i="0" spc="-30">
                 <a:solidFill>
-                  <a:srgbClr val="7F7F7F"/>
+                  <a:srgbClr val="808080"/>
                 </a:solidFill>
                 <a:latin typeface="나눔스퀘어"/>
                 <a:ea typeface="나눔스퀘어"/>
@@ -10336,40 +10218,24 @@
       </p:sp>
       <p:sp>
         <p:nvSpPr>
-          <p:cNvPr id="12" name="Page number"/>
-          <p:cNvSpPr txBox="1"/>
-          <p:nvPr/>
-        </p:nvSpPr>
-        <p:spPr>
-          <a:xfrm>
-            <a:off x="9326880" y="6519672"/>
-            <a:ext cx="457200" cy="228600"/>
-          </a:xfrm>
-          <a:prstGeom prst="rect">
-            <a:avLst/>
-          </a:prstGeom>
-          <a:noFill/>
-        </p:spPr>
-        <p:txBody>
-          <a:bodyPr wrap="square" anchor="t" lIns="36576" rIns="36576" tIns="36576" bIns="36576">
-            <a:spAutoFit/>
-          </a:bodyPr>
-          <a:lstStyle/>
-          <a:p>
-            <a:pPr algn="r">
-              <a:buNone/>
-            </a:pPr>
-            <a:r>
-              <a:rPr sz="800" b="0" i="0" spc="-30">
-                <a:solidFill>
-                  <a:srgbClr val="7F7F7F"/>
-                </a:solidFill>
-                <a:latin typeface="나눔스퀘어"/>
-                <a:ea typeface="나눔스퀘어"/>
-                <a:cs typeface="나눔스퀘어"/>
-              </a:rPr>
-              <a:t>5</a:t>
-            </a:r>
+          <p:cNvPr id="6" name="Slide Number Placeholder 5"/>
+          <p:cNvSpPr>
+            <a:spLocks noGrp="1"/>
+          </p:cNvSpPr>
+          <p:nvPr>
+            <p:ph type="sldNum" sz="quarter" idx="12"/>
+          </p:nvPr>
+        </p:nvSpPr>
+        <p:spPr/>
+        <p:txBody>
+          <a:bodyPr/>
+          <a:lstStyle/>
+          <a:p>
+            <a:fld id="{C0166AD1-3E4E-49AB-A7F9-67C30DF503DC}" type="slidenum">
+              <a:rPr lang="ko-KR" altLang="en-US" smtClean="0"/>
+              <a:t>‹#›</a:t>
+            </a:fld>
+            <a:endParaRPr lang="ko-KR" altLang="en-US"/>
           </a:p>
         </p:txBody>
       </p:sp>
@@ -10399,7 +10265,7 @@
         </p:nvSpPr>
         <p:spPr>
           <a:xfrm>
-            <a:off x="274320" y="201168"/>
+            <a:off x="274320" y="182880"/>
             <a:ext cx="8961120" cy="384048"/>
           </a:xfrm>
           <a:prstGeom prst="rect">
@@ -10408,7 +10274,7 @@
           <a:noFill/>
         </p:spPr>
         <p:txBody>
-          <a:bodyPr wrap="square" anchor="t" lIns="36576" rIns="36576" tIns="36576" bIns="36576">
+          <a:bodyPr wrap="square" anchor="t" lIns="0" rIns="0" tIns="0" bIns="0">
             <a:spAutoFit/>
           </a:bodyPr>
           <a:lstStyle/>
@@ -10419,33 +10285,33 @@
             <a:r>
               <a:rPr sz="1800" b="0" i="0" spc="-30">
                 <a:solidFill>
-                  <a:srgbClr val="A6A6A6"/>
-                </a:solidFill>
-                <a:latin typeface="나눔스퀘어"/>
-                <a:ea typeface="나눔스퀘어"/>
-                <a:cs typeface="나눔스퀘어"/>
-              </a:rPr>
-              <a:t>사업부문별 리뷰</a:t>
+                  <a:srgbClr val="808080"/>
+                </a:solidFill>
+                <a:latin typeface="나눔스퀘어 ExtraBold"/>
+                <a:ea typeface="나눔스퀘어 ExtraBold"/>
+                <a:cs typeface="나눔스퀘어 ExtraBold"/>
+              </a:rPr>
+              <a:t>사업부문별 리뷰  </a:t>
             </a:r>
             <a:r>
               <a:rPr sz="1800" b="0" i="0" spc="-30">
                 <a:solidFill>
-                  <a:srgbClr val="1A1A1A"/>
-                </a:solidFill>
-                <a:latin typeface="나눔스퀘어"/>
-                <a:ea typeface="나눔스퀘어"/>
-                <a:cs typeface="나눔스퀘어"/>
-              </a:rPr>
-              <a:t>   |   </a:t>
+                  <a:srgbClr val="000000"/>
+                </a:solidFill>
+                <a:latin typeface="나눔스퀘어 ExtraBold"/>
+                <a:ea typeface="나눔스퀘어 ExtraBold"/>
+                <a:cs typeface="나눔스퀘어 ExtraBold"/>
+              </a:rPr>
+              <a:t>|  </a:t>
             </a:r>
             <a:r>
               <a:rPr sz="1800" b="0" i="0" spc="-30">
                 <a:solidFill>
-                  <a:srgbClr val="1A1A1A"/>
-                </a:solidFill>
-                <a:latin typeface="나눔스퀘어"/>
-                <a:ea typeface="나눔스퀘어"/>
-                <a:cs typeface="나눔스퀘어"/>
+                  <a:srgbClr val="000000"/>
+                </a:solidFill>
+                <a:latin typeface="나눔스퀘어 ExtraBold"/>
+                <a:ea typeface="나눔스퀘어 ExtraBold"/>
+                <a:cs typeface="나눔스퀘어 ExtraBold"/>
               </a:rPr>
               <a:t>02  화학</a:t>
             </a:r>
@@ -10480,7 +10346,7 @@
             <a:r>
               <a:rPr sz="1400" b="1" i="0" spc="-30">
                 <a:solidFill>
-                  <a:srgbClr val="1A1A1A"/>
+                  <a:srgbClr val="000000"/>
                 </a:solidFill>
                 <a:latin typeface="나눔스퀘어 ExtraBold"/>
                 <a:ea typeface="나눔스퀘어 ExtraBold"/>
@@ -10519,7 +10385,7 @@
             <a:r>
               <a:rPr sz="1300" b="1" i="0" spc="-30">
                 <a:solidFill>
-                  <a:srgbClr val="1A1A1A"/>
+                  <a:srgbClr val="000000"/>
                 </a:solidFill>
                 <a:latin typeface="나눔스퀘어 ExtraBold"/>
                 <a:ea typeface="나눔스퀘어 ExtraBold"/>
@@ -10546,7 +10412,7 @@
           </a:prstGeom>
           <a:ln w="12700">
             <a:solidFill>
-              <a:srgbClr val="BFBFBF"/>
+              <a:srgbClr val="A6A6A6"/>
             </a:solidFill>
           </a:ln>
         </p:spPr>
@@ -10593,7 +10459,7 @@
             <a:r>
               <a:rPr sz="1300" b="1" i="0" spc="-30">
                 <a:solidFill>
-                  <a:srgbClr val="1A1A1A"/>
+                  <a:srgbClr val="000000"/>
                 </a:solidFill>
                 <a:latin typeface="나눔스퀘어 ExtraBold"/>
                 <a:ea typeface="나눔스퀘어 ExtraBold"/>
@@ -10620,7 +10486,7 @@
           </a:prstGeom>
           <a:ln w="12700">
             <a:solidFill>
-              <a:srgbClr val="BFBFBF"/>
+              <a:srgbClr val="A6A6A6"/>
             </a:solidFill>
           </a:ln>
         </p:spPr>
@@ -10709,7 +10575,7 @@
             <a:r>
               <a:rPr sz="1700" b="1" i="0" spc="-30">
                 <a:solidFill>
-                  <a:srgbClr val="002060"/>
+                  <a:srgbClr val="215F9A"/>
                 </a:solidFill>
                 <a:latin typeface="나눔스퀘어 ExtraBold"/>
                 <a:ea typeface="나눔스퀘어 ExtraBold"/>
@@ -10748,7 +10614,7 @@
             <a:r>
               <a:rPr sz="850" b="0" i="0" spc="-30">
                 <a:solidFill>
-                  <a:srgbClr val="7F7F7F"/>
+                  <a:srgbClr val="595959"/>
                 </a:solidFill>
                 <a:latin typeface="나눔스퀘어"/>
                 <a:ea typeface="나눔스퀘어"/>
@@ -10829,7 +10695,7 @@
             <a:r>
               <a:rPr sz="1700" b="1" i="0" spc="-30">
                 <a:solidFill>
-                  <a:srgbClr val="C0392B"/>
+                  <a:srgbClr val="C00000"/>
                 </a:solidFill>
                 <a:latin typeface="나눔스퀘어 ExtraBold"/>
                 <a:ea typeface="나눔스퀘어 ExtraBold"/>
@@ -10868,7 +10734,7 @@
             <a:r>
               <a:rPr sz="850" b="0" i="0" spc="-30">
                 <a:solidFill>
-                  <a:srgbClr val="7F7F7F"/>
+                  <a:srgbClr val="595959"/>
                 </a:solidFill>
                 <a:latin typeface="나눔스퀘어"/>
                 <a:ea typeface="나눔스퀘어"/>
@@ -10949,7 +10815,7 @@
             <a:r>
               <a:rPr sz="1700" b="1" i="0" spc="-30">
                 <a:solidFill>
-                  <a:srgbClr val="C0392B"/>
+                  <a:srgbClr val="C00000"/>
                 </a:solidFill>
                 <a:latin typeface="나눔스퀘어 ExtraBold"/>
                 <a:ea typeface="나눔스퀘어 ExtraBold"/>
@@ -10988,7 +10854,7 @@
             <a:r>
               <a:rPr sz="850" b="0" i="0" spc="-30">
                 <a:solidFill>
-                  <a:srgbClr val="7F7F7F"/>
+                  <a:srgbClr val="595959"/>
                 </a:solidFill>
                 <a:latin typeface="나눔스퀘어"/>
                 <a:ea typeface="나눔스퀘어"/>
@@ -11008,11 +10874,11 @@
         <p:spPr>
           <a:xfrm>
             <a:off x="274320" y="2697480"/>
-            <a:ext cx="1234440" cy="237744"/>
+            <a:ext cx="1234440" cy="219456"/>
           </a:xfrm>
           <a:prstGeom prst="roundRect">
             <a:avLst>
-              <a:gd name="adj" fmla="val 50000"/>
+              <a:gd name="adj" fmla="val 19092"/>
             </a:avLst>
           </a:prstGeom>
           <a:solidFill>
@@ -11020,7 +10886,7 @@
           </a:solidFill>
           <a:ln w="9525">
             <a:solidFill>
-              <a:srgbClr val="A6A6A6"/>
+              <a:srgbClr val="BFBFBF"/>
             </a:solidFill>
           </a:ln>
           <a:effectLst/>
@@ -11054,7 +10920,7 @@
         <p:spPr>
           <a:xfrm>
             <a:off x="274320" y="2697480"/>
-            <a:ext cx="1234440" cy="237744"/>
+            <a:ext cx="1234440" cy="219456"/>
           </a:xfrm>
           <a:prstGeom prst="rect">
             <a:avLst/>
@@ -11073,7 +10939,7 @@
             <a:r>
               <a:rPr sz="950" b="1" i="0" spc="-30">
                 <a:solidFill>
-                  <a:srgbClr val="1A1A1A"/>
+                  <a:srgbClr val="404040"/>
                 </a:solidFill>
                 <a:latin typeface="나눔스퀘어 Bold"/>
                 <a:ea typeface="나눔스퀘어 Bold"/>
@@ -11116,7 +10982,7 @@
             <a:r>
               <a:rPr sz="1100" b="0" i="0" spc="-30">
                 <a:solidFill>
-                  <a:srgbClr val="1A1A1A"/>
+                  <a:srgbClr val="000000"/>
                 </a:solidFill>
                 <a:latin typeface="나눔스퀘어"/>
                 <a:ea typeface="나눔스퀘어"/>
@@ -11135,7 +11001,7 @@
             <a:r>
               <a:rPr sz="800" b="0" i="0" spc="-30">
                 <a:solidFill>
-                  <a:srgbClr val="7F7F7F"/>
+                  <a:srgbClr val="808080"/>
                 </a:solidFill>
                 <a:latin typeface="나눔스퀘어"/>
                 <a:ea typeface="나눔스퀘어"/>
@@ -11155,7 +11021,7 @@
             <a:r>
               <a:rPr sz="1100" b="0" i="0" spc="-30">
                 <a:solidFill>
-                  <a:srgbClr val="1A1A1A"/>
+                  <a:srgbClr val="000000"/>
                 </a:solidFill>
                 <a:latin typeface="나눔스퀘어"/>
                 <a:ea typeface="나눔스퀘어"/>
@@ -11174,7 +11040,7 @@
             <a:r>
               <a:rPr sz="800" b="0" i="0" spc="-30">
                 <a:solidFill>
-                  <a:srgbClr val="7F7F7F"/>
+                  <a:srgbClr val="808080"/>
                 </a:solidFill>
                 <a:latin typeface="나눔스퀘어"/>
                 <a:ea typeface="나눔스퀘어"/>
@@ -11194,7 +11060,7 @@
             <a:r>
               <a:rPr sz="1100" b="0" i="0" spc="-30">
                 <a:solidFill>
-                  <a:srgbClr val="1A1A1A"/>
+                  <a:srgbClr val="000000"/>
                 </a:solidFill>
                 <a:latin typeface="나눔스퀘어"/>
                 <a:ea typeface="나눔스퀘어"/>
@@ -11213,7 +11079,7 @@
             <a:r>
               <a:rPr sz="800" b="0" i="0" spc="-30">
                 <a:solidFill>
-                  <a:srgbClr val="7F7F7F"/>
+                  <a:srgbClr val="808080"/>
                 </a:solidFill>
                 <a:latin typeface="나눔스퀘어"/>
                 <a:ea typeface="나눔스퀘어"/>
@@ -11233,7 +11099,7 @@
             <a:r>
               <a:rPr sz="1100" b="0" i="0" spc="-30">
                 <a:solidFill>
-                  <a:srgbClr val="1A1A1A"/>
+                  <a:srgbClr val="000000"/>
                 </a:solidFill>
                 <a:latin typeface="나눔스퀘어"/>
                 <a:ea typeface="나눔스퀘어"/>
@@ -11252,7 +11118,7 @@
             <a:r>
               <a:rPr sz="800" b="0" i="0" spc="-30">
                 <a:solidFill>
-                  <a:srgbClr val="7F7F7F"/>
+                  <a:srgbClr val="808080"/>
                 </a:solidFill>
                 <a:latin typeface="나눔스퀘어"/>
                 <a:ea typeface="나눔스퀘어"/>
@@ -11278,7 +11144,7 @@
             <a:avLst/>
           </a:prstGeom>
           <a:solidFill>
-            <a:srgbClr val="DEEBF7"/>
+            <a:srgbClr val="DCEAF7"/>
           </a:solidFill>
           <a:ln>
             <a:noFill/>
@@ -11333,7 +11199,7 @@
             <a:r>
               <a:rPr sz="1150" b="1" i="0" spc="-30">
                 <a:solidFill>
-                  <a:srgbClr val="002060"/>
+                  <a:srgbClr val="215F9A"/>
                 </a:solidFill>
                 <a:latin typeface="나눔스퀘어 Bold"/>
                 <a:ea typeface="나눔스퀘어 Bold"/>
@@ -11353,15 +11219,15 @@
         <p:spPr>
           <a:xfrm>
             <a:off x="5074920" y="1783080"/>
-            <a:ext cx="1234440" cy="237744"/>
+            <a:ext cx="1234440" cy="219456"/>
           </a:xfrm>
           <a:prstGeom prst="roundRect">
             <a:avLst>
-              <a:gd name="adj" fmla="val 50000"/>
+              <a:gd name="adj" fmla="val 16667"/>
             </a:avLst>
           </a:prstGeom>
           <a:solidFill>
-            <a:srgbClr val="002060"/>
+            <a:srgbClr val="215F9A"/>
           </a:solidFill>
           <a:ln>
             <a:noFill/>
@@ -11397,7 +11263,7 @@
         <p:spPr>
           <a:xfrm>
             <a:off x="5074920" y="1783080"/>
-            <a:ext cx="1234440" cy="237744"/>
+            <a:ext cx="1234440" cy="219456"/>
           </a:xfrm>
           <a:prstGeom prst="rect">
             <a:avLst/>
@@ -11460,7 +11326,7 @@
                       <a:r>
                         <a:rPr sz="1000" b="1" i="0" spc="-30">
                           <a:solidFill>
-                            <a:srgbClr val="1A1A1A"/>
+                            <a:srgbClr val="000000"/>
                           </a:solidFill>
                           <a:latin typeface="나눔스퀘어 Bold"/>
                           <a:ea typeface="나눔스퀘어 Bold"/>
@@ -11497,7 +11363,7 @@
                   </a:txBody>
                   <a:tcPr marL="45720" marR="45720" marT="18288" marB="18288" anchor="ctr">
                     <a:solidFill>
-                      <a:srgbClr val="F26B43"/>
+                      <a:srgbClr val="C00000"/>
                     </a:solidFill>
                   </a:tcPr>
                 </a:tc>
@@ -11510,7 +11376,7 @@
                       <a:r>
                         <a:rPr sz="950" b="0" i="0" spc="-30">
                           <a:solidFill>
-                            <a:srgbClr val="1A1A1A"/>
+                            <a:srgbClr val="000000"/>
                           </a:solidFill>
                           <a:latin typeface="나눔스퀘어"/>
                           <a:ea typeface="나눔스퀘어"/>
@@ -11537,7 +11403,7 @@
                       <a:r>
                         <a:rPr sz="1000" b="1" i="0" spc="-30">
                           <a:solidFill>
-                            <a:srgbClr val="1A1A1A"/>
+                            <a:srgbClr val="000000"/>
                           </a:solidFill>
                           <a:latin typeface="나눔스퀘어 Bold"/>
                           <a:ea typeface="나눔스퀘어 Bold"/>
@@ -11562,7 +11428,7 @@
                       <a:r>
                         <a:rPr sz="900" b="1" i="0" spc="-30">
                           <a:solidFill>
-                            <a:srgbClr val="1A1A1A"/>
+                            <a:srgbClr val="000000"/>
                           </a:solidFill>
                           <a:latin typeface="나눔스퀘어 Bold"/>
                           <a:ea typeface="나눔스퀘어 Bold"/>
@@ -11587,7 +11453,7 @@
                       <a:r>
                         <a:rPr sz="950" b="0" i="0" spc="-30">
                           <a:solidFill>
-                            <a:srgbClr val="1A1A1A"/>
+                            <a:srgbClr val="000000"/>
                           </a:solidFill>
                           <a:latin typeface="나눔스퀘어"/>
                           <a:ea typeface="나눔스퀘어"/>
@@ -11614,7 +11480,7 @@
                       <a:r>
                         <a:rPr sz="1000" b="1" i="0" spc="-30">
                           <a:solidFill>
-                            <a:srgbClr val="1A1A1A"/>
+                            <a:srgbClr val="000000"/>
                           </a:solidFill>
                           <a:latin typeface="나눔스퀘어 Bold"/>
                           <a:ea typeface="나눔스퀘어 Bold"/>
@@ -11639,7 +11505,7 @@
                       <a:r>
                         <a:rPr sz="900" b="1" i="0" spc="-30">
                           <a:solidFill>
-                            <a:srgbClr val="1A1A1A"/>
+                            <a:srgbClr val="000000"/>
                           </a:solidFill>
                           <a:latin typeface="나눔스퀘어 Bold"/>
                           <a:ea typeface="나눔스퀘어 Bold"/>
@@ -11664,7 +11530,7 @@
                       <a:r>
                         <a:rPr sz="950" b="0" i="0" spc="-30">
                           <a:solidFill>
-                            <a:srgbClr val="1A1A1A"/>
+                            <a:srgbClr val="000000"/>
                           </a:solidFill>
                           <a:latin typeface="나눔스퀘어"/>
                           <a:ea typeface="나눔스퀘어"/>
@@ -11691,7 +11557,7 @@
                       <a:r>
                         <a:rPr sz="1000" b="1" i="0" spc="-30">
                           <a:solidFill>
-                            <a:srgbClr val="1A1A1A"/>
+                            <a:srgbClr val="000000"/>
                           </a:solidFill>
                           <a:latin typeface="나눔스퀘어 Bold"/>
                           <a:ea typeface="나눔스퀘어 Bold"/>
@@ -11728,7 +11594,7 @@
                   </a:txBody>
                   <a:tcPr marL="45720" marR="45720" marT="18288" marB="18288" anchor="ctr">
                     <a:solidFill>
-                      <a:srgbClr val="002060"/>
+                      <a:srgbClr val="215F9A"/>
                     </a:solidFill>
                   </a:tcPr>
                 </a:tc>
@@ -11741,7 +11607,7 @@
                       <a:r>
                         <a:rPr sz="950" b="0" i="0" spc="-30">
                           <a:solidFill>
-                            <a:srgbClr val="1A1A1A"/>
+                            <a:srgbClr val="000000"/>
                           </a:solidFill>
                           <a:latin typeface="나눔스퀘어"/>
                           <a:ea typeface="나눔스퀘어"/>
@@ -11768,7 +11634,7 @@
                       <a:r>
                         <a:rPr sz="1000" b="1" i="0" spc="-30">
                           <a:solidFill>
-                            <a:srgbClr val="1A1A1A"/>
+                            <a:srgbClr val="000000"/>
                           </a:solidFill>
                           <a:latin typeface="나눔스퀘어 Bold"/>
                           <a:ea typeface="나눔스퀘어 Bold"/>
@@ -11805,7 +11671,7 @@
                   </a:txBody>
                   <a:tcPr marL="45720" marR="45720" marT="18288" marB="18288" anchor="ctr">
                     <a:solidFill>
-                      <a:srgbClr val="F26B43"/>
+                      <a:srgbClr val="C00000"/>
                     </a:solidFill>
                   </a:tcPr>
                 </a:tc>
@@ -11818,7 +11684,7 @@
                       <a:r>
                         <a:rPr sz="950" b="0" i="0" spc="-30">
                           <a:solidFill>
-                            <a:srgbClr val="1A1A1A"/>
+                            <a:srgbClr val="000000"/>
                           </a:solidFill>
                           <a:latin typeface="나눔스퀘어"/>
                           <a:ea typeface="나눔스퀘어"/>
@@ -11848,15 +11714,15 @@
         <p:spPr>
           <a:xfrm>
             <a:off x="5074920" y="4142232"/>
-            <a:ext cx="1234440" cy="237744"/>
+            <a:ext cx="1234440" cy="219456"/>
           </a:xfrm>
           <a:prstGeom prst="roundRect">
             <a:avLst>
-              <a:gd name="adj" fmla="val 50000"/>
+              <a:gd name="adj" fmla="val 16667"/>
             </a:avLst>
           </a:prstGeom>
           <a:solidFill>
-            <a:srgbClr val="002060"/>
+            <a:srgbClr val="215F9A"/>
           </a:solidFill>
           <a:ln>
             <a:noFill/>
@@ -11892,7 +11758,7 @@
         <p:spPr>
           <a:xfrm>
             <a:off x="5074920" y="4142232"/>
-            <a:ext cx="1234440" cy="237744"/>
+            <a:ext cx="1234440" cy="219456"/>
           </a:xfrm>
           <a:prstGeom prst="rect">
             <a:avLst/>
@@ -11953,7 +11819,7 @@
             <a:r>
               <a:rPr sz="1050" b="1" i="0" spc="-30">
                 <a:solidFill>
-                  <a:srgbClr val="002060"/>
+                  <a:srgbClr val="215F9A"/>
                 </a:solidFill>
                 <a:latin typeface="나눔스퀘어 ExtraBold"/>
                 <a:ea typeface="나눔스퀘어 ExtraBold"/>
@@ -11964,7 +11830,7 @@
             <a:r>
               <a:rPr sz="1050" b="0" i="0" spc="-30">
                 <a:solidFill>
-                  <a:srgbClr val="1A1A1A"/>
+                  <a:srgbClr val="000000"/>
                 </a:solidFill>
                 <a:latin typeface="나눔스퀘어"/>
                 <a:ea typeface="나눔스퀘어"/>
@@ -11983,7 +11849,7 @@
             <a:r>
               <a:rPr sz="1050" b="1" i="0" spc="-30">
                 <a:solidFill>
-                  <a:srgbClr val="002060"/>
+                  <a:srgbClr val="215F9A"/>
                 </a:solidFill>
                 <a:latin typeface="나눔스퀘어 ExtraBold"/>
                 <a:ea typeface="나눔스퀘어 ExtraBold"/>
@@ -11994,7 +11860,7 @@
             <a:r>
               <a:rPr sz="1050" b="0" i="0" spc="-30">
                 <a:solidFill>
-                  <a:srgbClr val="1A1A1A"/>
+                  <a:srgbClr val="000000"/>
                 </a:solidFill>
                 <a:latin typeface="나눔스퀘어"/>
                 <a:ea typeface="나눔스퀘어"/>
@@ -12013,7 +11879,7 @@
             <a:r>
               <a:rPr sz="1050" b="1" i="0" spc="-30">
                 <a:solidFill>
-                  <a:srgbClr val="002060"/>
+                  <a:srgbClr val="215F9A"/>
                 </a:solidFill>
                 <a:latin typeface="나눔스퀘어 ExtraBold"/>
                 <a:ea typeface="나눔스퀘어 ExtraBold"/>
@@ -12024,7 +11890,7 @@
             <a:r>
               <a:rPr sz="1050" b="0" i="0" spc="-30">
                 <a:solidFill>
-                  <a:srgbClr val="1A1A1A"/>
+                  <a:srgbClr val="000000"/>
                 </a:solidFill>
                 <a:latin typeface="나눔스퀘어"/>
                 <a:ea typeface="나눔스퀘어"/>
@@ -12050,7 +11916,7 @@
             <a:avLst/>
           </a:prstGeom>
           <a:solidFill>
-            <a:srgbClr val="002060"/>
+            <a:srgbClr val="215F9A"/>
           </a:solidFill>
           <a:ln>
             <a:noFill/>
@@ -12108,7 +11974,7 @@
             <a:r>
               <a:rPr sz="900" b="1" i="0" spc="-30">
                 <a:solidFill>
-                  <a:srgbClr val="BFCFE8"/>
+                  <a:srgbClr val="DCEAF7"/>
                 </a:solidFill>
                 <a:latin typeface="나눔스퀘어 Bold"/>
                 <a:ea typeface="나눔스퀘어 Bold"/>
@@ -12143,8 +12009,8 @@
         </p:nvSpPr>
         <p:spPr>
           <a:xfrm>
-            <a:off x="274320" y="6492240"/>
-            <a:ext cx="8778240" cy="256032"/>
+            <a:off x="274320" y="6382512"/>
+            <a:ext cx="6583680" cy="365760"/>
           </a:xfrm>
           <a:prstGeom prst="rect">
             <a:avLst/>
@@ -12152,7 +12018,7 @@
           <a:noFill/>
         </p:spPr>
         <p:txBody>
-          <a:bodyPr wrap="square" anchor="t" lIns="36576" rIns="36576" tIns="36576" bIns="36576">
+          <a:bodyPr wrap="square" anchor="b" lIns="36576" rIns="36576" tIns="36576" bIns="36576">
             <a:spAutoFit/>
           </a:bodyPr>
           <a:lstStyle/>
@@ -12163,7 +12029,7 @@
             <a:r>
               <a:rPr sz="750" b="0" i="0" spc="-30">
                 <a:solidFill>
-                  <a:srgbClr val="7F7F7F"/>
+                  <a:srgbClr val="808080"/>
                 </a:solidFill>
                 <a:latin typeface="나눔스퀘어"/>
                 <a:ea typeface="나눔스퀘어"/>
@@ -12176,40 +12042,24 @@
       </p:sp>
       <p:sp>
         <p:nvSpPr>
-          <p:cNvPr id="31" name="Page number"/>
-          <p:cNvSpPr txBox="1"/>
-          <p:nvPr/>
-        </p:nvSpPr>
-        <p:spPr>
-          <a:xfrm>
-            <a:off x="9326880" y="6519672"/>
-            <a:ext cx="457200" cy="228600"/>
-          </a:xfrm>
-          <a:prstGeom prst="rect">
-            <a:avLst/>
-          </a:prstGeom>
-          <a:noFill/>
-        </p:spPr>
-        <p:txBody>
-          <a:bodyPr wrap="square" anchor="t" lIns="36576" rIns="36576" tIns="36576" bIns="36576">
-            <a:spAutoFit/>
-          </a:bodyPr>
-          <a:lstStyle/>
-          <a:p>
-            <a:pPr algn="r">
-              <a:buNone/>
-            </a:pPr>
-            <a:r>
-              <a:rPr sz="800" b="0" i="0" spc="-30">
-                <a:solidFill>
-                  <a:srgbClr val="7F7F7F"/>
-                </a:solidFill>
-                <a:latin typeface="나눔스퀘어"/>
-                <a:ea typeface="나눔스퀘어"/>
-                <a:cs typeface="나눔스퀘어"/>
-              </a:rPr>
-              <a:t>6</a:t>
-            </a:r>
+          <p:cNvPr id="6" name="Slide Number Placeholder 5"/>
+          <p:cNvSpPr>
+            <a:spLocks noGrp="1"/>
+          </p:cNvSpPr>
+          <p:nvPr>
+            <p:ph type="sldNum" sz="quarter" idx="12"/>
+          </p:nvPr>
+        </p:nvSpPr>
+        <p:spPr/>
+        <p:txBody>
+          <a:bodyPr/>
+          <a:lstStyle/>
+          <a:p>
+            <a:fld id="{C0166AD1-3E4E-49AB-A7F9-67C30DF503DC}" type="slidenum">
+              <a:rPr lang="ko-KR" altLang="en-US" smtClean="0"/>
+              <a:t>‹#›</a:t>
+            </a:fld>
+            <a:endParaRPr lang="ko-KR" altLang="en-US"/>
           </a:p>
         </p:txBody>
       </p:sp>
@@ -12239,7 +12089,7 @@
         </p:nvSpPr>
         <p:spPr>
           <a:xfrm>
-            <a:off x="274320" y="201168"/>
+            <a:off x="274320" y="182880"/>
             <a:ext cx="8961120" cy="384048"/>
           </a:xfrm>
           <a:prstGeom prst="rect">
@@ -12248,7 +12098,7 @@
           <a:noFill/>
         </p:spPr>
         <p:txBody>
-          <a:bodyPr wrap="square" anchor="t" lIns="36576" rIns="36576" tIns="36576" bIns="36576">
+          <a:bodyPr wrap="square" anchor="t" lIns="0" rIns="0" tIns="0" bIns="0">
             <a:spAutoFit/>
           </a:bodyPr>
           <a:lstStyle/>
@@ -12259,33 +12109,33 @@
             <a:r>
               <a:rPr sz="1800" b="0" i="0" spc="-30">
                 <a:solidFill>
-                  <a:srgbClr val="A6A6A6"/>
-                </a:solidFill>
-                <a:latin typeface="나눔스퀘어"/>
-                <a:ea typeface="나눔스퀘어"/>
-                <a:cs typeface="나눔스퀘어"/>
-              </a:rPr>
-              <a:t>사업부문별 리뷰</a:t>
+                  <a:srgbClr val="808080"/>
+                </a:solidFill>
+                <a:latin typeface="나눔스퀘어 ExtraBold"/>
+                <a:ea typeface="나눔스퀘어 ExtraBold"/>
+                <a:cs typeface="나눔스퀘어 ExtraBold"/>
+              </a:rPr>
+              <a:t>사업부문별 리뷰  </a:t>
             </a:r>
             <a:r>
               <a:rPr sz="1800" b="0" i="0" spc="-30">
                 <a:solidFill>
-                  <a:srgbClr val="1A1A1A"/>
-                </a:solidFill>
-                <a:latin typeface="나눔스퀘어"/>
-                <a:ea typeface="나눔스퀘어"/>
-                <a:cs typeface="나눔스퀘어"/>
-              </a:rPr>
-              <a:t>   |   </a:t>
+                  <a:srgbClr val="000000"/>
+                </a:solidFill>
+                <a:latin typeface="나눔스퀘어 ExtraBold"/>
+                <a:ea typeface="나눔스퀘어 ExtraBold"/>
+                <a:cs typeface="나눔스퀘어 ExtraBold"/>
+              </a:rPr>
+              <a:t>|  </a:t>
             </a:r>
             <a:r>
               <a:rPr sz="1800" b="0" i="0" spc="-30">
                 <a:solidFill>
-                  <a:srgbClr val="1A1A1A"/>
-                </a:solidFill>
-                <a:latin typeface="나눔스퀘어"/>
-                <a:ea typeface="나눔스퀘어"/>
-                <a:cs typeface="나눔스퀘어"/>
+                  <a:srgbClr val="000000"/>
+                </a:solidFill>
+                <a:latin typeface="나눔스퀘어 ExtraBold"/>
+                <a:ea typeface="나눔스퀘어 ExtraBold"/>
+                <a:cs typeface="나눔스퀘어 ExtraBold"/>
               </a:rPr>
               <a:t>03  윤활유</a:t>
             </a:r>
@@ -12320,7 +12170,7 @@
             <a:r>
               <a:rPr sz="1400" b="1" i="0" spc="-30">
                 <a:solidFill>
-                  <a:srgbClr val="1A1A1A"/>
+                  <a:srgbClr val="000000"/>
                 </a:solidFill>
                 <a:latin typeface="나눔스퀘어 ExtraBold"/>
                 <a:ea typeface="나눔스퀘어 ExtraBold"/>
@@ -12359,7 +12209,7 @@
             <a:r>
               <a:rPr sz="1300" b="1" i="0" spc="-30">
                 <a:solidFill>
-                  <a:srgbClr val="1A1A1A"/>
+                  <a:srgbClr val="000000"/>
                 </a:solidFill>
                 <a:latin typeface="나눔스퀘어 ExtraBold"/>
                 <a:ea typeface="나눔스퀘어 ExtraBold"/>
@@ -12386,7 +12236,7 @@
           </a:prstGeom>
           <a:ln w="12700">
             <a:solidFill>
-              <a:srgbClr val="BFBFBF"/>
+              <a:srgbClr val="A6A6A6"/>
             </a:solidFill>
           </a:ln>
         </p:spPr>
@@ -12433,7 +12283,7 @@
             <a:r>
               <a:rPr sz="1300" b="1" i="0" spc="-30">
                 <a:solidFill>
-                  <a:srgbClr val="1A1A1A"/>
+                  <a:srgbClr val="000000"/>
                 </a:solidFill>
                 <a:latin typeface="나눔스퀘어 ExtraBold"/>
                 <a:ea typeface="나눔스퀘어 ExtraBold"/>
@@ -12460,7 +12310,7 @@
           </a:prstGeom>
           <a:ln w="12700">
             <a:solidFill>
-              <a:srgbClr val="BFBFBF"/>
+              <a:srgbClr val="A6A6A6"/>
             </a:solidFill>
           </a:ln>
         </p:spPr>
@@ -12549,7 +12399,7 @@
             <a:r>
               <a:rPr sz="1700" b="1" i="0" spc="-30">
                 <a:solidFill>
-                  <a:srgbClr val="002060"/>
+                  <a:srgbClr val="215F9A"/>
                 </a:solidFill>
                 <a:latin typeface="나눔스퀘어 ExtraBold"/>
                 <a:ea typeface="나눔스퀘어 ExtraBold"/>
@@ -12588,7 +12438,7 @@
             <a:r>
               <a:rPr sz="850" b="0" i="0" spc="-30">
                 <a:solidFill>
-                  <a:srgbClr val="7F7F7F"/>
+                  <a:srgbClr val="595959"/>
                 </a:solidFill>
                 <a:latin typeface="나눔스퀘어"/>
                 <a:ea typeface="나눔스퀘어"/>
@@ -12669,7 +12519,7 @@
             <a:r>
               <a:rPr sz="1700" b="1" i="0" spc="-30">
                 <a:solidFill>
-                  <a:srgbClr val="002060"/>
+                  <a:srgbClr val="215F9A"/>
                 </a:solidFill>
                 <a:latin typeface="나눔스퀘어 ExtraBold"/>
                 <a:ea typeface="나눔스퀘어 ExtraBold"/>
@@ -12708,7 +12558,7 @@
             <a:r>
               <a:rPr sz="850" b="0" i="0" spc="-30">
                 <a:solidFill>
-                  <a:srgbClr val="7F7F7F"/>
+                  <a:srgbClr val="595959"/>
                 </a:solidFill>
                 <a:latin typeface="나눔스퀘어"/>
                 <a:ea typeface="나눔스퀘어"/>
@@ -12789,7 +12639,7 @@
             <a:r>
               <a:rPr sz="1700" b="1" i="0" spc="-30">
                 <a:solidFill>
-                  <a:srgbClr val="002060"/>
+                  <a:srgbClr val="215F9A"/>
                 </a:solidFill>
                 <a:latin typeface="나눔스퀘어 ExtraBold"/>
                 <a:ea typeface="나눔스퀘어 ExtraBold"/>
@@ -12828,7 +12678,7 @@
             <a:r>
               <a:rPr sz="850" b="0" i="0" spc="-30">
                 <a:solidFill>
-                  <a:srgbClr val="7F7F7F"/>
+                  <a:srgbClr val="595959"/>
                 </a:solidFill>
                 <a:latin typeface="나눔스퀘어"/>
                 <a:ea typeface="나눔스퀘어"/>
@@ -12848,11 +12698,11 @@
         <p:spPr>
           <a:xfrm>
             <a:off x="274320" y="2697480"/>
-            <a:ext cx="1234440" cy="237744"/>
+            <a:ext cx="1234440" cy="219456"/>
           </a:xfrm>
           <a:prstGeom prst="roundRect">
             <a:avLst>
-              <a:gd name="adj" fmla="val 50000"/>
+              <a:gd name="adj" fmla="val 19092"/>
             </a:avLst>
           </a:prstGeom>
           <a:solidFill>
@@ -12860,7 +12710,7 @@
           </a:solidFill>
           <a:ln w="9525">
             <a:solidFill>
-              <a:srgbClr val="A6A6A6"/>
+              <a:srgbClr val="BFBFBF"/>
             </a:solidFill>
           </a:ln>
           <a:effectLst/>
@@ -12894,7 +12744,7 @@
         <p:spPr>
           <a:xfrm>
             <a:off x="274320" y="2697480"/>
-            <a:ext cx="1234440" cy="237744"/>
+            <a:ext cx="1234440" cy="219456"/>
           </a:xfrm>
           <a:prstGeom prst="rect">
             <a:avLst/>
@@ -12913,7 +12763,7 @@
             <a:r>
               <a:rPr sz="950" b="1" i="0" spc="-30">
                 <a:solidFill>
-                  <a:srgbClr val="1A1A1A"/>
+                  <a:srgbClr val="404040"/>
                 </a:solidFill>
                 <a:latin typeface="나눔스퀘어 Bold"/>
                 <a:ea typeface="나눔스퀘어 Bold"/>
@@ -12956,7 +12806,7 @@
             <a:r>
               <a:rPr sz="1100" b="0" i="0" spc="-30">
                 <a:solidFill>
-                  <a:srgbClr val="1A1A1A"/>
+                  <a:srgbClr val="000000"/>
                 </a:solidFill>
                 <a:latin typeface="나눔스퀘어"/>
                 <a:ea typeface="나눔스퀘어"/>
@@ -12975,7 +12825,7 @@
             <a:r>
               <a:rPr sz="800" b="0" i="0" spc="-30">
                 <a:solidFill>
-                  <a:srgbClr val="7F7F7F"/>
+                  <a:srgbClr val="808080"/>
                 </a:solidFill>
                 <a:latin typeface="나눔스퀘어"/>
                 <a:ea typeface="나눔스퀘어"/>
@@ -12995,7 +12845,7 @@
             <a:r>
               <a:rPr sz="1100" b="0" i="0" spc="-30">
                 <a:solidFill>
-                  <a:srgbClr val="1A1A1A"/>
+                  <a:srgbClr val="000000"/>
                 </a:solidFill>
                 <a:latin typeface="나눔스퀘어"/>
                 <a:ea typeface="나눔스퀘어"/>
@@ -13014,7 +12864,7 @@
             <a:r>
               <a:rPr sz="800" b="0" i="0" spc="-30">
                 <a:solidFill>
-                  <a:srgbClr val="7F7F7F"/>
+                  <a:srgbClr val="808080"/>
                 </a:solidFill>
                 <a:latin typeface="나눔스퀘어"/>
                 <a:ea typeface="나눔스퀘어"/>
@@ -13040,7 +12890,7 @@
             <a:avLst/>
           </a:prstGeom>
           <a:solidFill>
-            <a:srgbClr val="DEEBF7"/>
+            <a:srgbClr val="DCEAF7"/>
           </a:solidFill>
           <a:ln>
             <a:noFill/>
@@ -13095,7 +12945,7 @@
             <a:r>
               <a:rPr sz="1150" b="1" i="0" spc="-30">
                 <a:solidFill>
-                  <a:srgbClr val="002060"/>
+                  <a:srgbClr val="215F9A"/>
                 </a:solidFill>
                 <a:latin typeface="나눔스퀘어 Bold"/>
                 <a:ea typeface="나눔스퀘어 Bold"/>
@@ -13115,15 +12965,15 @@
         <p:spPr>
           <a:xfrm>
             <a:off x="5074920" y="1783080"/>
-            <a:ext cx="1234440" cy="237744"/>
+            <a:ext cx="1234440" cy="219456"/>
           </a:xfrm>
           <a:prstGeom prst="roundRect">
             <a:avLst>
-              <a:gd name="adj" fmla="val 50000"/>
+              <a:gd name="adj" fmla="val 16667"/>
             </a:avLst>
           </a:prstGeom>
           <a:solidFill>
-            <a:srgbClr val="002060"/>
+            <a:srgbClr val="215F9A"/>
           </a:solidFill>
           <a:ln>
             <a:noFill/>
@@ -13159,7 +13009,7 @@
         <p:spPr>
           <a:xfrm>
             <a:off x="5074920" y="1783080"/>
-            <a:ext cx="1234440" cy="237744"/>
+            <a:ext cx="1234440" cy="219456"/>
           </a:xfrm>
           <a:prstGeom prst="rect">
             <a:avLst/>
@@ -13222,7 +13072,7 @@
                       <a:r>
                         <a:rPr sz="1000" b="1" i="0" spc="-30">
                           <a:solidFill>
-                            <a:srgbClr val="1A1A1A"/>
+                            <a:srgbClr val="000000"/>
                           </a:solidFill>
                           <a:latin typeface="나눔스퀘어 Bold"/>
                           <a:ea typeface="나눔스퀘어 Bold"/>
@@ -13259,7 +13109,7 @@
                   </a:txBody>
                   <a:tcPr marL="45720" marR="45720" marT="18288" marB="18288" anchor="ctr">
                     <a:solidFill>
-                      <a:srgbClr val="002060"/>
+                      <a:srgbClr val="215F9A"/>
                     </a:solidFill>
                   </a:tcPr>
                 </a:tc>
@@ -13272,7 +13122,7 @@
                       <a:r>
                         <a:rPr sz="950" b="0" i="0" spc="-30">
                           <a:solidFill>
-                            <a:srgbClr val="1A1A1A"/>
+                            <a:srgbClr val="000000"/>
                           </a:solidFill>
                           <a:latin typeface="나눔스퀘어"/>
                           <a:ea typeface="나눔스퀘어"/>
@@ -13299,7 +13149,7 @@
                       <a:r>
                         <a:rPr sz="1000" b="1" i="0" spc="-30">
                           <a:solidFill>
-                            <a:srgbClr val="1A1A1A"/>
+                            <a:srgbClr val="000000"/>
                           </a:solidFill>
                           <a:latin typeface="나눔스퀘어 Bold"/>
                           <a:ea typeface="나눔스퀘어 Bold"/>
@@ -13324,7 +13174,7 @@
                       <a:r>
                         <a:rPr sz="900" b="1" i="0" spc="-30">
                           <a:solidFill>
-                            <a:srgbClr val="1A1A1A"/>
+                            <a:srgbClr val="000000"/>
                           </a:solidFill>
                           <a:latin typeface="나눔스퀘어 Bold"/>
                           <a:ea typeface="나눔스퀘어 Bold"/>
@@ -13349,7 +13199,7 @@
                       <a:r>
                         <a:rPr sz="950" b="0" i="0" spc="-30">
                           <a:solidFill>
-                            <a:srgbClr val="1A1A1A"/>
+                            <a:srgbClr val="000000"/>
                           </a:solidFill>
                           <a:latin typeface="나눔스퀘어"/>
                           <a:ea typeface="나눔스퀘어"/>
@@ -13376,7 +13226,7 @@
                       <a:r>
                         <a:rPr sz="1000" b="1" i="0" spc="-30">
                           <a:solidFill>
-                            <a:srgbClr val="1A1A1A"/>
+                            <a:srgbClr val="000000"/>
                           </a:solidFill>
                           <a:latin typeface="나눔스퀘어 Bold"/>
                           <a:ea typeface="나눔스퀘어 Bold"/>
@@ -13401,7 +13251,7 @@
                       <a:r>
                         <a:rPr sz="900" b="1" i="0" spc="-30">
                           <a:solidFill>
-                            <a:srgbClr val="1A1A1A"/>
+                            <a:srgbClr val="000000"/>
                           </a:solidFill>
                           <a:latin typeface="나눔스퀘어 Bold"/>
                           <a:ea typeface="나눔스퀘어 Bold"/>
@@ -13426,7 +13276,7 @@
                       <a:r>
                         <a:rPr sz="950" b="0" i="0" spc="-30">
                           <a:solidFill>
-                            <a:srgbClr val="1A1A1A"/>
+                            <a:srgbClr val="000000"/>
                           </a:solidFill>
                           <a:latin typeface="나눔스퀘어"/>
                           <a:ea typeface="나눔스퀘어"/>
@@ -13456,15 +13306,15 @@
         <p:spPr>
           <a:xfrm>
             <a:off x="5074920" y="3730752"/>
-            <a:ext cx="1234440" cy="237744"/>
+            <a:ext cx="1234440" cy="219456"/>
           </a:xfrm>
           <a:prstGeom prst="roundRect">
             <a:avLst>
-              <a:gd name="adj" fmla="val 50000"/>
+              <a:gd name="adj" fmla="val 16667"/>
             </a:avLst>
           </a:prstGeom>
           <a:solidFill>
-            <a:srgbClr val="002060"/>
+            <a:srgbClr val="215F9A"/>
           </a:solidFill>
           <a:ln>
             <a:noFill/>
@@ -13500,7 +13350,7 @@
         <p:spPr>
           <a:xfrm>
             <a:off x="5074920" y="3730752"/>
-            <a:ext cx="1234440" cy="237744"/>
+            <a:ext cx="1234440" cy="219456"/>
           </a:xfrm>
           <a:prstGeom prst="rect">
             <a:avLst/>
@@ -13561,7 +13411,7 @@
             <a:r>
               <a:rPr sz="1050" b="1" i="0" spc="-30">
                 <a:solidFill>
-                  <a:srgbClr val="002060"/>
+                  <a:srgbClr val="215F9A"/>
                 </a:solidFill>
                 <a:latin typeface="나눔스퀘어 ExtraBold"/>
                 <a:ea typeface="나눔스퀘어 ExtraBold"/>
@@ -13572,7 +13422,7 @@
             <a:r>
               <a:rPr sz="1050" b="0" i="0" spc="-30">
                 <a:solidFill>
-                  <a:srgbClr val="1A1A1A"/>
+                  <a:srgbClr val="000000"/>
                 </a:solidFill>
                 <a:latin typeface="나눔스퀘어"/>
                 <a:ea typeface="나눔스퀘어"/>
@@ -13591,7 +13441,7 @@
             <a:r>
               <a:rPr sz="1050" b="1" i="0" spc="-30">
                 <a:solidFill>
-                  <a:srgbClr val="002060"/>
+                  <a:srgbClr val="215F9A"/>
                 </a:solidFill>
                 <a:latin typeface="나눔스퀘어 ExtraBold"/>
                 <a:ea typeface="나눔스퀘어 ExtraBold"/>
@@ -13602,7 +13452,7 @@
             <a:r>
               <a:rPr sz="1050" b="0" i="0" spc="-30">
                 <a:solidFill>
-                  <a:srgbClr val="1A1A1A"/>
+                  <a:srgbClr val="000000"/>
                 </a:solidFill>
                 <a:latin typeface="나눔스퀘어"/>
                 <a:ea typeface="나눔스퀘어"/>
@@ -13621,7 +13471,7 @@
             <a:r>
               <a:rPr sz="1050" b="1" i="0" spc="-30">
                 <a:solidFill>
-                  <a:srgbClr val="002060"/>
+                  <a:srgbClr val="215F9A"/>
                 </a:solidFill>
                 <a:latin typeface="나눔스퀘어 ExtraBold"/>
                 <a:ea typeface="나눔스퀘어 ExtraBold"/>
@@ -13632,7 +13482,7 @@
             <a:r>
               <a:rPr sz="1050" b="0" i="0" spc="-30">
                 <a:solidFill>
-                  <a:srgbClr val="1A1A1A"/>
+                  <a:srgbClr val="000000"/>
                 </a:solidFill>
                 <a:latin typeface="나눔스퀘어"/>
                 <a:ea typeface="나눔스퀘어"/>
@@ -13658,7 +13508,7 @@
             <a:avLst/>
           </a:prstGeom>
           <a:solidFill>
-            <a:srgbClr val="002060"/>
+            <a:srgbClr val="215F9A"/>
           </a:solidFill>
           <a:ln>
             <a:noFill/>
@@ -13716,7 +13566,7 @@
             <a:r>
               <a:rPr sz="900" b="1" i="0" spc="-30">
                 <a:solidFill>
-                  <a:srgbClr val="BFCFE8"/>
+                  <a:srgbClr val="DCEAF7"/>
                 </a:solidFill>
                 <a:latin typeface="나눔스퀘어 Bold"/>
                 <a:ea typeface="나눔스퀘어 Bold"/>
@@ -13751,8 +13601,8 @@
         </p:nvSpPr>
         <p:spPr>
           <a:xfrm>
-            <a:off x="274320" y="6492240"/>
-            <a:ext cx="8778240" cy="256032"/>
+            <a:off x="274320" y="6382512"/>
+            <a:ext cx="6583680" cy="365760"/>
           </a:xfrm>
           <a:prstGeom prst="rect">
             <a:avLst/>
@@ -13760,7 +13610,7 @@
           <a:noFill/>
         </p:spPr>
         <p:txBody>
-          <a:bodyPr wrap="square" anchor="t" lIns="36576" rIns="36576" tIns="36576" bIns="36576">
+          <a:bodyPr wrap="square" anchor="b" lIns="36576" rIns="36576" tIns="36576" bIns="36576">
             <a:spAutoFit/>
           </a:bodyPr>
           <a:lstStyle/>
@@ -13771,7 +13621,7 @@
             <a:r>
               <a:rPr sz="750" b="0" i="0" spc="-30">
                 <a:solidFill>
-                  <a:srgbClr val="7F7F7F"/>
+                  <a:srgbClr val="808080"/>
                 </a:solidFill>
                 <a:latin typeface="나눔스퀘어"/>
                 <a:ea typeface="나눔스퀘어"/>
@@ -13784,40 +13634,24 @@
       </p:sp>
       <p:sp>
         <p:nvSpPr>
-          <p:cNvPr id="31" name="Page number"/>
-          <p:cNvSpPr txBox="1"/>
-          <p:nvPr/>
-        </p:nvSpPr>
-        <p:spPr>
-          <a:xfrm>
-            <a:off x="9326880" y="6519672"/>
-            <a:ext cx="457200" cy="228600"/>
-          </a:xfrm>
-          <a:prstGeom prst="rect">
-            <a:avLst/>
-          </a:prstGeom>
-          <a:noFill/>
-        </p:spPr>
-        <p:txBody>
-          <a:bodyPr wrap="square" anchor="t" lIns="36576" rIns="36576" tIns="36576" bIns="36576">
-            <a:spAutoFit/>
-          </a:bodyPr>
-          <a:lstStyle/>
-          <a:p>
-            <a:pPr algn="r">
-              <a:buNone/>
-            </a:pPr>
-            <a:r>
-              <a:rPr sz="800" b="0" i="0" spc="-30">
-                <a:solidFill>
-                  <a:srgbClr val="7F7F7F"/>
-                </a:solidFill>
-                <a:latin typeface="나눔스퀘어"/>
-                <a:ea typeface="나눔스퀘어"/>
-                <a:cs typeface="나눔스퀘어"/>
-              </a:rPr>
-              <a:t>7</a:t>
-            </a:r>
+          <p:cNvPr id="6" name="Slide Number Placeholder 5"/>
+          <p:cNvSpPr>
+            <a:spLocks noGrp="1"/>
+          </p:cNvSpPr>
+          <p:nvPr>
+            <p:ph type="sldNum" sz="quarter" idx="12"/>
+          </p:nvPr>
+        </p:nvSpPr>
+        <p:spPr/>
+        <p:txBody>
+          <a:bodyPr/>
+          <a:lstStyle/>
+          <a:p>
+            <a:fld id="{C0166AD1-3E4E-49AB-A7F9-67C30DF503DC}" type="slidenum">
+              <a:rPr lang="ko-KR" altLang="en-US" smtClean="0"/>
+              <a:t>‹#›</a:t>
+            </a:fld>
+            <a:endParaRPr lang="ko-KR" altLang="en-US"/>
           </a:p>
         </p:txBody>
       </p:sp>
@@ -13847,7 +13681,7 @@
         </p:nvSpPr>
         <p:spPr>
           <a:xfrm>
-            <a:off x="274320" y="201168"/>
+            <a:off x="274320" y="182880"/>
             <a:ext cx="8961120" cy="384048"/>
           </a:xfrm>
           <a:prstGeom prst="rect">
@@ -13856,7 +13690,7 @@
           <a:noFill/>
         </p:spPr>
         <p:txBody>
-          <a:bodyPr wrap="square" anchor="t" lIns="36576" rIns="36576" tIns="36576" bIns="36576">
+          <a:bodyPr wrap="square" anchor="t" lIns="0" rIns="0" tIns="0" bIns="0">
             <a:spAutoFit/>
           </a:bodyPr>
           <a:lstStyle/>
@@ -13867,33 +13701,33 @@
             <a:r>
               <a:rPr sz="1800" b="0" i="0" spc="-30">
                 <a:solidFill>
-                  <a:srgbClr val="A6A6A6"/>
-                </a:solidFill>
-                <a:latin typeface="나눔스퀘어"/>
-                <a:ea typeface="나눔스퀘어"/>
-                <a:cs typeface="나눔스퀘어"/>
-              </a:rPr>
-              <a:t>사업부문별 리뷰</a:t>
+                  <a:srgbClr val="808080"/>
+                </a:solidFill>
+                <a:latin typeface="나눔스퀘어 ExtraBold"/>
+                <a:ea typeface="나눔스퀘어 ExtraBold"/>
+                <a:cs typeface="나눔스퀘어 ExtraBold"/>
+              </a:rPr>
+              <a:t>사업부문별 리뷰  </a:t>
             </a:r>
             <a:r>
               <a:rPr sz="1800" b="0" i="0" spc="-30">
                 <a:solidFill>
-                  <a:srgbClr val="1A1A1A"/>
-                </a:solidFill>
-                <a:latin typeface="나눔스퀘어"/>
-                <a:ea typeface="나눔스퀘어"/>
-                <a:cs typeface="나눔스퀘어"/>
-              </a:rPr>
-              <a:t>   |   </a:t>
+                  <a:srgbClr val="000000"/>
+                </a:solidFill>
+                <a:latin typeface="나눔스퀘어 ExtraBold"/>
+                <a:ea typeface="나눔스퀘어 ExtraBold"/>
+                <a:cs typeface="나눔스퀘어 ExtraBold"/>
+              </a:rPr>
+              <a:t>|  </a:t>
             </a:r>
             <a:r>
               <a:rPr sz="1800" b="0" i="0" spc="-30">
                 <a:solidFill>
-                  <a:srgbClr val="1A1A1A"/>
-                </a:solidFill>
-                <a:latin typeface="나눔스퀘어"/>
-                <a:ea typeface="나눔스퀘어"/>
-                <a:cs typeface="나눔스퀘어"/>
+                  <a:srgbClr val="000000"/>
+                </a:solidFill>
+                <a:latin typeface="나눔스퀘어 ExtraBold"/>
+                <a:ea typeface="나눔스퀘어 ExtraBold"/>
+                <a:cs typeface="나눔스퀘어 ExtraBold"/>
               </a:rPr>
               <a:t>04  배터리</a:t>
             </a:r>
@@ -13928,7 +13762,7 @@
             <a:r>
               <a:rPr sz="1400" b="1" i="0" spc="-30">
                 <a:solidFill>
-                  <a:srgbClr val="1A1A1A"/>
+                  <a:srgbClr val="000000"/>
                 </a:solidFill>
                 <a:latin typeface="나눔스퀘어 ExtraBold"/>
                 <a:ea typeface="나눔스퀘어 ExtraBold"/>
@@ -13967,7 +13801,7 @@
             <a:r>
               <a:rPr sz="1300" b="1" i="0" spc="-30">
                 <a:solidFill>
-                  <a:srgbClr val="1A1A1A"/>
+                  <a:srgbClr val="000000"/>
                 </a:solidFill>
                 <a:latin typeface="나눔스퀘어 ExtraBold"/>
                 <a:ea typeface="나눔스퀘어 ExtraBold"/>
@@ -13994,7 +13828,7 @@
           </a:prstGeom>
           <a:ln w="12700">
             <a:solidFill>
-              <a:srgbClr val="BFBFBF"/>
+              <a:srgbClr val="A6A6A6"/>
             </a:solidFill>
           </a:ln>
         </p:spPr>
@@ -14041,7 +13875,7 @@
             <a:r>
               <a:rPr sz="1300" b="1" i="0" spc="-30">
                 <a:solidFill>
-                  <a:srgbClr val="1A1A1A"/>
+                  <a:srgbClr val="000000"/>
                 </a:solidFill>
                 <a:latin typeface="나눔스퀘어 ExtraBold"/>
                 <a:ea typeface="나눔스퀘어 ExtraBold"/>
@@ -14068,7 +13902,7 @@
           </a:prstGeom>
           <a:ln w="12700">
             <a:solidFill>
-              <a:srgbClr val="BFBFBF"/>
+              <a:srgbClr val="A6A6A6"/>
             </a:solidFill>
           </a:ln>
         </p:spPr>
@@ -14157,7 +13991,7 @@
             <a:r>
               <a:rPr sz="1700" b="1" i="0" spc="-30">
                 <a:solidFill>
-                  <a:srgbClr val="C0392B"/>
+                  <a:srgbClr val="C00000"/>
                 </a:solidFill>
                 <a:latin typeface="나눔스퀘어 ExtraBold"/>
                 <a:ea typeface="나눔스퀘어 ExtraBold"/>
@@ -14196,7 +14030,7 @@
             <a:r>
               <a:rPr sz="850" b="0" i="0" spc="-30">
                 <a:solidFill>
-                  <a:srgbClr val="7F7F7F"/>
+                  <a:srgbClr val="595959"/>
                 </a:solidFill>
                 <a:latin typeface="나눔스퀘어"/>
                 <a:ea typeface="나눔스퀘어"/>
@@ -14277,7 +14111,7 @@
             <a:r>
               <a:rPr sz="1700" b="1" i="0" spc="-30">
                 <a:solidFill>
-                  <a:srgbClr val="C0392B"/>
+                  <a:srgbClr val="C00000"/>
                 </a:solidFill>
                 <a:latin typeface="나눔스퀘어 ExtraBold"/>
                 <a:ea typeface="나눔스퀘어 ExtraBold"/>
@@ -14316,7 +14150,7 @@
             <a:r>
               <a:rPr sz="850" b="0" i="0" spc="-30">
                 <a:solidFill>
-                  <a:srgbClr val="7F7F7F"/>
+                  <a:srgbClr val="595959"/>
                 </a:solidFill>
                 <a:latin typeface="나눔스퀘어"/>
                 <a:ea typeface="나눔스퀘어"/>
@@ -14397,7 +14231,7 @@
             <a:r>
               <a:rPr sz="1700" b="1" i="0" spc="-30">
                 <a:solidFill>
-                  <a:srgbClr val="C0392B"/>
+                  <a:srgbClr val="C00000"/>
                 </a:solidFill>
                 <a:latin typeface="나눔스퀘어 ExtraBold"/>
                 <a:ea typeface="나눔스퀘어 ExtraBold"/>
@@ -14436,7 +14270,7 @@
             <a:r>
               <a:rPr sz="850" b="0" i="0" spc="-30">
                 <a:solidFill>
-                  <a:srgbClr val="7F7F7F"/>
+                  <a:srgbClr val="595959"/>
                 </a:solidFill>
                 <a:latin typeface="나눔스퀘어"/>
                 <a:ea typeface="나눔스퀘어"/>
@@ -14456,11 +14290,11 @@
         <p:spPr>
           <a:xfrm>
             <a:off x="274320" y="2697480"/>
-            <a:ext cx="1234440" cy="237744"/>
+            <a:ext cx="1234440" cy="219456"/>
           </a:xfrm>
           <a:prstGeom prst="roundRect">
             <a:avLst>
-              <a:gd name="adj" fmla="val 50000"/>
+              <a:gd name="adj" fmla="val 19092"/>
             </a:avLst>
           </a:prstGeom>
           <a:solidFill>
@@ -14468,7 +14302,7 @@
           </a:solidFill>
           <a:ln w="9525">
             <a:solidFill>
-              <a:srgbClr val="A6A6A6"/>
+              <a:srgbClr val="BFBFBF"/>
             </a:solidFill>
           </a:ln>
           <a:effectLst/>
@@ -14502,7 +14336,7 @@
         <p:spPr>
           <a:xfrm>
             <a:off x="274320" y="2697480"/>
-            <a:ext cx="1234440" cy="237744"/>
+            <a:ext cx="1234440" cy="219456"/>
           </a:xfrm>
           <a:prstGeom prst="rect">
             <a:avLst/>
@@ -14521,7 +14355,7 @@
             <a:r>
               <a:rPr sz="950" b="1" i="0" spc="-30">
                 <a:solidFill>
-                  <a:srgbClr val="1A1A1A"/>
+                  <a:srgbClr val="404040"/>
                 </a:solidFill>
                 <a:latin typeface="나눔스퀘어 Bold"/>
                 <a:ea typeface="나눔스퀘어 Bold"/>
@@ -14564,7 +14398,7 @@
             <a:r>
               <a:rPr sz="1100" b="0" i="0" spc="-30">
                 <a:solidFill>
-                  <a:srgbClr val="1A1A1A"/>
+                  <a:srgbClr val="000000"/>
                 </a:solidFill>
                 <a:latin typeface="나눔스퀘어"/>
                 <a:ea typeface="나눔스퀘어"/>
@@ -14583,7 +14417,7 @@
             <a:r>
               <a:rPr sz="800" b="0" i="0" spc="-30">
                 <a:solidFill>
-                  <a:srgbClr val="7F7F7F"/>
+                  <a:srgbClr val="808080"/>
                 </a:solidFill>
                 <a:latin typeface="나눔스퀘어"/>
                 <a:ea typeface="나눔스퀘어"/>
@@ -14603,7 +14437,7 @@
             <a:r>
               <a:rPr sz="1100" b="0" i="0" spc="-30">
                 <a:solidFill>
-                  <a:srgbClr val="1A1A1A"/>
+                  <a:srgbClr val="000000"/>
                 </a:solidFill>
                 <a:latin typeface="나눔스퀘어"/>
                 <a:ea typeface="나눔스퀘어"/>
@@ -14622,7 +14456,7 @@
             <a:r>
               <a:rPr sz="800" b="0" i="0" spc="-30">
                 <a:solidFill>
-                  <a:srgbClr val="7F7F7F"/>
+                  <a:srgbClr val="808080"/>
                 </a:solidFill>
                 <a:latin typeface="나눔스퀘어"/>
                 <a:ea typeface="나눔스퀘어"/>
@@ -14642,7 +14476,7 @@
             <a:r>
               <a:rPr sz="1100" b="0" i="0" spc="-30">
                 <a:solidFill>
-                  <a:srgbClr val="1A1A1A"/>
+                  <a:srgbClr val="000000"/>
                 </a:solidFill>
                 <a:latin typeface="나눔스퀘어"/>
                 <a:ea typeface="나눔스퀘어"/>
@@ -14661,7 +14495,7 @@
             <a:r>
               <a:rPr sz="800" b="0" i="0" spc="-30">
                 <a:solidFill>
-                  <a:srgbClr val="7F7F7F"/>
+                  <a:srgbClr val="808080"/>
                 </a:solidFill>
                 <a:latin typeface="나눔스퀘어"/>
                 <a:ea typeface="나눔스퀘어"/>
@@ -14681,7 +14515,7 @@
             <a:r>
               <a:rPr sz="1100" b="0" i="0" spc="-30">
                 <a:solidFill>
-                  <a:srgbClr val="1A1A1A"/>
+                  <a:srgbClr val="000000"/>
                 </a:solidFill>
                 <a:latin typeface="나눔스퀘어"/>
                 <a:ea typeface="나눔스퀘어"/>
@@ -14700,7 +14534,7 @@
             <a:r>
               <a:rPr sz="800" b="0" i="0" spc="-30">
                 <a:solidFill>
-                  <a:srgbClr val="7F7F7F"/>
+                  <a:srgbClr val="808080"/>
                 </a:solidFill>
                 <a:latin typeface="나눔스퀘어"/>
                 <a:ea typeface="나눔스퀘어"/>
@@ -14726,7 +14560,7 @@
             <a:avLst/>
           </a:prstGeom>
           <a:solidFill>
-            <a:srgbClr val="DEEBF7"/>
+            <a:srgbClr val="DCEAF7"/>
           </a:solidFill>
           <a:ln>
             <a:noFill/>
@@ -14781,7 +14615,7 @@
             <a:r>
               <a:rPr sz="1150" b="1" i="0" spc="-30">
                 <a:solidFill>
-                  <a:srgbClr val="002060"/>
+                  <a:srgbClr val="215F9A"/>
                 </a:solidFill>
                 <a:latin typeface="나눔스퀘어 Bold"/>
                 <a:ea typeface="나눔스퀘어 Bold"/>
@@ -14801,15 +14635,15 @@
         <p:spPr>
           <a:xfrm>
             <a:off x="5074920" y="1783080"/>
-            <a:ext cx="1234440" cy="237744"/>
+            <a:ext cx="1234440" cy="219456"/>
           </a:xfrm>
           <a:prstGeom prst="roundRect">
             <a:avLst>
-              <a:gd name="adj" fmla="val 50000"/>
+              <a:gd name="adj" fmla="val 16667"/>
             </a:avLst>
           </a:prstGeom>
           <a:solidFill>
-            <a:srgbClr val="002060"/>
+            <a:srgbClr val="215F9A"/>
           </a:solidFill>
           <a:ln>
             <a:noFill/>
@@ -14845,7 +14679,7 @@
         <p:spPr>
           <a:xfrm>
             <a:off x="5074920" y="1783080"/>
-            <a:ext cx="1234440" cy="237744"/>
+            <a:ext cx="1234440" cy="219456"/>
           </a:xfrm>
           <a:prstGeom prst="rect">
             <a:avLst/>
@@ -14908,7 +14742,7 @@
                       <a:r>
                         <a:rPr sz="1000" b="1" i="0" spc="-30">
                           <a:solidFill>
-                            <a:srgbClr val="1A1A1A"/>
+                            <a:srgbClr val="000000"/>
                           </a:solidFill>
                           <a:latin typeface="나눔스퀘어 Bold"/>
                           <a:ea typeface="나눔스퀘어 Bold"/>
@@ -14933,7 +14767,7 @@
                       <a:r>
                         <a:rPr sz="900" b="1" i="0" spc="-30">
                           <a:solidFill>
-                            <a:srgbClr val="1A1A1A"/>
+                            <a:srgbClr val="000000"/>
                           </a:solidFill>
                           <a:latin typeface="나눔스퀘어 Bold"/>
                           <a:ea typeface="나눔스퀘어 Bold"/>
@@ -14958,7 +14792,7 @@
                       <a:r>
                         <a:rPr sz="950" b="0" i="0" spc="-30">
                           <a:solidFill>
-                            <a:srgbClr val="1A1A1A"/>
+                            <a:srgbClr val="000000"/>
                           </a:solidFill>
                           <a:latin typeface="나눔스퀘어"/>
                           <a:ea typeface="나눔스퀘어"/>
@@ -14985,7 +14819,7 @@
                       <a:r>
                         <a:rPr sz="1000" b="1" i="0" spc="-30">
                           <a:solidFill>
-                            <a:srgbClr val="1A1A1A"/>
+                            <a:srgbClr val="000000"/>
                           </a:solidFill>
                           <a:latin typeface="나눔스퀘어 Bold"/>
                           <a:ea typeface="나눔스퀘어 Bold"/>
@@ -15022,7 +14856,7 @@
                   </a:txBody>
                   <a:tcPr marL="45720" marR="45720" marT="18288" marB="18288" anchor="ctr">
                     <a:solidFill>
-                      <a:srgbClr val="002060"/>
+                      <a:srgbClr val="215F9A"/>
                     </a:solidFill>
                   </a:tcPr>
                 </a:tc>
@@ -15035,7 +14869,7 @@
                       <a:r>
                         <a:rPr sz="950" b="0" i="0" spc="-30">
                           <a:solidFill>
-                            <a:srgbClr val="1A1A1A"/>
+                            <a:srgbClr val="000000"/>
                           </a:solidFill>
                           <a:latin typeface="나눔스퀘어"/>
                           <a:ea typeface="나눔스퀘어"/>
@@ -15062,7 +14896,7 @@
                       <a:r>
                         <a:rPr sz="1000" b="1" i="0" spc="-30">
                           <a:solidFill>
-                            <a:srgbClr val="1A1A1A"/>
+                            <a:srgbClr val="000000"/>
                           </a:solidFill>
                           <a:latin typeface="나눔스퀘어 Bold"/>
                           <a:ea typeface="나눔스퀘어 Bold"/>
@@ -15099,7 +14933,7 @@
                   </a:txBody>
                   <a:tcPr marL="45720" marR="45720" marT="18288" marB="18288" anchor="ctr">
                     <a:solidFill>
-                      <a:srgbClr val="F26B43"/>
+                      <a:srgbClr val="C00000"/>
                     </a:solidFill>
                   </a:tcPr>
                 </a:tc>
@@ -15112,7 +14946,7 @@
                       <a:r>
                         <a:rPr sz="950" b="0" i="0" spc="-30">
                           <a:solidFill>
-                            <a:srgbClr val="1A1A1A"/>
+                            <a:srgbClr val="000000"/>
                           </a:solidFill>
                           <a:latin typeface="나눔스퀘어"/>
                           <a:ea typeface="나눔스퀘어"/>
@@ -15139,7 +14973,7 @@
                       <a:r>
                         <a:rPr sz="1000" b="1" i="0" spc="-30">
                           <a:solidFill>
-                            <a:srgbClr val="1A1A1A"/>
+                            <a:srgbClr val="000000"/>
                           </a:solidFill>
                           <a:latin typeface="나눔스퀘어 Bold"/>
                           <a:ea typeface="나눔스퀘어 Bold"/>
@@ -15176,7 +15010,7 @@
                   </a:txBody>
                   <a:tcPr marL="45720" marR="45720" marT="18288" marB="18288" anchor="ctr">
                     <a:solidFill>
-                      <a:srgbClr val="002060"/>
+                      <a:srgbClr val="215F9A"/>
                     </a:solidFill>
                   </a:tcPr>
                 </a:tc>
@@ -15189,7 +15023,7 @@
                       <a:r>
                         <a:rPr sz="950" b="0" i="0" spc="-30">
                           <a:solidFill>
-                            <a:srgbClr val="1A1A1A"/>
+                            <a:srgbClr val="000000"/>
                           </a:solidFill>
                           <a:latin typeface="나눔스퀘어"/>
                           <a:ea typeface="나눔스퀘어"/>
@@ -15219,15 +15053,15 @@
         <p:spPr>
           <a:xfrm>
             <a:off x="5074920" y="4142232"/>
-            <a:ext cx="1234440" cy="237744"/>
+            <a:ext cx="1234440" cy="219456"/>
           </a:xfrm>
           <a:prstGeom prst="roundRect">
             <a:avLst>
-              <a:gd name="adj" fmla="val 50000"/>
+              <a:gd name="adj" fmla="val 16667"/>
             </a:avLst>
           </a:prstGeom>
           <a:solidFill>
-            <a:srgbClr val="002060"/>
+            <a:srgbClr val="215F9A"/>
           </a:solidFill>
           <a:ln>
             <a:noFill/>
@@ -15263,7 +15097,7 @@
         <p:spPr>
           <a:xfrm>
             <a:off x="5074920" y="4142232"/>
-            <a:ext cx="1234440" cy="237744"/>
+            <a:ext cx="1234440" cy="219456"/>
           </a:xfrm>
           <a:prstGeom prst="rect">
             <a:avLst/>
@@ -15324,7 +15158,7 @@
             <a:r>
               <a:rPr sz="1050" b="1" i="0" spc="-30">
                 <a:solidFill>
-                  <a:srgbClr val="002060"/>
+                  <a:srgbClr val="215F9A"/>
                 </a:solidFill>
                 <a:latin typeface="나눔스퀘어 ExtraBold"/>
                 <a:ea typeface="나눔스퀘어 ExtraBold"/>
@@ -15335,7 +15169,7 @@
             <a:r>
               <a:rPr sz="1050" b="0" i="0" spc="-30">
                 <a:solidFill>
-                  <a:srgbClr val="1A1A1A"/>
+                  <a:srgbClr val="000000"/>
                 </a:solidFill>
                 <a:latin typeface="나눔스퀘어"/>
                 <a:ea typeface="나눔스퀘어"/>
@@ -15354,7 +15188,7 @@
             <a:r>
               <a:rPr sz="1050" b="1" i="0" spc="-30">
                 <a:solidFill>
-                  <a:srgbClr val="002060"/>
+                  <a:srgbClr val="215F9A"/>
                 </a:solidFill>
                 <a:latin typeface="나눔스퀘어 ExtraBold"/>
                 <a:ea typeface="나눔스퀘어 ExtraBold"/>
@@ -15365,7 +15199,7 @@
             <a:r>
               <a:rPr sz="1050" b="0" i="0" spc="-30">
                 <a:solidFill>
-                  <a:srgbClr val="1A1A1A"/>
+                  <a:srgbClr val="000000"/>
                 </a:solidFill>
                 <a:latin typeface="나눔스퀘어"/>
                 <a:ea typeface="나눔스퀘어"/>
@@ -15384,7 +15218,7 @@
             <a:r>
               <a:rPr sz="1050" b="1" i="0" spc="-30">
                 <a:solidFill>
-                  <a:srgbClr val="002060"/>
+                  <a:srgbClr val="215F9A"/>
                 </a:solidFill>
                 <a:latin typeface="나눔스퀘어 ExtraBold"/>
                 <a:ea typeface="나눔스퀘어 ExtraBold"/>
@@ -15395,7 +15229,7 @@
             <a:r>
               <a:rPr sz="1050" b="0" i="0" spc="-30">
                 <a:solidFill>
-                  <a:srgbClr val="1A1A1A"/>
+                  <a:srgbClr val="000000"/>
                 </a:solidFill>
                 <a:latin typeface="나눔스퀘어"/>
                 <a:ea typeface="나눔스퀘어"/>
@@ -15421,7 +15255,7 @@
             <a:avLst/>
           </a:prstGeom>
           <a:solidFill>
-            <a:srgbClr val="002060"/>
+            <a:srgbClr val="215F9A"/>
           </a:solidFill>
           <a:ln>
             <a:noFill/>
@@ -15479,7 +15313,7 @@
             <a:r>
               <a:rPr sz="900" b="1" i="0" spc="-30">
                 <a:solidFill>
-                  <a:srgbClr val="BFCFE8"/>
+                  <a:srgbClr val="DCEAF7"/>
                 </a:solidFill>
                 <a:latin typeface="나눔스퀘어 Bold"/>
                 <a:ea typeface="나눔스퀘어 Bold"/>
@@ -15514,8 +15348,8 @@
         </p:nvSpPr>
         <p:spPr>
           <a:xfrm>
-            <a:off x="274320" y="6492240"/>
-            <a:ext cx="8778240" cy="256032"/>
+            <a:off x="274320" y="6382512"/>
+            <a:ext cx="6583680" cy="365760"/>
           </a:xfrm>
           <a:prstGeom prst="rect">
             <a:avLst/>
@@ -15523,7 +15357,7 @@
           <a:noFill/>
         </p:spPr>
         <p:txBody>
-          <a:bodyPr wrap="square" anchor="t" lIns="36576" rIns="36576" tIns="36576" bIns="36576">
+          <a:bodyPr wrap="square" anchor="b" lIns="36576" rIns="36576" tIns="36576" bIns="36576">
             <a:spAutoFit/>
           </a:bodyPr>
           <a:lstStyle/>
@@ -15534,7 +15368,7 @@
             <a:r>
               <a:rPr sz="750" b="0" i="0" spc="-30">
                 <a:solidFill>
-                  <a:srgbClr val="7F7F7F"/>
+                  <a:srgbClr val="808080"/>
                 </a:solidFill>
                 <a:latin typeface="나눔스퀘어"/>
                 <a:ea typeface="나눔스퀘어"/>
@@ -15547,40 +15381,24 @@
       </p:sp>
       <p:sp>
         <p:nvSpPr>
-          <p:cNvPr id="31" name="Page number"/>
-          <p:cNvSpPr txBox="1"/>
-          <p:nvPr/>
-        </p:nvSpPr>
-        <p:spPr>
-          <a:xfrm>
-            <a:off x="9326880" y="6519672"/>
-            <a:ext cx="457200" cy="228600"/>
-          </a:xfrm>
-          <a:prstGeom prst="rect">
-            <a:avLst/>
-          </a:prstGeom>
-          <a:noFill/>
-        </p:spPr>
-        <p:txBody>
-          <a:bodyPr wrap="square" anchor="t" lIns="36576" rIns="36576" tIns="36576" bIns="36576">
-            <a:spAutoFit/>
-          </a:bodyPr>
-          <a:lstStyle/>
-          <a:p>
-            <a:pPr algn="r">
-              <a:buNone/>
-            </a:pPr>
-            <a:r>
-              <a:rPr sz="800" b="0" i="0" spc="-30">
-                <a:solidFill>
-                  <a:srgbClr val="7F7F7F"/>
-                </a:solidFill>
-                <a:latin typeface="나눔스퀘어"/>
-                <a:ea typeface="나눔스퀘어"/>
-                <a:cs typeface="나눔스퀘어"/>
-              </a:rPr>
-              <a:t>8</a:t>
-            </a:r>
+          <p:cNvPr id="6" name="Slide Number Placeholder 5"/>
+          <p:cNvSpPr>
+            <a:spLocks noGrp="1"/>
+          </p:cNvSpPr>
+          <p:nvPr>
+            <p:ph type="sldNum" sz="quarter" idx="12"/>
+          </p:nvPr>
+        </p:nvSpPr>
+        <p:spPr/>
+        <p:txBody>
+          <a:bodyPr/>
+          <a:lstStyle/>
+          <a:p>
+            <a:fld id="{C0166AD1-3E4E-49AB-A7F9-67C30DF503DC}" type="slidenum">
+              <a:rPr lang="ko-KR" altLang="en-US" smtClean="0"/>
+              <a:t>‹#›</a:t>
+            </a:fld>
+            <a:endParaRPr lang="ko-KR" altLang="en-US"/>
           </a:p>
         </p:txBody>
       </p:sp>
@@ -15610,7 +15428,7 @@
         </p:nvSpPr>
         <p:spPr>
           <a:xfrm>
-            <a:off x="274320" y="201168"/>
+            <a:off x="274320" y="182880"/>
             <a:ext cx="8961120" cy="384048"/>
           </a:xfrm>
           <a:prstGeom prst="rect">
@@ -15619,7 +15437,7 @@
           <a:noFill/>
         </p:spPr>
         <p:txBody>
-          <a:bodyPr wrap="square" anchor="t" lIns="36576" rIns="36576" tIns="36576" bIns="36576">
+          <a:bodyPr wrap="square" anchor="t" lIns="0" rIns="0" tIns="0" bIns="0">
             <a:spAutoFit/>
           </a:bodyPr>
           <a:lstStyle/>
@@ -15630,33 +15448,33 @@
             <a:r>
               <a:rPr sz="1800" b="0" i="0" spc="-30">
                 <a:solidFill>
-                  <a:srgbClr val="A6A6A6"/>
-                </a:solidFill>
-                <a:latin typeface="나눔스퀘어"/>
-                <a:ea typeface="나눔스퀘어"/>
-                <a:cs typeface="나눔스퀘어"/>
-              </a:rPr>
-              <a:t>사업부문별 리뷰</a:t>
+                  <a:srgbClr val="808080"/>
+                </a:solidFill>
+                <a:latin typeface="나눔스퀘어 ExtraBold"/>
+                <a:ea typeface="나눔스퀘어 ExtraBold"/>
+                <a:cs typeface="나눔스퀘어 ExtraBold"/>
+              </a:rPr>
+              <a:t>사업부문별 리뷰  </a:t>
             </a:r>
             <a:r>
               <a:rPr sz="1800" b="0" i="0" spc="-30">
                 <a:solidFill>
-                  <a:srgbClr val="1A1A1A"/>
-                </a:solidFill>
-                <a:latin typeface="나눔스퀘어"/>
-                <a:ea typeface="나눔스퀘어"/>
-                <a:cs typeface="나눔스퀘어"/>
-              </a:rPr>
-              <a:t>   |   </a:t>
+                  <a:srgbClr val="000000"/>
+                </a:solidFill>
+                <a:latin typeface="나눔스퀘어 ExtraBold"/>
+                <a:ea typeface="나눔스퀘어 ExtraBold"/>
+                <a:cs typeface="나눔스퀘어 ExtraBold"/>
+              </a:rPr>
+              <a:t>|  </a:t>
             </a:r>
             <a:r>
               <a:rPr sz="1800" b="0" i="0" spc="-30">
                 <a:solidFill>
-                  <a:srgbClr val="1A1A1A"/>
-                </a:solidFill>
-                <a:latin typeface="나눔스퀘어"/>
-                <a:ea typeface="나눔스퀘어"/>
-                <a:cs typeface="나눔스퀘어"/>
+                  <a:srgbClr val="000000"/>
+                </a:solidFill>
+                <a:latin typeface="나눔스퀘어 ExtraBold"/>
+                <a:ea typeface="나눔스퀘어 ExtraBold"/>
+                <a:cs typeface="나눔스퀘어 ExtraBold"/>
               </a:rPr>
               <a:t>05  E&amp;S</a:t>
             </a:r>
@@ -15691,7 +15509,7 @@
             <a:r>
               <a:rPr sz="1400" b="1" i="0" spc="-30">
                 <a:solidFill>
-                  <a:srgbClr val="1A1A1A"/>
+                  <a:srgbClr val="000000"/>
                 </a:solidFill>
                 <a:latin typeface="나눔스퀘어 ExtraBold"/>
                 <a:ea typeface="나눔스퀘어 ExtraBold"/>
@@ -15730,7 +15548,7 @@
             <a:r>
               <a:rPr sz="1300" b="1" i="0" spc="-30">
                 <a:solidFill>
-                  <a:srgbClr val="1A1A1A"/>
+                  <a:srgbClr val="000000"/>
                 </a:solidFill>
                 <a:latin typeface="나눔스퀘어 ExtraBold"/>
                 <a:ea typeface="나눔스퀘어 ExtraBold"/>
@@ -15757,7 +15575,7 @@
           </a:prstGeom>
           <a:ln w="12700">
             <a:solidFill>
-              <a:srgbClr val="BFBFBF"/>
+              <a:srgbClr val="A6A6A6"/>
             </a:solidFill>
           </a:ln>
         </p:spPr>
@@ -15804,7 +15622,7 @@
             <a:r>
               <a:rPr sz="1300" b="1" i="0" spc="-30">
                 <a:solidFill>
-                  <a:srgbClr val="1A1A1A"/>
+                  <a:srgbClr val="000000"/>
                 </a:solidFill>
                 <a:latin typeface="나눔스퀘어 ExtraBold"/>
                 <a:ea typeface="나눔스퀘어 ExtraBold"/>
@@ -15831,7 +15649,7 @@
           </a:prstGeom>
           <a:ln w="12700">
             <a:solidFill>
-              <a:srgbClr val="BFBFBF"/>
+              <a:srgbClr val="A6A6A6"/>
             </a:solidFill>
           </a:ln>
         </p:spPr>
@@ -15920,7 +15738,7 @@
             <a:r>
               <a:rPr sz="1700" b="1" i="0" spc="-30">
                 <a:solidFill>
-                  <a:srgbClr val="002060"/>
+                  <a:srgbClr val="215F9A"/>
                 </a:solidFill>
                 <a:latin typeface="나눔스퀘어 ExtraBold"/>
                 <a:ea typeface="나눔스퀘어 ExtraBold"/>
@@ -15959,7 +15777,7 @@
             <a:r>
               <a:rPr sz="850" b="0" i="0" spc="-30">
                 <a:solidFill>
-                  <a:srgbClr val="7F7F7F"/>
+                  <a:srgbClr val="595959"/>
                 </a:solidFill>
                 <a:latin typeface="나눔스퀘어"/>
                 <a:ea typeface="나눔스퀘어"/>
@@ -16040,7 +15858,7 @@
             <a:r>
               <a:rPr sz="1700" b="1" i="0" spc="-30">
                 <a:solidFill>
-                  <a:srgbClr val="002060"/>
+                  <a:srgbClr val="215F9A"/>
                 </a:solidFill>
                 <a:latin typeface="나눔스퀘어 ExtraBold"/>
                 <a:ea typeface="나눔스퀘어 ExtraBold"/>
@@ -16079,7 +15897,7 @@
             <a:r>
               <a:rPr sz="850" b="0" i="0" spc="-30">
                 <a:solidFill>
-                  <a:srgbClr val="7F7F7F"/>
+                  <a:srgbClr val="595959"/>
                 </a:solidFill>
                 <a:latin typeface="나눔스퀘어"/>
                 <a:ea typeface="나눔스퀘어"/>
@@ -16160,7 +15978,7 @@
             <a:r>
               <a:rPr sz="1700" b="1" i="0" spc="-30">
                 <a:solidFill>
-                  <a:srgbClr val="002060"/>
+                  <a:srgbClr val="215F9A"/>
                 </a:solidFill>
                 <a:latin typeface="나눔스퀘어 ExtraBold"/>
                 <a:ea typeface="나눔스퀘어 ExtraBold"/>
@@ -16199,7 +16017,7 @@
             <a:r>
               <a:rPr sz="850" b="0" i="0" spc="-30">
                 <a:solidFill>
-                  <a:srgbClr val="7F7F7F"/>
+                  <a:srgbClr val="595959"/>
                 </a:solidFill>
                 <a:latin typeface="나눔스퀘어"/>
                 <a:ea typeface="나눔스퀘어"/>
@@ -16219,11 +16037,11 @@
         <p:spPr>
           <a:xfrm>
             <a:off x="274320" y="2697480"/>
-            <a:ext cx="1234440" cy="237744"/>
+            <a:ext cx="1234440" cy="219456"/>
           </a:xfrm>
           <a:prstGeom prst="roundRect">
             <a:avLst>
-              <a:gd name="adj" fmla="val 50000"/>
+              <a:gd name="adj" fmla="val 19092"/>
             </a:avLst>
           </a:prstGeom>
           <a:solidFill>
@@ -16231,7 +16049,7 @@
           </a:solidFill>
           <a:ln w="9525">
             <a:solidFill>
-              <a:srgbClr val="A6A6A6"/>
+              <a:srgbClr val="BFBFBF"/>
             </a:solidFill>
           </a:ln>
           <a:effectLst/>
@@ -16265,7 +16083,7 @@
         <p:spPr>
           <a:xfrm>
             <a:off x="274320" y="2697480"/>
-            <a:ext cx="1234440" cy="237744"/>
+            <a:ext cx="1234440" cy="219456"/>
           </a:xfrm>
           <a:prstGeom prst="rect">
             <a:avLst/>
@@ -16284,7 +16102,7 @@
             <a:r>
               <a:rPr sz="950" b="1" i="0" spc="-30">
                 <a:solidFill>
-                  <a:srgbClr val="1A1A1A"/>
+                  <a:srgbClr val="404040"/>
                 </a:solidFill>
                 <a:latin typeface="나눔스퀘어 Bold"/>
                 <a:ea typeface="나눔스퀘어 Bold"/>
@@ -16327,7 +16145,7 @@
             <a:r>
               <a:rPr sz="1100" b="0" i="0" spc="-30">
                 <a:solidFill>
-                  <a:srgbClr val="1A1A1A"/>
+                  <a:srgbClr val="000000"/>
                 </a:solidFill>
                 <a:latin typeface="나눔스퀘어"/>
                 <a:ea typeface="나눔스퀘어"/>
@@ -16346,7 +16164,7 @@
             <a:r>
               <a:rPr sz="800" b="0" i="0" spc="-30">
                 <a:solidFill>
-                  <a:srgbClr val="7F7F7F"/>
+                  <a:srgbClr val="808080"/>
                 </a:solidFill>
                 <a:latin typeface="나눔스퀘어"/>
                 <a:ea typeface="나눔스퀘어"/>
@@ -16366,7 +16184,7 @@
             <a:r>
               <a:rPr sz="1100" b="0" i="0" spc="-30">
                 <a:solidFill>
-                  <a:srgbClr val="1A1A1A"/>
+                  <a:srgbClr val="000000"/>
                 </a:solidFill>
                 <a:latin typeface="나눔스퀘어"/>
                 <a:ea typeface="나눔스퀘어"/>
@@ -16385,7 +16203,7 @@
             <a:r>
               <a:rPr sz="800" b="0" i="0" spc="-30">
                 <a:solidFill>
-                  <a:srgbClr val="7F7F7F"/>
+                  <a:srgbClr val="808080"/>
                 </a:solidFill>
                 <a:latin typeface="나눔스퀘어"/>
                 <a:ea typeface="나눔스퀘어"/>
@@ -16405,7 +16223,7 @@
             <a:r>
               <a:rPr sz="1100" b="0" i="0" spc="-30">
                 <a:solidFill>
-                  <a:srgbClr val="1A1A1A"/>
+                  <a:srgbClr val="000000"/>
                 </a:solidFill>
                 <a:latin typeface="나눔스퀘어"/>
                 <a:ea typeface="나눔스퀘어"/>
@@ -16424,7 +16242,7 @@
             <a:r>
               <a:rPr sz="800" b="0" i="0" spc="-30">
                 <a:solidFill>
-                  <a:srgbClr val="7F7F7F"/>
+                  <a:srgbClr val="808080"/>
                 </a:solidFill>
                 <a:latin typeface="나눔스퀘어"/>
                 <a:ea typeface="나눔스퀘어"/>
@@ -16444,7 +16262,7 @@
             <a:r>
               <a:rPr sz="1100" b="0" i="0" spc="-30">
                 <a:solidFill>
-                  <a:srgbClr val="1A1A1A"/>
+                  <a:srgbClr val="000000"/>
                 </a:solidFill>
                 <a:latin typeface="나눔스퀘어"/>
                 <a:ea typeface="나눔스퀘어"/>
@@ -16463,7 +16281,7 @@
             <a:r>
               <a:rPr sz="800" b="0" i="0" spc="-30">
                 <a:solidFill>
-                  <a:srgbClr val="7F7F7F"/>
+                  <a:srgbClr val="808080"/>
                 </a:solidFill>
                 <a:latin typeface="나눔스퀘어"/>
                 <a:ea typeface="나눔스퀘어"/>
@@ -16489,7 +16307,7 @@
             <a:avLst/>
           </a:prstGeom>
           <a:solidFill>
-            <a:srgbClr val="DEEBF7"/>
+            <a:srgbClr val="DCEAF7"/>
           </a:solidFill>
           <a:ln>
             <a:noFill/>
@@ -16544,7 +16362,7 @@
             <a:r>
               <a:rPr sz="1150" b="1" i="0" spc="-30">
                 <a:solidFill>
-                  <a:srgbClr val="002060"/>
+                  <a:srgbClr val="215F9A"/>
                 </a:solidFill>
                 <a:latin typeface="나눔스퀘어 Bold"/>
                 <a:ea typeface="나눔스퀘어 Bold"/>
@@ -16564,15 +16382,15 @@
         <p:spPr>
           <a:xfrm>
             <a:off x="5074920" y="1783080"/>
-            <a:ext cx="1234440" cy="237744"/>
+            <a:ext cx="1234440" cy="219456"/>
           </a:xfrm>
           <a:prstGeom prst="roundRect">
             <a:avLst>
-              <a:gd name="adj" fmla="val 50000"/>
+              <a:gd name="adj" fmla="val 16667"/>
             </a:avLst>
           </a:prstGeom>
           <a:solidFill>
-            <a:srgbClr val="002060"/>
+            <a:srgbClr val="215F9A"/>
           </a:solidFill>
           <a:ln>
             <a:noFill/>
@@ -16608,7 +16426,7 @@
         <p:spPr>
           <a:xfrm>
             <a:off x="5074920" y="1783080"/>
-            <a:ext cx="1234440" cy="237744"/>
+            <a:ext cx="1234440" cy="219456"/>
           </a:xfrm>
           <a:prstGeom prst="rect">
             <a:avLst/>
@@ -16671,7 +16489,7 @@
                       <a:r>
                         <a:rPr sz="1000" b="1" i="0" spc="-30">
                           <a:solidFill>
-                            <a:srgbClr val="1A1A1A"/>
+                            <a:srgbClr val="000000"/>
                           </a:solidFill>
                           <a:latin typeface="나눔스퀘어 Bold"/>
                           <a:ea typeface="나눔스퀘어 Bold"/>
@@ -16708,7 +16526,7 @@
                   </a:txBody>
                   <a:tcPr marL="45720" marR="45720" marT="18288" marB="18288" anchor="ctr">
                     <a:solidFill>
-                      <a:srgbClr val="002060"/>
+                      <a:srgbClr val="215F9A"/>
                     </a:solidFill>
                   </a:tcPr>
                 </a:tc>
@@ -16721,7 +16539,7 @@
                       <a:r>
                         <a:rPr sz="950" b="0" i="0" spc="-30">
                           <a:solidFill>
-                            <a:srgbClr val="1A1A1A"/>
+                            <a:srgbClr val="000000"/>
                           </a:solidFill>
                           <a:latin typeface="나눔스퀘어"/>
                           <a:ea typeface="나눔스퀘어"/>
@@ -16748,7 +16566,7 @@
                       <a:r>
                         <a:rPr sz="1000" b="1" i="0" spc="-30">
                           <a:solidFill>
-                            <a:srgbClr val="1A1A1A"/>
+                            <a:srgbClr val="000000"/>
                           </a:solidFill>
                           <a:latin typeface="나눔스퀘어 Bold"/>
                           <a:ea typeface="나눔스퀘어 Bold"/>
@@ -16773,7 +16591,7 @@
                       <a:r>
                         <a:rPr sz="900" b="1" i="0" spc="-30">
                           <a:solidFill>
-                            <a:srgbClr val="1A1A1A"/>
+                            <a:srgbClr val="000000"/>
                           </a:solidFill>
                           <a:latin typeface="나눔스퀘어 Bold"/>
                           <a:ea typeface="나눔스퀘어 Bold"/>
@@ -16798,7 +16616,7 @@
                       <a:r>
                         <a:rPr sz="950" b="0" i="0" spc="-30">
                           <a:solidFill>
-                            <a:srgbClr val="1A1A1A"/>
+                            <a:srgbClr val="000000"/>
                           </a:solidFill>
                           <a:latin typeface="나눔스퀘어"/>
                           <a:ea typeface="나눔스퀘어"/>
@@ -16825,7 +16643,7 @@
                       <a:r>
                         <a:rPr sz="1000" b="1" i="0" spc="-30">
                           <a:solidFill>
-                            <a:srgbClr val="1A1A1A"/>
+                            <a:srgbClr val="000000"/>
                           </a:solidFill>
                           <a:latin typeface="나눔스퀘어 Bold"/>
                           <a:ea typeface="나눔스퀘어 Bold"/>
@@ -16850,7 +16668,7 @@
                       <a:r>
                         <a:rPr sz="900" b="1" i="0" spc="-30">
                           <a:solidFill>
-                            <a:srgbClr val="1A1A1A"/>
+                            <a:srgbClr val="000000"/>
                           </a:solidFill>
                           <a:latin typeface="나눔스퀘어 Bold"/>
                           <a:ea typeface="나눔스퀘어 Bold"/>
@@ -16875,7 +16693,7 @@
                       <a:r>
                         <a:rPr sz="950" b="0" i="0" spc="-30">
                           <a:solidFill>
-                            <a:srgbClr val="1A1A1A"/>
+                            <a:srgbClr val="000000"/>
                           </a:solidFill>
                           <a:latin typeface="나눔스퀘어"/>
                           <a:ea typeface="나눔스퀘어"/>
@@ -16905,15 +16723,15 @@
         <p:spPr>
           <a:xfrm>
             <a:off x="5074920" y="3730752"/>
-            <a:ext cx="1234440" cy="237744"/>
+            <a:ext cx="1234440" cy="219456"/>
           </a:xfrm>
           <a:prstGeom prst="roundRect">
             <a:avLst>
-              <a:gd name="adj" fmla="val 50000"/>
+              <a:gd name="adj" fmla="val 16667"/>
             </a:avLst>
           </a:prstGeom>
           <a:solidFill>
-            <a:srgbClr val="002060"/>
+            <a:srgbClr val="215F9A"/>
           </a:solidFill>
           <a:ln>
             <a:noFill/>
@@ -16949,7 +16767,7 @@
         <p:spPr>
           <a:xfrm>
             <a:off x="5074920" y="3730752"/>
-            <a:ext cx="1234440" cy="237744"/>
+            <a:ext cx="1234440" cy="219456"/>
           </a:xfrm>
           <a:prstGeom prst="rect">
             <a:avLst/>
@@ -17010,7 +16828,7 @@
             <a:r>
               <a:rPr sz="1050" b="1" i="0" spc="-30">
                 <a:solidFill>
-                  <a:srgbClr val="002060"/>
+                  <a:srgbClr val="215F9A"/>
                 </a:solidFill>
                 <a:latin typeface="나눔스퀘어 ExtraBold"/>
                 <a:ea typeface="나눔스퀘어 ExtraBold"/>
@@ -17021,7 +16839,7 @@
             <a:r>
               <a:rPr sz="1050" b="0" i="0" spc="-30">
                 <a:solidFill>
-                  <a:srgbClr val="1A1A1A"/>
+                  <a:srgbClr val="000000"/>
                 </a:solidFill>
                 <a:latin typeface="나눔스퀘어"/>
                 <a:ea typeface="나눔스퀘어"/>
@@ -17040,7 +16858,7 @@
             <a:r>
               <a:rPr sz="1050" b="1" i="0" spc="-30">
                 <a:solidFill>
-                  <a:srgbClr val="002060"/>
+                  <a:srgbClr val="215F9A"/>
                 </a:solidFill>
                 <a:latin typeface="나눔스퀘어 ExtraBold"/>
                 <a:ea typeface="나눔스퀘어 ExtraBold"/>
@@ -17051,7 +16869,7 @@
             <a:r>
               <a:rPr sz="1050" b="0" i="0" spc="-30">
                 <a:solidFill>
-                  <a:srgbClr val="1A1A1A"/>
+                  <a:srgbClr val="000000"/>
                 </a:solidFill>
                 <a:latin typeface="나눔스퀘어"/>
                 <a:ea typeface="나눔스퀘어"/>
@@ -17070,7 +16888,7 @@
             <a:r>
               <a:rPr sz="1050" b="1" i="0" spc="-30">
                 <a:solidFill>
-                  <a:srgbClr val="002060"/>
+                  <a:srgbClr val="215F9A"/>
                 </a:solidFill>
                 <a:latin typeface="나눔스퀘어 ExtraBold"/>
                 <a:ea typeface="나눔스퀘어 ExtraBold"/>
@@ -17081,7 +16899,7 @@
             <a:r>
               <a:rPr sz="1050" b="0" i="0" spc="-30">
                 <a:solidFill>
-                  <a:srgbClr val="1A1A1A"/>
+                  <a:srgbClr val="000000"/>
                 </a:solidFill>
                 <a:latin typeface="나눔스퀘어"/>
                 <a:ea typeface="나눔스퀘어"/>
@@ -17107,7 +16925,7 @@
             <a:avLst/>
           </a:prstGeom>
           <a:solidFill>
-            <a:srgbClr val="002060"/>
+            <a:srgbClr val="215F9A"/>
           </a:solidFill>
           <a:ln>
             <a:noFill/>
@@ -17165,7 +16983,7 @@
             <a:r>
               <a:rPr sz="900" b="1" i="0" spc="-30">
                 <a:solidFill>
-                  <a:srgbClr val="BFCFE8"/>
+                  <a:srgbClr val="DCEAF7"/>
                 </a:solidFill>
                 <a:latin typeface="나눔스퀘어 Bold"/>
                 <a:ea typeface="나눔스퀘어 Bold"/>
@@ -17200,8 +17018,8 @@
         </p:nvSpPr>
         <p:spPr>
           <a:xfrm>
-            <a:off x="274320" y="6492240"/>
-            <a:ext cx="8778240" cy="256032"/>
+            <a:off x="274320" y="6382512"/>
+            <a:ext cx="6583680" cy="365760"/>
           </a:xfrm>
           <a:prstGeom prst="rect">
             <a:avLst/>
@@ -17209,7 +17027,7 @@
           <a:noFill/>
         </p:spPr>
         <p:txBody>
-          <a:bodyPr wrap="square" anchor="t" lIns="36576" rIns="36576" tIns="36576" bIns="36576">
+          <a:bodyPr wrap="square" anchor="b" lIns="36576" rIns="36576" tIns="36576" bIns="36576">
             <a:spAutoFit/>
           </a:bodyPr>
           <a:lstStyle/>
@@ -17220,7 +17038,7 @@
             <a:r>
               <a:rPr sz="750" b="0" i="0" spc="-30">
                 <a:solidFill>
-                  <a:srgbClr val="7F7F7F"/>
+                  <a:srgbClr val="808080"/>
                 </a:solidFill>
                 <a:latin typeface="나눔스퀘어"/>
                 <a:ea typeface="나눔스퀘어"/>
@@ -17233,40 +17051,24 @@
       </p:sp>
       <p:sp>
         <p:nvSpPr>
-          <p:cNvPr id="31" name="Page number"/>
-          <p:cNvSpPr txBox="1"/>
-          <p:nvPr/>
-        </p:nvSpPr>
-        <p:spPr>
-          <a:xfrm>
-            <a:off x="9326880" y="6519672"/>
-            <a:ext cx="457200" cy="228600"/>
-          </a:xfrm>
-          <a:prstGeom prst="rect">
-            <a:avLst/>
-          </a:prstGeom>
-          <a:noFill/>
-        </p:spPr>
-        <p:txBody>
-          <a:bodyPr wrap="square" anchor="t" lIns="36576" rIns="36576" tIns="36576" bIns="36576">
-            <a:spAutoFit/>
-          </a:bodyPr>
-          <a:lstStyle/>
-          <a:p>
-            <a:pPr algn="r">
-              <a:buNone/>
-            </a:pPr>
-            <a:r>
-              <a:rPr sz="800" b="0" i="0" spc="-30">
-                <a:solidFill>
-                  <a:srgbClr val="7F7F7F"/>
-                </a:solidFill>
-                <a:latin typeface="나눔스퀘어"/>
-                <a:ea typeface="나눔스퀘어"/>
-                <a:cs typeface="나눔스퀘어"/>
-              </a:rPr>
-              <a:t>9</a:t>
-            </a:r>
+          <p:cNvPr id="6" name="Slide Number Placeholder 5"/>
+          <p:cNvSpPr>
+            <a:spLocks noGrp="1"/>
+          </p:cNvSpPr>
+          <p:nvPr>
+            <p:ph type="sldNum" sz="quarter" idx="12"/>
+          </p:nvPr>
+        </p:nvSpPr>
+        <p:spPr/>
+        <p:txBody>
+          <a:bodyPr/>
+          <a:lstStyle/>
+          <a:p>
+            <a:fld id="{C0166AD1-3E4E-49AB-A7F9-67C30DF503DC}" type="slidenum">
+              <a:rPr lang="ko-KR" altLang="en-US" smtClean="0"/>
+              <a:t>‹#›</a:t>
+            </a:fld>
+            <a:endParaRPr lang="ko-KR" altLang="en-US"/>
           </a:p>
         </p:txBody>
       </p:sp>
